--- a/21_c_study/example/ring_buf/ring_buffer.pptx
+++ b/21_c_study/example/ring_buf/ring_buffer.pptx
@@ -5,19 +5,20 @@
     <p:sldMasterId id="2147483648" r:id="rId1"/>
   </p:sldMasterIdLst>
   <p:notesMasterIdLst>
-    <p:notesMasterId r:id="rId9"/>
+    <p:notesMasterId r:id="rId10"/>
   </p:notesMasterIdLst>
   <p:handoutMasterIdLst>
-    <p:handoutMasterId r:id="rId10"/>
+    <p:handoutMasterId r:id="rId11"/>
   </p:handoutMasterIdLst>
   <p:sldIdLst>
     <p:sldId id="1097" r:id="rId2"/>
     <p:sldId id="1096" r:id="rId3"/>
     <p:sldId id="1098" r:id="rId4"/>
-    <p:sldId id="1099" r:id="rId5"/>
-    <p:sldId id="1100" r:id="rId6"/>
-    <p:sldId id="1101" r:id="rId7"/>
-    <p:sldId id="1102" r:id="rId8"/>
+    <p:sldId id="1103" r:id="rId5"/>
+    <p:sldId id="1099" r:id="rId6"/>
+    <p:sldId id="1100" r:id="rId7"/>
+    <p:sldId id="1101" r:id="rId8"/>
+    <p:sldId id="1102" r:id="rId9"/>
   </p:sldIdLst>
   <p:sldSz cx="12192000" cy="6858000"/>
   <p:notesSz cx="6735763" cy="9866313"/>
@@ -1016,6 +1017,121 @@
         <p:cNvPr id="1" name="">
           <a:extLst>
             <a:ext uri="{FF2B5EF4-FFF2-40B4-BE49-F238E27FC236}">
+              <a16:creationId xmlns:a16="http://schemas.microsoft.com/office/drawing/2014/main" id="{3C2EA5D6-ED18-2A99-5698-7906C3F46FF2}"/>
+            </a:ext>
+          </a:extLst>
+        </p:cNvPr>
+        <p:cNvGrpSpPr/>
+        <p:nvPr/>
+      </p:nvGrpSpPr>
+      <p:grpSpPr>
+        <a:xfrm>
+          <a:off x="0" y="0"/>
+          <a:ext cx="0" cy="0"/>
+          <a:chOff x="0" y="0"/>
+          <a:chExt cx="0" cy="0"/>
+        </a:xfrm>
+      </p:grpSpPr>
+      <p:sp>
+        <p:nvSpPr>
+          <p:cNvPr id="2" name="슬라이드 이미지 개체 틀 1">
+            <a:extLst>
+              <a:ext uri="{FF2B5EF4-FFF2-40B4-BE49-F238E27FC236}">
+                <a16:creationId xmlns:a16="http://schemas.microsoft.com/office/drawing/2014/main" id="{9DE532EA-630D-2E02-CA7C-8A6F84E48721}"/>
+              </a:ext>
+            </a:extLst>
+          </p:cNvPr>
+          <p:cNvSpPr>
+            <a:spLocks noGrp="1" noRot="1" noChangeAspect="1"/>
+          </p:cNvSpPr>
+          <p:nvPr>
+            <p:ph type="sldImg"/>
+          </p:nvPr>
+        </p:nvSpPr>
+        <p:spPr/>
+        <p:txBody>
+          <a:bodyPr/>
+          <a:lstStyle/>
+          <a:p>
+            <a:endParaRPr lang="ko-KR" altLang="en-US" dirty="0"/>
+          </a:p>
+        </p:txBody>
+      </p:sp>
+      <p:sp>
+        <p:nvSpPr>
+          <p:cNvPr id="3" name="슬라이드 노트 개체 틀 2">
+            <a:extLst>
+              <a:ext uri="{FF2B5EF4-FFF2-40B4-BE49-F238E27FC236}">
+                <a16:creationId xmlns:a16="http://schemas.microsoft.com/office/drawing/2014/main" id="{EE588272-FB18-B85E-89EA-E1A25A138F91}"/>
+              </a:ext>
+            </a:extLst>
+          </p:cNvPr>
+          <p:cNvSpPr>
+            <a:spLocks noGrp="1"/>
+          </p:cNvSpPr>
+          <p:nvPr>
+            <p:ph type="body" idx="1"/>
+          </p:nvPr>
+        </p:nvSpPr>
+        <p:spPr/>
+        <p:txBody>
+          <a:bodyPr/>
+          <a:lstStyle/>
+          <a:p>
+            <a:endParaRPr lang="ko-KR" altLang="en-US" dirty="0"/>
+          </a:p>
+        </p:txBody>
+      </p:sp>
+      <p:sp>
+        <p:nvSpPr>
+          <p:cNvPr id="4" name="슬라이드 번호 개체 틀 3">
+            <a:extLst>
+              <a:ext uri="{FF2B5EF4-FFF2-40B4-BE49-F238E27FC236}">
+                <a16:creationId xmlns:a16="http://schemas.microsoft.com/office/drawing/2014/main" id="{A981955B-21F9-ABF3-9F88-5EB1714DC4F3}"/>
+              </a:ext>
+            </a:extLst>
+          </p:cNvPr>
+          <p:cNvSpPr>
+            <a:spLocks noGrp="1"/>
+          </p:cNvSpPr>
+          <p:nvPr>
+            <p:ph type="sldNum" sz="quarter" idx="10"/>
+          </p:nvPr>
+        </p:nvSpPr>
+        <p:spPr/>
+        <p:txBody>
+          <a:bodyPr/>
+          <a:lstStyle/>
+          <a:p>
+            <a:fld id="{B0781F97-5BDF-4CD9-8D31-8F07B370440B}" type="slidenum">
+              <a:rPr lang="ko-KR" altLang="en-US" smtClean="0"/>
+              <a:t>4</a:t>
+            </a:fld>
+            <a:endParaRPr lang="ko-KR" altLang="en-US" dirty="0"/>
+          </a:p>
+        </p:txBody>
+      </p:sp>
+    </p:spTree>
+    <p:extLst>
+      <p:ext uri="{BB962C8B-B14F-4D97-AF65-F5344CB8AC3E}">
+        <p14:creationId xmlns:p14="http://schemas.microsoft.com/office/powerpoint/2010/main" val="3565240564"/>
+      </p:ext>
+    </p:extLst>
+  </p:cSld>
+  <p:clrMapOvr>
+    <a:masterClrMapping/>
+  </p:clrMapOvr>
+</p:notes>
+</file>
+
+<file path=ppt/notesSlides/notesSlide5.xml><?xml version="1.0" encoding="utf-8"?>
+<p:notes xmlns:a="http://schemas.openxmlformats.org/drawingml/2006/main" xmlns:r="http://schemas.openxmlformats.org/officeDocument/2006/relationships" xmlns:p="http://schemas.openxmlformats.org/presentationml/2006/main">
+  <p:cSld>
+    <p:spTree>
+      <p:nvGrpSpPr>
+        <p:cNvPr id="1" name="">
+          <a:extLst>
+            <a:ext uri="{FF2B5EF4-FFF2-40B4-BE49-F238E27FC236}">
               <a16:creationId xmlns:a16="http://schemas.microsoft.com/office/drawing/2014/main" id="{22BA6712-A2D9-2E4A-8CC1-32F3D7F3CF12}"/>
             </a:ext>
           </a:extLst>
@@ -1104,7 +1220,7 @@
           <a:p>
             <a:fld id="{B0781F97-5BDF-4CD9-8D31-8F07B370440B}" type="slidenum">
               <a:rPr lang="ko-KR" altLang="en-US" smtClean="0"/>
-              <a:t>4</a:t>
+              <a:t>5</a:t>
             </a:fld>
             <a:endParaRPr lang="ko-KR" altLang="en-US" dirty="0"/>
           </a:p>
@@ -1123,7 +1239,7 @@
 </p:notes>
 </file>
 
-<file path=ppt/notesSlides/notesSlide5.xml><?xml version="1.0" encoding="utf-8"?>
+<file path=ppt/notesSlides/notesSlide6.xml><?xml version="1.0" encoding="utf-8"?>
 <p:notes xmlns:a="http://schemas.openxmlformats.org/drawingml/2006/main" xmlns:r="http://schemas.openxmlformats.org/officeDocument/2006/relationships" xmlns:p="http://schemas.openxmlformats.org/presentationml/2006/main">
   <p:cSld>
     <p:spTree>
@@ -1219,7 +1335,7 @@
           <a:p>
             <a:fld id="{B0781F97-5BDF-4CD9-8D31-8F07B370440B}" type="slidenum">
               <a:rPr lang="ko-KR" altLang="en-US" smtClean="0"/>
-              <a:t>5</a:t>
+              <a:t>6</a:t>
             </a:fld>
             <a:endParaRPr lang="ko-KR" altLang="en-US" dirty="0"/>
           </a:p>
@@ -1238,7 +1354,7 @@
 </p:notes>
 </file>
 
-<file path=ppt/notesSlides/notesSlide6.xml><?xml version="1.0" encoding="utf-8"?>
+<file path=ppt/notesSlides/notesSlide7.xml><?xml version="1.0" encoding="utf-8"?>
 <p:notes xmlns:a="http://schemas.openxmlformats.org/drawingml/2006/main" xmlns:r="http://schemas.openxmlformats.org/officeDocument/2006/relationships" xmlns:p="http://schemas.openxmlformats.org/presentationml/2006/main">
   <p:cSld>
     <p:spTree>
@@ -1334,7 +1450,7 @@
           <a:p>
             <a:fld id="{B0781F97-5BDF-4CD9-8D31-8F07B370440B}" type="slidenum">
               <a:rPr lang="ko-KR" altLang="en-US" smtClean="0"/>
-              <a:t>6</a:t>
+              <a:t>7</a:t>
             </a:fld>
             <a:endParaRPr lang="ko-KR" altLang="en-US" dirty="0"/>
           </a:p>
@@ -1353,7 +1469,7 @@
 </p:notes>
 </file>
 
-<file path=ppt/notesSlides/notesSlide7.xml><?xml version="1.0" encoding="utf-8"?>
+<file path=ppt/notesSlides/notesSlide8.xml><?xml version="1.0" encoding="utf-8"?>
 <p:notes xmlns:a="http://schemas.openxmlformats.org/drawingml/2006/main" xmlns:r="http://schemas.openxmlformats.org/officeDocument/2006/relationships" xmlns:p="http://schemas.openxmlformats.org/presentationml/2006/main">
   <p:cSld>
     <p:spTree>
@@ -1449,7 +1565,7 @@
           <a:p>
             <a:fld id="{B0781F97-5BDF-4CD9-8D31-8F07B370440B}" type="slidenum">
               <a:rPr lang="ko-KR" altLang="en-US" smtClean="0"/>
-              <a:t>7</a:t>
+              <a:t>8</a:t>
             </a:fld>
             <a:endParaRPr lang="ko-KR" altLang="en-US" dirty="0"/>
           </a:p>
@@ -2126,7 +2242,7 @@
         <p:spPr>
           <a:xfrm>
             <a:off x="1709788" y="2789622"/>
-            <a:ext cx="6096000" cy="1700787"/>
+            <a:ext cx="6096000" cy="2531783"/>
           </a:xfrm>
           <a:prstGeom prst="rect">
             <a:avLst/>
@@ -2197,8 +2313,55 @@
             </a:r>
             <a:r>
               <a:rPr lang="ko-KR" altLang="en-US" b="1" dirty="0"/>
-              <a:t>초기화 및 내부 상태 판단 함수</a:t>
+              <a:t>초기화</a:t>
             </a:r>
+            <a:endParaRPr lang="en-US" altLang="ko-KR" b="1" dirty="0"/>
+          </a:p>
+          <a:p>
+            <a:pPr marL="342900" indent="-342900">
+              <a:lnSpc>
+                <a:spcPct val="150000"/>
+              </a:lnSpc>
+              <a:buFontTx/>
+              <a:buAutoNum type="arabicPeriod"/>
+              <a:defRPr/>
+            </a:pPr>
+            <a:r>
+              <a:rPr lang="en-US" altLang="ko-KR" b="1" dirty="0"/>
+              <a:t>Buffer </a:t>
+            </a:r>
+            <a:r>
+              <a:rPr lang="ko-KR" altLang="en-US" b="1" dirty="0"/>
+              <a:t>입</a:t>
+            </a:r>
+            <a:r>
+              <a:rPr lang="en-US" altLang="ko-KR" b="1" dirty="0"/>
+              <a:t>/</a:t>
+            </a:r>
+            <a:r>
+              <a:rPr lang="ko-KR" altLang="en-US" b="1" dirty="0"/>
+              <a:t>출력 함수</a:t>
+            </a:r>
+            <a:endParaRPr lang="en-US" altLang="ko-KR" b="1" dirty="0"/>
+          </a:p>
+          <a:p>
+            <a:pPr marL="342900" indent="-342900">
+              <a:lnSpc>
+                <a:spcPct val="150000"/>
+              </a:lnSpc>
+              <a:buFontTx/>
+              <a:buAutoNum type="arabicPeriod"/>
+              <a:defRPr/>
+            </a:pPr>
+            <a:r>
+              <a:rPr lang="en-US" altLang="ko-KR" b="1" dirty="0"/>
+              <a:t>Display </a:t>
+            </a:r>
+            <a:r>
+              <a:rPr lang="ko-KR" altLang="en-US" b="1"/>
+              <a:t>기능 </a:t>
+            </a:r>
+            <a:endParaRPr lang="en-US" altLang="ko-KR" b="1" dirty="0"/>
           </a:p>
           <a:p>
             <a:pPr marL="342900" marR="0" lvl="0" indent="-342900" algn="l" defTabSz="914400" rtl="0" eaLnBrk="1" fontAlgn="auto" latinLnBrk="1" hangingPunct="1">
@@ -2219,22 +2382,9 @@
               <a:defRPr/>
             </a:pPr>
             <a:r>
-              <a:rPr lang="en-US" altLang="ko-KR" b="1" dirty="0"/>
-              <a:t>Buffer </a:t>
+              <a:rPr lang="ko-KR" altLang="en-US" b="1" dirty="0"/>
+              <a:t>내부 상태 판단 함수</a:t>
             </a:r>
-            <a:r>
-              <a:rPr lang="ko-KR" altLang="en-US" b="1" dirty="0"/>
-              <a:t>입</a:t>
-            </a:r>
-            <a:r>
-              <a:rPr lang="en-US" altLang="ko-KR" b="1" dirty="0"/>
-              <a:t>/</a:t>
-            </a:r>
-            <a:r>
-              <a:rPr lang="ko-KR" altLang="en-US" b="1" dirty="0"/>
-              <a:t>출력 함수</a:t>
-            </a:r>
-            <a:endParaRPr lang="en-US" altLang="ko-KR" b="1" dirty="0"/>
           </a:p>
           <a:p>
             <a:pPr marL="342900" marR="0" lvl="0" indent="-342900" algn="l" defTabSz="914400" rtl="0" eaLnBrk="1" fontAlgn="auto" latinLnBrk="1" hangingPunct="1">
@@ -5503,7 +5653,7 @@
         </p:nvSpPr>
         <p:spPr>
           <a:xfrm>
-            <a:off x="3138711" y="6219177"/>
+            <a:off x="2733471" y="6138638"/>
             <a:ext cx="7051626" cy="604717"/>
           </a:xfrm>
           <a:prstGeom prst="rect">
@@ -5838,7 +5988,7 @@
         </p:nvGrpSpPr>
         <p:grpSpPr>
           <a:xfrm>
-            <a:off x="4596238" y="2253792"/>
+            <a:off x="664196" y="2316405"/>
             <a:ext cx="827314" cy="625293"/>
             <a:chOff x="7913626" y="234700"/>
             <a:chExt cx="827314" cy="625293"/>
@@ -5964,7 +6114,7 @@
         </p:nvGrpSpPr>
         <p:grpSpPr>
           <a:xfrm>
-            <a:off x="596810" y="3598992"/>
+            <a:off x="4509152" y="3636596"/>
             <a:ext cx="827314" cy="715199"/>
             <a:chOff x="8596086" y="2744558"/>
             <a:chExt cx="827314" cy="715199"/>
@@ -6120,6 +6270,55 @@
               <a:rPr lang="en-US" altLang="ko-KR" sz="1600" b="1" dirty="0"/>
               <a:t>&lt;Circular Queue(Ring buffer)&gt;</a:t>
             </a:r>
+          </a:p>
+        </p:txBody>
+      </p:sp>
+      <p:sp>
+        <p:nvSpPr>
+          <p:cNvPr id="58" name="화살표: 오른쪽 57">
+            <a:extLst>
+              <a:ext uri="{FF2B5EF4-FFF2-40B4-BE49-F238E27FC236}">
+                <a16:creationId xmlns:a16="http://schemas.microsoft.com/office/drawing/2014/main" id="{965AA19A-08E4-27E8-83ED-FB61FF113211}"/>
+              </a:ext>
+            </a:extLst>
+          </p:cNvPr>
+          <p:cNvSpPr/>
+          <p:nvPr/>
+        </p:nvSpPr>
+        <p:spPr>
+          <a:xfrm>
+            <a:off x="1992596" y="2510793"/>
+            <a:ext cx="2015019" cy="94577"/>
+          </a:xfrm>
+          <a:prstGeom prst="rightArrow">
+            <a:avLst/>
+          </a:prstGeom>
+          <a:solidFill>
+            <a:schemeClr val="tx1"/>
+          </a:solidFill>
+        </p:spPr>
+        <p:style>
+          <a:lnRef idx="2">
+            <a:schemeClr val="accent1">
+              <a:shade val="15000"/>
+            </a:schemeClr>
+          </a:lnRef>
+          <a:fillRef idx="1">
+            <a:schemeClr val="accent1"/>
+          </a:fillRef>
+          <a:effectRef idx="0">
+            <a:schemeClr val="accent1"/>
+          </a:effectRef>
+          <a:fontRef idx="minor">
+            <a:schemeClr val="lt1"/>
+          </a:fontRef>
+        </p:style>
+        <p:txBody>
+          <a:bodyPr rtlCol="0" anchor="ctr"/>
+          <a:lstStyle/>
+          <a:p>
+            <a:pPr algn="ctr"/>
+            <a:endParaRPr lang="ko-KR" altLang="en-US"/>
           </a:p>
         </p:txBody>
       </p:sp>
@@ -9503,7 +9702,7 @@
         </p:nvGrpSpPr>
         <p:grpSpPr>
           <a:xfrm>
-            <a:off x="9117438" y="6172021"/>
+            <a:off x="10239175" y="6172021"/>
             <a:ext cx="827314" cy="715199"/>
             <a:chOff x="8596086" y="2744558"/>
             <a:chExt cx="827314" cy="715199"/>
@@ -9636,7 +9835,7 @@
         </p:nvGrpSpPr>
         <p:grpSpPr>
           <a:xfrm>
-            <a:off x="9117439" y="4744563"/>
+            <a:off x="10239176" y="4744563"/>
             <a:ext cx="827314" cy="625293"/>
             <a:chOff x="7913626" y="234700"/>
             <a:chExt cx="827314" cy="625293"/>
@@ -10177,6 +10376,4028 @@
 </file>
 
 <file path=ppt/slides/slide4.xml><?xml version="1.0" encoding="utf-8"?>
+<p:sld xmlns:a="http://schemas.openxmlformats.org/drawingml/2006/main" xmlns:r="http://schemas.openxmlformats.org/officeDocument/2006/relationships" xmlns:p="http://schemas.openxmlformats.org/presentationml/2006/main">
+  <p:cSld>
+    <p:spTree>
+      <p:nvGrpSpPr>
+        <p:cNvPr id="1" name="">
+          <a:extLst>
+            <a:ext uri="{FF2B5EF4-FFF2-40B4-BE49-F238E27FC236}">
+              <a16:creationId xmlns:a16="http://schemas.microsoft.com/office/drawing/2014/main" id="{29E411CB-BF7E-D212-2E4D-8B7CC9482C6F}"/>
+            </a:ext>
+          </a:extLst>
+        </p:cNvPr>
+        <p:cNvGrpSpPr/>
+        <p:nvPr/>
+      </p:nvGrpSpPr>
+      <p:grpSpPr>
+        <a:xfrm>
+          <a:off x="0" y="0"/>
+          <a:ext cx="0" cy="0"/>
+          <a:chOff x="0" y="0"/>
+          <a:chExt cx="0" cy="0"/>
+        </a:xfrm>
+      </p:grpSpPr>
+      <p:grpSp>
+        <p:nvGrpSpPr>
+          <p:cNvPr id="7" name="그룹 6">
+            <a:extLst>
+              <a:ext uri="{FF2B5EF4-FFF2-40B4-BE49-F238E27FC236}">
+                <a16:creationId xmlns:a16="http://schemas.microsoft.com/office/drawing/2014/main" id="{E4BE8BB2-BB1C-6978-D0CE-CCC1D2F76A72}"/>
+              </a:ext>
+            </a:extLst>
+          </p:cNvPr>
+          <p:cNvGrpSpPr/>
+          <p:nvPr/>
+        </p:nvGrpSpPr>
+        <p:grpSpPr>
+          <a:xfrm>
+            <a:off x="399813" y="141797"/>
+            <a:ext cx="4204565" cy="307777"/>
+            <a:chOff x="426280" y="283235"/>
+            <a:chExt cx="4205532" cy="307848"/>
+          </a:xfrm>
+        </p:grpSpPr>
+        <p:sp>
+          <p:nvSpPr>
+            <p:cNvPr id="8" name="TextBox 7">
+              <a:extLst>
+                <a:ext uri="{FF2B5EF4-FFF2-40B4-BE49-F238E27FC236}">
+                  <a16:creationId xmlns:a16="http://schemas.microsoft.com/office/drawing/2014/main" id="{CF3E6D77-70ED-879A-47C0-E6CEAA39575E}"/>
+                </a:ext>
+              </a:extLst>
+            </p:cNvPr>
+            <p:cNvSpPr txBox="1"/>
+            <p:nvPr/>
+          </p:nvSpPr>
+          <p:spPr>
+            <a:xfrm>
+              <a:off x="426280" y="283235"/>
+              <a:ext cx="149115" cy="307848"/>
+            </a:xfrm>
+            <a:prstGeom prst="rect">
+              <a:avLst/>
+            </a:prstGeom>
+            <a:noFill/>
+          </p:spPr>
+          <p:txBody>
+            <a:bodyPr wrap="none" lIns="0" tIns="0" rIns="0" bIns="0" rtlCol="0">
+              <a:spAutoFit/>
+            </a:bodyPr>
+            <a:lstStyle/>
+            <a:p>
+              <a:pPr algn="r"/>
+              <a:r>
+                <a:rPr lang="en-US" altLang="ko-KR" sz="2000" b="1" dirty="0">
+                  <a:ln>
+                    <a:solidFill>
+                      <a:schemeClr val="tx1">
+                        <a:alpha val="0"/>
+                      </a:schemeClr>
+                    </a:solidFill>
+                  </a:ln>
+                  <a:solidFill>
+                    <a:srgbClr val="2E71EA"/>
+                  </a:solidFill>
+                  <a:latin typeface="맑은 고딕" panose="020B0503020000020004" pitchFamily="50" charset="-127"/>
+                  <a:ea typeface="G마켓 산스 TTF Bold" panose="02000000000000000000" pitchFamily="2" charset="-127"/>
+                </a:rPr>
+                <a:t>2</a:t>
+              </a:r>
+            </a:p>
+          </p:txBody>
+        </p:sp>
+        <p:sp>
+          <p:nvSpPr>
+            <p:cNvPr id="9" name="TextBox 8">
+              <a:extLst>
+                <a:ext uri="{FF2B5EF4-FFF2-40B4-BE49-F238E27FC236}">
+                  <a16:creationId xmlns:a16="http://schemas.microsoft.com/office/drawing/2014/main" id="{F8DB1547-956A-F800-310E-B6290B2CD3C5}"/>
+                </a:ext>
+              </a:extLst>
+            </p:cNvPr>
+            <p:cNvSpPr txBox="1"/>
+            <p:nvPr/>
+          </p:nvSpPr>
+          <p:spPr>
+            <a:xfrm>
+              <a:off x="690724" y="298625"/>
+              <a:ext cx="3941088" cy="277063"/>
+            </a:xfrm>
+            <a:prstGeom prst="rect">
+              <a:avLst/>
+            </a:prstGeom>
+            <a:noFill/>
+          </p:spPr>
+          <p:txBody>
+            <a:bodyPr wrap="none" lIns="0" tIns="0" rIns="0" bIns="0" rtlCol="0">
+              <a:spAutoFit/>
+            </a:bodyPr>
+            <a:lstStyle/>
+            <a:p>
+              <a:r>
+                <a:rPr lang="en-US" altLang="ko-KR" b="1" dirty="0">
+                  <a:ln>
+                    <a:solidFill>
+                      <a:schemeClr val="tx1">
+                        <a:alpha val="0"/>
+                      </a:schemeClr>
+                    </a:solidFill>
+                  </a:ln>
+                  <a:solidFill>
+                    <a:srgbClr val="2E71EA"/>
+                  </a:solidFill>
+                  <a:latin typeface="맑은 고딕" panose="020B0503020000020004" pitchFamily="50" charset="-127"/>
+                  <a:ea typeface="맑은 고딕" panose="020B0503020000020004" pitchFamily="50" charset="-127"/>
+                  <a:cs typeface="Pretendard SemiBold" pitchFamily="50" charset="-127"/>
+                </a:rPr>
+                <a:t>Buffer</a:t>
+              </a:r>
+              <a:r>
+                <a:rPr lang="ko-KR" altLang="en-US" b="1" dirty="0">
+                  <a:ln>
+                    <a:solidFill>
+                      <a:schemeClr val="tx1">
+                        <a:alpha val="0"/>
+                      </a:schemeClr>
+                    </a:solidFill>
+                  </a:ln>
+                  <a:solidFill>
+                    <a:srgbClr val="2E71EA"/>
+                  </a:solidFill>
+                  <a:latin typeface="맑은 고딕" panose="020B0503020000020004" pitchFamily="50" charset="-127"/>
+                  <a:ea typeface="맑은 고딕" panose="020B0503020000020004" pitchFamily="50" charset="-127"/>
+                  <a:cs typeface="Pretendard SemiBold" pitchFamily="50" charset="-127"/>
+                </a:rPr>
+                <a:t> 초기화 및 내부 상태 판단 함수</a:t>
+              </a:r>
+            </a:p>
+          </p:txBody>
+        </p:sp>
+        <p:cxnSp>
+          <p:nvCxnSpPr>
+            <p:cNvPr id="10" name="직선 연결선 9">
+              <a:extLst>
+                <a:ext uri="{FF2B5EF4-FFF2-40B4-BE49-F238E27FC236}">
+                  <a16:creationId xmlns:a16="http://schemas.microsoft.com/office/drawing/2014/main" id="{13A87103-2C66-3D03-D0F9-7B5EA53D2050}"/>
+                </a:ext>
+              </a:extLst>
+            </p:cNvPr>
+            <p:cNvCxnSpPr/>
+            <p:nvPr/>
+          </p:nvCxnSpPr>
+          <p:spPr>
+            <a:xfrm>
+              <a:off x="623322" y="345002"/>
+              <a:ext cx="0" cy="184242"/>
+            </a:xfrm>
+            <a:prstGeom prst="line">
+              <a:avLst/>
+            </a:prstGeom>
+            <a:ln>
+              <a:solidFill>
+                <a:srgbClr val="2E71EA"/>
+              </a:solidFill>
+            </a:ln>
+          </p:spPr>
+          <p:style>
+            <a:lnRef idx="1">
+              <a:schemeClr val="accent1"/>
+            </a:lnRef>
+            <a:fillRef idx="0">
+              <a:schemeClr val="accent1"/>
+            </a:fillRef>
+            <a:effectRef idx="0">
+              <a:schemeClr val="accent1"/>
+            </a:effectRef>
+            <a:fontRef idx="minor">
+              <a:schemeClr val="tx1"/>
+            </a:fontRef>
+          </p:style>
+        </p:cxnSp>
+      </p:grpSp>
+      <p:sp>
+        <p:nvSpPr>
+          <p:cNvPr id="3" name="TextBox 2">
+            <a:extLst>
+              <a:ext uri="{FF2B5EF4-FFF2-40B4-BE49-F238E27FC236}">
+                <a16:creationId xmlns:a16="http://schemas.microsoft.com/office/drawing/2014/main" id="{9CA05833-5CC4-4E23-193C-0FE9D2611227}"/>
+              </a:ext>
+            </a:extLst>
+          </p:cNvPr>
+          <p:cNvSpPr txBox="1"/>
+          <p:nvPr/>
+        </p:nvSpPr>
+        <p:spPr>
+          <a:xfrm>
+            <a:off x="232112" y="514736"/>
+            <a:ext cx="1241494" cy="361959"/>
+          </a:xfrm>
+          <a:prstGeom prst="rect">
+            <a:avLst/>
+          </a:prstGeom>
+          <a:noFill/>
+        </p:spPr>
+        <p:txBody>
+          <a:bodyPr wrap="none" lIns="0" tIns="0" rIns="0" bIns="0" rtlCol="0">
+            <a:spAutoFit/>
+          </a:bodyPr>
+          <a:lstStyle/>
+          <a:p>
+            <a:pPr>
+              <a:lnSpc>
+                <a:spcPct val="150000"/>
+              </a:lnSpc>
+            </a:pPr>
+            <a:r>
+              <a:rPr lang="en-US" altLang="ko-KR" b="1" dirty="0">
+                <a:ln>
+                  <a:solidFill>
+                    <a:schemeClr val="tx1">
+                      <a:alpha val="0"/>
+                    </a:schemeClr>
+                  </a:solidFill>
+                </a:ln>
+                <a:solidFill>
+                  <a:srgbClr val="2E71EA"/>
+                </a:solidFill>
+                <a:latin typeface="맑은 고딕" panose="020B0503020000020004" pitchFamily="50" charset="-127"/>
+                <a:ea typeface="맑은 고딕" panose="020B0503020000020004" pitchFamily="50" charset="-127"/>
+                <a:cs typeface="Pretendard SemiBold" pitchFamily="50" charset="-127"/>
+              </a:rPr>
+              <a:t>- </a:t>
+            </a:r>
+            <a:r>
+              <a:rPr lang="en-US" altLang="ko-KR" b="1" dirty="0" err="1">
+                <a:ln>
+                  <a:solidFill>
+                    <a:schemeClr val="tx1">
+                      <a:alpha val="0"/>
+                    </a:schemeClr>
+                  </a:solidFill>
+                </a:ln>
+                <a:solidFill>
+                  <a:srgbClr val="2E71EA"/>
+                </a:solidFill>
+                <a:latin typeface="맑은 고딕" panose="020B0503020000020004" pitchFamily="50" charset="-127"/>
+                <a:ea typeface="맑은 고딕" panose="020B0503020000020004" pitchFamily="50" charset="-127"/>
+                <a:cs typeface="Pretendard SemiBold" pitchFamily="50" charset="-127"/>
+              </a:rPr>
+              <a:t>init_ring</a:t>
+            </a:r>
+            <a:r>
+              <a:rPr lang="en-US" altLang="ko-KR" b="1" dirty="0">
+                <a:ln>
+                  <a:solidFill>
+                    <a:schemeClr val="tx1">
+                      <a:alpha val="0"/>
+                    </a:schemeClr>
+                  </a:solidFill>
+                </a:ln>
+                <a:solidFill>
+                  <a:srgbClr val="2E71EA"/>
+                </a:solidFill>
+                <a:latin typeface="맑은 고딕" panose="020B0503020000020004" pitchFamily="50" charset="-127"/>
+                <a:ea typeface="맑은 고딕" panose="020B0503020000020004" pitchFamily="50" charset="-127"/>
+                <a:cs typeface="Pretendard SemiBold" pitchFamily="50" charset="-127"/>
+              </a:rPr>
+              <a:t>()</a:t>
+            </a:r>
+            <a:endParaRPr lang="ko-KR" altLang="en-US" b="1" dirty="0">
+              <a:ln>
+                <a:solidFill>
+                  <a:schemeClr val="tx1">
+                    <a:alpha val="0"/>
+                  </a:schemeClr>
+                </a:solidFill>
+              </a:ln>
+              <a:solidFill>
+                <a:srgbClr val="2E71EA"/>
+              </a:solidFill>
+              <a:latin typeface="맑은 고딕" panose="020B0503020000020004" pitchFamily="50" charset="-127"/>
+              <a:ea typeface="맑은 고딕" panose="020B0503020000020004" pitchFamily="50" charset="-127"/>
+              <a:cs typeface="Pretendard SemiBold" pitchFamily="50" charset="-127"/>
+            </a:endParaRPr>
+          </a:p>
+        </p:txBody>
+      </p:sp>
+      <p:sp>
+        <p:nvSpPr>
+          <p:cNvPr id="11" name="TextBox 10">
+            <a:extLst>
+              <a:ext uri="{FF2B5EF4-FFF2-40B4-BE49-F238E27FC236}">
+                <a16:creationId xmlns:a16="http://schemas.microsoft.com/office/drawing/2014/main" id="{0167D34C-77C5-6067-49C9-EC223480B489}"/>
+              </a:ext>
+            </a:extLst>
+          </p:cNvPr>
+          <p:cNvSpPr txBox="1"/>
+          <p:nvPr/>
+        </p:nvSpPr>
+        <p:spPr>
+          <a:xfrm>
+            <a:off x="232112" y="2060179"/>
+            <a:ext cx="2244204" cy="361959"/>
+          </a:xfrm>
+          <a:prstGeom prst="rect">
+            <a:avLst/>
+          </a:prstGeom>
+          <a:noFill/>
+        </p:spPr>
+        <p:txBody>
+          <a:bodyPr wrap="none" lIns="0" tIns="0" rIns="0" bIns="0" rtlCol="0">
+            <a:spAutoFit/>
+          </a:bodyPr>
+          <a:lstStyle/>
+          <a:p>
+            <a:pPr>
+              <a:lnSpc>
+                <a:spcPct val="150000"/>
+              </a:lnSpc>
+            </a:pPr>
+            <a:r>
+              <a:rPr lang="en-US" altLang="ko-KR" b="1" dirty="0">
+                <a:ln>
+                  <a:solidFill>
+                    <a:schemeClr val="tx1">
+                      <a:alpha val="0"/>
+                    </a:schemeClr>
+                  </a:solidFill>
+                </a:ln>
+                <a:solidFill>
+                  <a:srgbClr val="2E71EA"/>
+                </a:solidFill>
+                <a:latin typeface="맑은 고딕" panose="020B0503020000020004" pitchFamily="50" charset="-127"/>
+                <a:ea typeface="맑은 고딕" panose="020B0503020000020004" pitchFamily="50" charset="-127"/>
+                <a:cs typeface="Pretendard SemiBold" pitchFamily="50" charset="-127"/>
+              </a:rPr>
+              <a:t>- </a:t>
+            </a:r>
+            <a:r>
+              <a:rPr lang="en-US" altLang="ko-KR" b="1" dirty="0" err="1">
+                <a:ln>
+                  <a:solidFill>
+                    <a:schemeClr val="tx1">
+                      <a:alpha val="0"/>
+                    </a:schemeClr>
+                  </a:solidFill>
+                </a:ln>
+                <a:solidFill>
+                  <a:srgbClr val="2E71EA"/>
+                </a:solidFill>
+                <a:latin typeface="맑은 고딕" panose="020B0503020000020004" pitchFamily="50" charset="-127"/>
+                <a:ea typeface="맑은 고딕" panose="020B0503020000020004" pitchFamily="50" charset="-127"/>
+                <a:cs typeface="Pretendard SemiBold" pitchFamily="50" charset="-127"/>
+              </a:rPr>
+              <a:t>is_full</a:t>
+            </a:r>
+            <a:r>
+              <a:rPr lang="en-US" altLang="ko-KR" b="1" dirty="0">
+                <a:ln>
+                  <a:solidFill>
+                    <a:schemeClr val="tx1">
+                      <a:alpha val="0"/>
+                    </a:schemeClr>
+                  </a:solidFill>
+                </a:ln>
+                <a:solidFill>
+                  <a:srgbClr val="2E71EA"/>
+                </a:solidFill>
+                <a:latin typeface="맑은 고딕" panose="020B0503020000020004" pitchFamily="50" charset="-127"/>
+                <a:ea typeface="맑은 고딕" panose="020B0503020000020004" pitchFamily="50" charset="-127"/>
+                <a:cs typeface="Pretendard SemiBold" pitchFamily="50" charset="-127"/>
+              </a:rPr>
+              <a:t>(), </a:t>
+            </a:r>
+            <a:r>
+              <a:rPr lang="en-US" altLang="ko-KR" b="1" dirty="0" err="1">
+                <a:ln>
+                  <a:solidFill>
+                    <a:schemeClr val="tx1">
+                      <a:alpha val="0"/>
+                    </a:schemeClr>
+                  </a:solidFill>
+                </a:ln>
+                <a:solidFill>
+                  <a:srgbClr val="2E71EA"/>
+                </a:solidFill>
+                <a:latin typeface="맑은 고딕" panose="020B0503020000020004" pitchFamily="50" charset="-127"/>
+                <a:ea typeface="맑은 고딕" panose="020B0503020000020004" pitchFamily="50" charset="-127"/>
+                <a:cs typeface="Pretendard SemiBold" pitchFamily="50" charset="-127"/>
+              </a:rPr>
+              <a:t>is_empty</a:t>
+            </a:r>
+            <a:r>
+              <a:rPr lang="en-US" altLang="ko-KR" b="1" dirty="0">
+                <a:ln>
+                  <a:solidFill>
+                    <a:schemeClr val="tx1">
+                      <a:alpha val="0"/>
+                    </a:schemeClr>
+                  </a:solidFill>
+                </a:ln>
+                <a:solidFill>
+                  <a:srgbClr val="2E71EA"/>
+                </a:solidFill>
+                <a:latin typeface="맑은 고딕" panose="020B0503020000020004" pitchFamily="50" charset="-127"/>
+                <a:ea typeface="맑은 고딕" panose="020B0503020000020004" pitchFamily="50" charset="-127"/>
+                <a:cs typeface="Pretendard SemiBold" pitchFamily="50" charset="-127"/>
+              </a:rPr>
+              <a:t>()</a:t>
+            </a:r>
+            <a:endParaRPr lang="ko-KR" altLang="en-US" b="1" dirty="0">
+              <a:ln>
+                <a:solidFill>
+                  <a:schemeClr val="tx1">
+                    <a:alpha val="0"/>
+                  </a:schemeClr>
+                </a:solidFill>
+              </a:ln>
+              <a:solidFill>
+                <a:srgbClr val="2E71EA"/>
+              </a:solidFill>
+              <a:latin typeface="맑은 고딕" panose="020B0503020000020004" pitchFamily="50" charset="-127"/>
+              <a:ea typeface="맑은 고딕" panose="020B0503020000020004" pitchFamily="50" charset="-127"/>
+              <a:cs typeface="Pretendard SemiBold" pitchFamily="50" charset="-127"/>
+            </a:endParaRPr>
+          </a:p>
+        </p:txBody>
+      </p:sp>
+      <p:sp>
+        <p:nvSpPr>
+          <p:cNvPr id="17" name="TextBox 16">
+            <a:extLst>
+              <a:ext uri="{FF2B5EF4-FFF2-40B4-BE49-F238E27FC236}">
+                <a16:creationId xmlns:a16="http://schemas.microsoft.com/office/drawing/2014/main" id="{371F3B48-B19F-96F3-E45A-662464E347D2}"/>
+              </a:ext>
+            </a:extLst>
+          </p:cNvPr>
+          <p:cNvSpPr txBox="1"/>
+          <p:nvPr/>
+        </p:nvSpPr>
+        <p:spPr>
+          <a:xfrm>
+            <a:off x="7242180" y="676176"/>
+            <a:ext cx="2119170" cy="281552"/>
+          </a:xfrm>
+          <a:prstGeom prst="rect">
+            <a:avLst/>
+          </a:prstGeom>
+          <a:noFill/>
+        </p:spPr>
+        <p:txBody>
+          <a:bodyPr wrap="none" lIns="0" tIns="0" rIns="0" bIns="0" rtlCol="0">
+            <a:spAutoFit/>
+          </a:bodyPr>
+          <a:lstStyle/>
+          <a:p>
+            <a:pPr>
+              <a:lnSpc>
+                <a:spcPct val="150000"/>
+              </a:lnSpc>
+            </a:pPr>
+            <a:r>
+              <a:rPr lang="en-US" altLang="ko-KR" sz="1400" dirty="0">
+                <a:ln>
+                  <a:solidFill>
+                    <a:schemeClr val="tx1">
+                      <a:alpha val="0"/>
+                    </a:schemeClr>
+                  </a:solidFill>
+                </a:ln>
+                <a:latin typeface="맑은 고딕" panose="020B0503020000020004" pitchFamily="50" charset="-127"/>
+                <a:ea typeface="맑은 고딕" panose="020B0503020000020004" pitchFamily="50" charset="-127"/>
+                <a:cs typeface="Pretendard SemiBold" pitchFamily="50" charset="-127"/>
+              </a:rPr>
+              <a:t>-</a:t>
+            </a:r>
+            <a:r>
+              <a:rPr lang="ko-KR" altLang="en-US" sz="1400" dirty="0">
+                <a:ln>
+                  <a:solidFill>
+                    <a:schemeClr val="tx1">
+                      <a:alpha val="0"/>
+                    </a:schemeClr>
+                  </a:solidFill>
+                </a:ln>
+                <a:latin typeface="맑은 고딕" panose="020B0503020000020004" pitchFamily="50" charset="-127"/>
+                <a:ea typeface="맑은 고딕" panose="020B0503020000020004" pitchFamily="50" charset="-127"/>
+                <a:cs typeface="Pretendard SemiBold" pitchFamily="50" charset="-127"/>
+              </a:rPr>
+              <a:t>구조체의 각 요소 초기화</a:t>
+            </a:r>
+            <a:r>
+              <a:rPr lang="en-US" altLang="ko-KR" sz="1400" dirty="0">
+                <a:ln>
+                  <a:solidFill>
+                    <a:schemeClr val="tx1">
+                      <a:alpha val="0"/>
+                    </a:schemeClr>
+                  </a:solidFill>
+                </a:ln>
+                <a:latin typeface="맑은 고딕" panose="020B0503020000020004" pitchFamily="50" charset="-127"/>
+                <a:ea typeface="맑은 고딕" panose="020B0503020000020004" pitchFamily="50" charset="-127"/>
+                <a:cs typeface="Pretendard SemiBold" pitchFamily="50" charset="-127"/>
+              </a:rPr>
+              <a:t> </a:t>
+            </a:r>
+            <a:endParaRPr lang="ko-KR" altLang="en-US" sz="1400" dirty="0">
+              <a:ln>
+                <a:solidFill>
+                  <a:schemeClr val="tx1">
+                    <a:alpha val="0"/>
+                  </a:schemeClr>
+                </a:solidFill>
+              </a:ln>
+              <a:latin typeface="맑은 고딕" panose="020B0503020000020004" pitchFamily="50" charset="-127"/>
+              <a:ea typeface="맑은 고딕" panose="020B0503020000020004" pitchFamily="50" charset="-127"/>
+              <a:cs typeface="Pretendard SemiBold" pitchFamily="50" charset="-127"/>
+            </a:endParaRPr>
+          </a:p>
+        </p:txBody>
+      </p:sp>
+      <p:graphicFrame>
+        <p:nvGraphicFramePr>
+          <p:cNvPr id="20" name="표 19">
+            <a:extLst>
+              <a:ext uri="{FF2B5EF4-FFF2-40B4-BE49-F238E27FC236}">
+                <a16:creationId xmlns:a16="http://schemas.microsoft.com/office/drawing/2014/main" id="{2C75DF8A-70FE-39F9-29BD-8A1457D8ED2E}"/>
+              </a:ext>
+            </a:extLst>
+          </p:cNvPr>
+          <p:cNvGraphicFramePr>
+            <a:graphicFrameLocks noGrp="1"/>
+          </p:cNvGraphicFramePr>
+          <p:nvPr/>
+        </p:nvGraphicFramePr>
+        <p:xfrm>
+          <a:off x="5485911" y="1102675"/>
+          <a:ext cx="5864260" cy="731520"/>
+        </p:xfrm>
+        <a:graphic>
+          <a:graphicData uri="http://schemas.openxmlformats.org/drawingml/2006/table">
+            <a:tbl>
+              <a:tblPr firstRow="1" bandRow="1">
+                <a:tableStyleId>{5C22544A-7EE6-4342-B048-85BDC9FD1C3A}</a:tableStyleId>
+              </a:tblPr>
+              <a:tblGrid>
+                <a:gridCol w="1172852">
+                  <a:extLst>
+                    <a:ext uri="{9D8B030D-6E8A-4147-A177-3AD203B41FA5}">
+                      <a16:colId xmlns:a16="http://schemas.microsoft.com/office/drawing/2014/main" val="2978345313"/>
+                    </a:ext>
+                  </a:extLst>
+                </a:gridCol>
+                <a:gridCol w="1172852">
+                  <a:extLst>
+                    <a:ext uri="{9D8B030D-6E8A-4147-A177-3AD203B41FA5}">
+                      <a16:colId xmlns:a16="http://schemas.microsoft.com/office/drawing/2014/main" val="516520693"/>
+                    </a:ext>
+                  </a:extLst>
+                </a:gridCol>
+                <a:gridCol w="1172852">
+                  <a:extLst>
+                    <a:ext uri="{9D8B030D-6E8A-4147-A177-3AD203B41FA5}">
+                      <a16:colId xmlns:a16="http://schemas.microsoft.com/office/drawing/2014/main" val="411927753"/>
+                    </a:ext>
+                  </a:extLst>
+                </a:gridCol>
+                <a:gridCol w="1172852">
+                  <a:extLst>
+                    <a:ext uri="{9D8B030D-6E8A-4147-A177-3AD203B41FA5}">
+                      <a16:colId xmlns:a16="http://schemas.microsoft.com/office/drawing/2014/main" val="2282447059"/>
+                    </a:ext>
+                  </a:extLst>
+                </a:gridCol>
+                <a:gridCol w="1172852">
+                  <a:extLst>
+                    <a:ext uri="{9D8B030D-6E8A-4147-A177-3AD203B41FA5}">
+                      <a16:colId xmlns:a16="http://schemas.microsoft.com/office/drawing/2014/main" val="1506443707"/>
+                    </a:ext>
+                  </a:extLst>
+                </a:gridCol>
+              </a:tblGrid>
+              <a:tr h="286818">
+                <a:tc>
+                  <a:txBody>
+                    <a:bodyPr/>
+                    <a:lstStyle/>
+                    <a:p>
+                      <a:pPr algn="ctr" latinLnBrk="1"/>
+                      <a:r>
+                        <a:rPr lang="en-US" altLang="ko-KR" b="0" dirty="0">
+                          <a:solidFill>
+                            <a:schemeClr val="tx1"/>
+                          </a:solidFill>
+                        </a:rPr>
+                        <a:t>[0]</a:t>
+                      </a:r>
+                      <a:endParaRPr lang="ko-KR" altLang="en-US" b="0" dirty="0">
+                        <a:solidFill>
+                          <a:schemeClr val="tx1"/>
+                        </a:solidFill>
+                      </a:endParaRPr>
+                    </a:p>
+                  </a:txBody>
+                  <a:tcPr>
+                    <a:lnL w="12700" cap="flat" cmpd="sng" algn="ctr">
+                      <a:solidFill>
+                        <a:schemeClr val="tx1"/>
+                      </a:solidFill>
+                      <a:prstDash val="solid"/>
+                      <a:round/>
+                      <a:headEnd type="none" w="med" len="med"/>
+                      <a:tailEnd type="none" w="med" len="med"/>
+                    </a:lnL>
+                    <a:lnR w="12700" cap="flat" cmpd="sng" algn="ctr">
+                      <a:solidFill>
+                        <a:schemeClr val="tx1"/>
+                      </a:solidFill>
+                      <a:prstDash val="solid"/>
+                      <a:round/>
+                      <a:headEnd type="none" w="med" len="med"/>
+                      <a:tailEnd type="none" w="med" len="med"/>
+                    </a:lnR>
+                    <a:lnT w="12700" cap="flat" cmpd="sng" algn="ctr">
+                      <a:solidFill>
+                        <a:schemeClr val="tx1"/>
+                      </a:solidFill>
+                      <a:prstDash val="solid"/>
+                      <a:round/>
+                      <a:headEnd type="none" w="med" len="med"/>
+                      <a:tailEnd type="none" w="med" len="med"/>
+                    </a:lnT>
+                    <a:lnB w="12700" cap="flat" cmpd="sng" algn="ctr">
+                      <a:solidFill>
+                        <a:schemeClr val="tx1"/>
+                      </a:solidFill>
+                      <a:prstDash val="solid"/>
+                      <a:round/>
+                      <a:headEnd type="none" w="med" len="med"/>
+                      <a:tailEnd type="none" w="med" len="med"/>
+                    </a:lnB>
+                    <a:noFill/>
+                  </a:tcPr>
+                </a:tc>
+                <a:tc>
+                  <a:txBody>
+                    <a:bodyPr/>
+                    <a:lstStyle/>
+                    <a:p>
+                      <a:pPr algn="ctr" latinLnBrk="1"/>
+                      <a:r>
+                        <a:rPr lang="en-US" altLang="ko-KR" b="0" dirty="0">
+                          <a:solidFill>
+                            <a:schemeClr val="tx1"/>
+                          </a:solidFill>
+                        </a:rPr>
+                        <a:t>[1]</a:t>
+                      </a:r>
+                      <a:endParaRPr lang="ko-KR" altLang="en-US" dirty="0">
+                        <a:solidFill>
+                          <a:schemeClr val="tx1"/>
+                        </a:solidFill>
+                      </a:endParaRPr>
+                    </a:p>
+                  </a:txBody>
+                  <a:tcPr>
+                    <a:lnL w="12700" cap="flat" cmpd="sng" algn="ctr">
+                      <a:solidFill>
+                        <a:schemeClr val="tx1"/>
+                      </a:solidFill>
+                      <a:prstDash val="solid"/>
+                      <a:round/>
+                      <a:headEnd type="none" w="med" len="med"/>
+                      <a:tailEnd type="none" w="med" len="med"/>
+                    </a:lnL>
+                    <a:lnR w="12700" cap="flat" cmpd="sng" algn="ctr">
+                      <a:solidFill>
+                        <a:schemeClr val="tx1"/>
+                      </a:solidFill>
+                      <a:prstDash val="solid"/>
+                      <a:round/>
+                      <a:headEnd type="none" w="med" len="med"/>
+                      <a:tailEnd type="none" w="med" len="med"/>
+                    </a:lnR>
+                    <a:lnT w="12700" cap="flat" cmpd="sng" algn="ctr">
+                      <a:solidFill>
+                        <a:schemeClr val="tx1"/>
+                      </a:solidFill>
+                      <a:prstDash val="solid"/>
+                      <a:round/>
+                      <a:headEnd type="none" w="med" len="med"/>
+                      <a:tailEnd type="none" w="med" len="med"/>
+                    </a:lnT>
+                    <a:lnB w="12700" cap="flat" cmpd="sng" algn="ctr">
+                      <a:solidFill>
+                        <a:schemeClr val="tx1"/>
+                      </a:solidFill>
+                      <a:prstDash val="solid"/>
+                      <a:round/>
+                      <a:headEnd type="none" w="med" len="med"/>
+                      <a:tailEnd type="none" w="med" len="med"/>
+                    </a:lnB>
+                    <a:noFill/>
+                  </a:tcPr>
+                </a:tc>
+                <a:tc>
+                  <a:txBody>
+                    <a:bodyPr/>
+                    <a:lstStyle/>
+                    <a:p>
+                      <a:pPr algn="ctr" latinLnBrk="1"/>
+                      <a:r>
+                        <a:rPr lang="en-US" altLang="ko-KR" b="0" dirty="0">
+                          <a:solidFill>
+                            <a:schemeClr val="tx1"/>
+                          </a:solidFill>
+                        </a:rPr>
+                        <a:t>[2]</a:t>
+                      </a:r>
+                      <a:endParaRPr lang="ko-KR" altLang="en-US" dirty="0">
+                        <a:solidFill>
+                          <a:schemeClr val="tx1"/>
+                        </a:solidFill>
+                      </a:endParaRPr>
+                    </a:p>
+                  </a:txBody>
+                  <a:tcPr>
+                    <a:lnL w="12700" cap="flat" cmpd="sng" algn="ctr">
+                      <a:solidFill>
+                        <a:schemeClr val="tx1"/>
+                      </a:solidFill>
+                      <a:prstDash val="solid"/>
+                      <a:round/>
+                      <a:headEnd type="none" w="med" len="med"/>
+                      <a:tailEnd type="none" w="med" len="med"/>
+                    </a:lnL>
+                    <a:lnR w="12700" cap="flat" cmpd="sng" algn="ctr">
+                      <a:solidFill>
+                        <a:schemeClr val="tx1"/>
+                      </a:solidFill>
+                      <a:prstDash val="solid"/>
+                      <a:round/>
+                      <a:headEnd type="none" w="med" len="med"/>
+                      <a:tailEnd type="none" w="med" len="med"/>
+                    </a:lnR>
+                    <a:lnT w="12700" cap="flat" cmpd="sng" algn="ctr">
+                      <a:solidFill>
+                        <a:schemeClr val="tx1"/>
+                      </a:solidFill>
+                      <a:prstDash val="solid"/>
+                      <a:round/>
+                      <a:headEnd type="none" w="med" len="med"/>
+                      <a:tailEnd type="none" w="med" len="med"/>
+                    </a:lnT>
+                    <a:lnB w="12700" cap="flat" cmpd="sng" algn="ctr">
+                      <a:solidFill>
+                        <a:schemeClr val="tx1"/>
+                      </a:solidFill>
+                      <a:prstDash val="solid"/>
+                      <a:round/>
+                      <a:headEnd type="none" w="med" len="med"/>
+                      <a:tailEnd type="none" w="med" len="med"/>
+                    </a:lnB>
+                    <a:noFill/>
+                  </a:tcPr>
+                </a:tc>
+                <a:tc>
+                  <a:txBody>
+                    <a:bodyPr/>
+                    <a:lstStyle/>
+                    <a:p>
+                      <a:pPr algn="ctr" latinLnBrk="1"/>
+                      <a:r>
+                        <a:rPr lang="en-US" altLang="ko-KR" b="0" dirty="0">
+                          <a:solidFill>
+                            <a:schemeClr val="tx1"/>
+                          </a:solidFill>
+                        </a:rPr>
+                        <a:t>[3]</a:t>
+                      </a:r>
+                      <a:endParaRPr lang="ko-KR" altLang="en-US" dirty="0">
+                        <a:solidFill>
+                          <a:schemeClr val="tx1"/>
+                        </a:solidFill>
+                      </a:endParaRPr>
+                    </a:p>
+                  </a:txBody>
+                  <a:tcPr>
+                    <a:lnL w="12700" cap="flat" cmpd="sng" algn="ctr">
+                      <a:solidFill>
+                        <a:schemeClr val="tx1"/>
+                      </a:solidFill>
+                      <a:prstDash val="solid"/>
+                      <a:round/>
+                      <a:headEnd type="none" w="med" len="med"/>
+                      <a:tailEnd type="none" w="med" len="med"/>
+                    </a:lnL>
+                    <a:lnR w="12700" cap="flat" cmpd="sng" algn="ctr">
+                      <a:solidFill>
+                        <a:schemeClr val="tx1"/>
+                      </a:solidFill>
+                      <a:prstDash val="solid"/>
+                      <a:round/>
+                      <a:headEnd type="none" w="med" len="med"/>
+                      <a:tailEnd type="none" w="med" len="med"/>
+                    </a:lnR>
+                    <a:lnT w="12700" cap="flat" cmpd="sng" algn="ctr">
+                      <a:solidFill>
+                        <a:schemeClr val="tx1"/>
+                      </a:solidFill>
+                      <a:prstDash val="solid"/>
+                      <a:round/>
+                      <a:headEnd type="none" w="med" len="med"/>
+                      <a:tailEnd type="none" w="med" len="med"/>
+                    </a:lnT>
+                    <a:lnB w="12700" cap="flat" cmpd="sng" algn="ctr">
+                      <a:solidFill>
+                        <a:schemeClr val="tx1"/>
+                      </a:solidFill>
+                      <a:prstDash val="solid"/>
+                      <a:round/>
+                      <a:headEnd type="none" w="med" len="med"/>
+                      <a:tailEnd type="none" w="med" len="med"/>
+                    </a:lnB>
+                    <a:noFill/>
+                  </a:tcPr>
+                </a:tc>
+                <a:tc>
+                  <a:txBody>
+                    <a:bodyPr/>
+                    <a:lstStyle/>
+                    <a:p>
+                      <a:pPr algn="ctr" latinLnBrk="1"/>
+                      <a:r>
+                        <a:rPr lang="en-US" altLang="ko-KR" b="0" dirty="0">
+                          <a:solidFill>
+                            <a:schemeClr val="tx1"/>
+                          </a:solidFill>
+                        </a:rPr>
+                        <a:t>[4]</a:t>
+                      </a:r>
+                      <a:endParaRPr lang="ko-KR" altLang="en-US" dirty="0">
+                        <a:solidFill>
+                          <a:schemeClr val="tx1"/>
+                        </a:solidFill>
+                      </a:endParaRPr>
+                    </a:p>
+                  </a:txBody>
+                  <a:tcPr>
+                    <a:lnL w="12700" cap="flat" cmpd="sng" algn="ctr">
+                      <a:solidFill>
+                        <a:schemeClr val="tx1"/>
+                      </a:solidFill>
+                      <a:prstDash val="solid"/>
+                      <a:round/>
+                      <a:headEnd type="none" w="med" len="med"/>
+                      <a:tailEnd type="none" w="med" len="med"/>
+                    </a:lnL>
+                    <a:lnR w="12700" cap="flat" cmpd="sng" algn="ctr">
+                      <a:solidFill>
+                        <a:schemeClr val="tx1"/>
+                      </a:solidFill>
+                      <a:prstDash val="solid"/>
+                      <a:round/>
+                      <a:headEnd type="none" w="med" len="med"/>
+                      <a:tailEnd type="none" w="med" len="med"/>
+                    </a:lnR>
+                    <a:lnT w="12700" cap="flat" cmpd="sng" algn="ctr">
+                      <a:solidFill>
+                        <a:schemeClr val="tx1"/>
+                      </a:solidFill>
+                      <a:prstDash val="solid"/>
+                      <a:round/>
+                      <a:headEnd type="none" w="med" len="med"/>
+                      <a:tailEnd type="none" w="med" len="med"/>
+                    </a:lnT>
+                    <a:lnB w="12700" cap="flat" cmpd="sng" algn="ctr">
+                      <a:solidFill>
+                        <a:schemeClr val="tx1"/>
+                      </a:solidFill>
+                      <a:prstDash val="solid"/>
+                      <a:round/>
+                      <a:headEnd type="none" w="med" len="med"/>
+                      <a:tailEnd type="none" w="med" len="med"/>
+                    </a:lnB>
+                    <a:noFill/>
+                  </a:tcPr>
+                </a:tc>
+                <a:extLst>
+                  <a:ext uri="{0D108BD9-81ED-4DB2-BD59-A6C34878D82A}">
+                    <a16:rowId xmlns:a16="http://schemas.microsoft.com/office/drawing/2014/main" val="3857244884"/>
+                  </a:ext>
+                </a:extLst>
+              </a:tr>
+              <a:tr h="286818">
+                <a:tc>
+                  <a:txBody>
+                    <a:bodyPr/>
+                    <a:lstStyle/>
+                    <a:p>
+                      <a:pPr algn="ctr" latinLnBrk="1"/>
+                      <a:r>
+                        <a:rPr lang="en-US" altLang="ko-KR" dirty="0">
+                          <a:solidFill>
+                            <a:schemeClr val="tx1"/>
+                          </a:solidFill>
+                        </a:rPr>
+                        <a:t>-</a:t>
+                      </a:r>
+                      <a:endParaRPr lang="ko-KR" altLang="en-US" dirty="0">
+                        <a:solidFill>
+                          <a:schemeClr val="tx1"/>
+                        </a:solidFill>
+                      </a:endParaRPr>
+                    </a:p>
+                  </a:txBody>
+                  <a:tcPr>
+                    <a:lnL w="12700" cap="flat" cmpd="sng" algn="ctr">
+                      <a:solidFill>
+                        <a:schemeClr val="tx1"/>
+                      </a:solidFill>
+                      <a:prstDash val="solid"/>
+                      <a:round/>
+                      <a:headEnd type="none" w="med" len="med"/>
+                      <a:tailEnd type="none" w="med" len="med"/>
+                    </a:lnL>
+                    <a:lnR w="12700" cap="flat" cmpd="sng" algn="ctr">
+                      <a:solidFill>
+                        <a:schemeClr val="tx1"/>
+                      </a:solidFill>
+                      <a:prstDash val="solid"/>
+                      <a:round/>
+                      <a:headEnd type="none" w="med" len="med"/>
+                      <a:tailEnd type="none" w="med" len="med"/>
+                    </a:lnR>
+                    <a:lnT w="12700" cap="flat" cmpd="sng" algn="ctr">
+                      <a:solidFill>
+                        <a:schemeClr val="tx1"/>
+                      </a:solidFill>
+                      <a:prstDash val="solid"/>
+                      <a:round/>
+                      <a:headEnd type="none" w="med" len="med"/>
+                      <a:tailEnd type="none" w="med" len="med"/>
+                    </a:lnT>
+                    <a:lnB w="12700" cap="flat" cmpd="sng" algn="ctr">
+                      <a:solidFill>
+                        <a:schemeClr val="tx1"/>
+                      </a:solidFill>
+                      <a:prstDash val="solid"/>
+                      <a:round/>
+                      <a:headEnd type="none" w="med" len="med"/>
+                      <a:tailEnd type="none" w="med" len="med"/>
+                    </a:lnB>
+                    <a:noFill/>
+                  </a:tcPr>
+                </a:tc>
+                <a:tc>
+                  <a:txBody>
+                    <a:bodyPr/>
+                    <a:lstStyle/>
+                    <a:p>
+                      <a:pPr algn="ctr" latinLnBrk="1"/>
+                      <a:r>
+                        <a:rPr lang="en-US" altLang="ko-KR" dirty="0">
+                          <a:solidFill>
+                            <a:schemeClr val="tx1"/>
+                          </a:solidFill>
+                        </a:rPr>
+                        <a:t>-</a:t>
+                      </a:r>
+                      <a:endParaRPr lang="ko-KR" altLang="en-US" dirty="0">
+                        <a:solidFill>
+                          <a:schemeClr val="tx1"/>
+                        </a:solidFill>
+                      </a:endParaRPr>
+                    </a:p>
+                  </a:txBody>
+                  <a:tcPr>
+                    <a:lnL w="12700" cap="flat" cmpd="sng" algn="ctr">
+                      <a:solidFill>
+                        <a:schemeClr val="tx1"/>
+                      </a:solidFill>
+                      <a:prstDash val="solid"/>
+                      <a:round/>
+                      <a:headEnd type="none" w="med" len="med"/>
+                      <a:tailEnd type="none" w="med" len="med"/>
+                    </a:lnL>
+                    <a:lnR w="12700" cap="flat" cmpd="sng" algn="ctr">
+                      <a:solidFill>
+                        <a:schemeClr val="tx1"/>
+                      </a:solidFill>
+                      <a:prstDash val="solid"/>
+                      <a:round/>
+                      <a:headEnd type="none" w="med" len="med"/>
+                      <a:tailEnd type="none" w="med" len="med"/>
+                    </a:lnR>
+                    <a:lnT w="12700" cap="flat" cmpd="sng" algn="ctr">
+                      <a:solidFill>
+                        <a:schemeClr val="tx1"/>
+                      </a:solidFill>
+                      <a:prstDash val="solid"/>
+                      <a:round/>
+                      <a:headEnd type="none" w="med" len="med"/>
+                      <a:tailEnd type="none" w="med" len="med"/>
+                    </a:lnT>
+                    <a:lnB w="12700" cap="flat" cmpd="sng" algn="ctr">
+                      <a:solidFill>
+                        <a:schemeClr val="tx1"/>
+                      </a:solidFill>
+                      <a:prstDash val="solid"/>
+                      <a:round/>
+                      <a:headEnd type="none" w="med" len="med"/>
+                      <a:tailEnd type="none" w="med" len="med"/>
+                    </a:lnB>
+                    <a:noFill/>
+                  </a:tcPr>
+                </a:tc>
+                <a:tc>
+                  <a:txBody>
+                    <a:bodyPr/>
+                    <a:lstStyle/>
+                    <a:p>
+                      <a:pPr algn="ctr" latinLnBrk="1"/>
+                      <a:r>
+                        <a:rPr lang="en-US" altLang="ko-KR" dirty="0">
+                          <a:solidFill>
+                            <a:schemeClr val="tx1"/>
+                          </a:solidFill>
+                        </a:rPr>
+                        <a:t>-</a:t>
+                      </a:r>
+                      <a:endParaRPr lang="ko-KR" altLang="en-US" dirty="0">
+                        <a:solidFill>
+                          <a:schemeClr val="tx1"/>
+                        </a:solidFill>
+                      </a:endParaRPr>
+                    </a:p>
+                  </a:txBody>
+                  <a:tcPr>
+                    <a:lnL w="12700" cap="flat" cmpd="sng" algn="ctr">
+                      <a:solidFill>
+                        <a:schemeClr val="tx1"/>
+                      </a:solidFill>
+                      <a:prstDash val="solid"/>
+                      <a:round/>
+                      <a:headEnd type="none" w="med" len="med"/>
+                      <a:tailEnd type="none" w="med" len="med"/>
+                    </a:lnL>
+                    <a:lnR w="12700" cap="flat" cmpd="sng" algn="ctr">
+                      <a:solidFill>
+                        <a:schemeClr val="tx1"/>
+                      </a:solidFill>
+                      <a:prstDash val="solid"/>
+                      <a:round/>
+                      <a:headEnd type="none" w="med" len="med"/>
+                      <a:tailEnd type="none" w="med" len="med"/>
+                    </a:lnR>
+                    <a:lnT w="12700" cap="flat" cmpd="sng" algn="ctr">
+                      <a:solidFill>
+                        <a:schemeClr val="tx1"/>
+                      </a:solidFill>
+                      <a:prstDash val="solid"/>
+                      <a:round/>
+                      <a:headEnd type="none" w="med" len="med"/>
+                      <a:tailEnd type="none" w="med" len="med"/>
+                    </a:lnT>
+                    <a:lnB w="12700" cap="flat" cmpd="sng" algn="ctr">
+                      <a:solidFill>
+                        <a:schemeClr val="tx1"/>
+                      </a:solidFill>
+                      <a:prstDash val="solid"/>
+                      <a:round/>
+                      <a:headEnd type="none" w="med" len="med"/>
+                      <a:tailEnd type="none" w="med" len="med"/>
+                    </a:lnB>
+                    <a:noFill/>
+                  </a:tcPr>
+                </a:tc>
+                <a:tc>
+                  <a:txBody>
+                    <a:bodyPr/>
+                    <a:lstStyle/>
+                    <a:p>
+                      <a:pPr algn="ctr" latinLnBrk="1"/>
+                      <a:r>
+                        <a:rPr lang="en-US" altLang="ko-KR" dirty="0">
+                          <a:solidFill>
+                            <a:schemeClr val="tx1"/>
+                          </a:solidFill>
+                        </a:rPr>
+                        <a:t>-</a:t>
+                      </a:r>
+                      <a:endParaRPr lang="ko-KR" altLang="en-US" dirty="0">
+                        <a:solidFill>
+                          <a:schemeClr val="tx1"/>
+                        </a:solidFill>
+                      </a:endParaRPr>
+                    </a:p>
+                  </a:txBody>
+                  <a:tcPr>
+                    <a:lnL w="12700" cap="flat" cmpd="sng" algn="ctr">
+                      <a:solidFill>
+                        <a:schemeClr val="tx1"/>
+                      </a:solidFill>
+                      <a:prstDash val="solid"/>
+                      <a:round/>
+                      <a:headEnd type="none" w="med" len="med"/>
+                      <a:tailEnd type="none" w="med" len="med"/>
+                    </a:lnL>
+                    <a:lnR w="12700" cap="flat" cmpd="sng" algn="ctr">
+                      <a:solidFill>
+                        <a:schemeClr val="tx1"/>
+                      </a:solidFill>
+                      <a:prstDash val="solid"/>
+                      <a:round/>
+                      <a:headEnd type="none" w="med" len="med"/>
+                      <a:tailEnd type="none" w="med" len="med"/>
+                    </a:lnR>
+                    <a:lnT w="12700" cap="flat" cmpd="sng" algn="ctr">
+                      <a:solidFill>
+                        <a:schemeClr val="tx1"/>
+                      </a:solidFill>
+                      <a:prstDash val="solid"/>
+                      <a:round/>
+                      <a:headEnd type="none" w="med" len="med"/>
+                      <a:tailEnd type="none" w="med" len="med"/>
+                    </a:lnT>
+                    <a:lnB w="12700" cap="flat" cmpd="sng" algn="ctr">
+                      <a:solidFill>
+                        <a:schemeClr val="tx1"/>
+                      </a:solidFill>
+                      <a:prstDash val="solid"/>
+                      <a:round/>
+                      <a:headEnd type="none" w="med" len="med"/>
+                      <a:tailEnd type="none" w="med" len="med"/>
+                    </a:lnB>
+                    <a:noFill/>
+                  </a:tcPr>
+                </a:tc>
+                <a:tc>
+                  <a:txBody>
+                    <a:bodyPr/>
+                    <a:lstStyle/>
+                    <a:p>
+                      <a:pPr algn="ctr" latinLnBrk="1"/>
+                      <a:r>
+                        <a:rPr lang="en-US" altLang="ko-KR" dirty="0">
+                          <a:solidFill>
+                            <a:schemeClr val="tx1"/>
+                          </a:solidFill>
+                        </a:rPr>
+                        <a:t>-</a:t>
+                      </a:r>
+                      <a:endParaRPr lang="ko-KR" altLang="en-US" dirty="0">
+                        <a:solidFill>
+                          <a:schemeClr val="tx1"/>
+                        </a:solidFill>
+                      </a:endParaRPr>
+                    </a:p>
+                  </a:txBody>
+                  <a:tcPr>
+                    <a:lnL w="12700" cap="flat" cmpd="sng" algn="ctr">
+                      <a:solidFill>
+                        <a:schemeClr val="tx1"/>
+                      </a:solidFill>
+                      <a:prstDash val="solid"/>
+                      <a:round/>
+                      <a:headEnd type="none" w="med" len="med"/>
+                      <a:tailEnd type="none" w="med" len="med"/>
+                    </a:lnL>
+                    <a:lnR w="12700" cap="flat" cmpd="sng" algn="ctr">
+                      <a:solidFill>
+                        <a:schemeClr val="tx1"/>
+                      </a:solidFill>
+                      <a:prstDash val="solid"/>
+                      <a:round/>
+                      <a:headEnd type="none" w="med" len="med"/>
+                      <a:tailEnd type="none" w="med" len="med"/>
+                    </a:lnR>
+                    <a:lnT w="12700" cap="flat" cmpd="sng" algn="ctr">
+                      <a:solidFill>
+                        <a:schemeClr val="tx1"/>
+                      </a:solidFill>
+                      <a:prstDash val="solid"/>
+                      <a:round/>
+                      <a:headEnd type="none" w="med" len="med"/>
+                      <a:tailEnd type="none" w="med" len="med"/>
+                    </a:lnT>
+                    <a:lnB w="12700" cap="flat" cmpd="sng" algn="ctr">
+                      <a:solidFill>
+                        <a:schemeClr val="tx1"/>
+                      </a:solidFill>
+                      <a:prstDash val="solid"/>
+                      <a:round/>
+                      <a:headEnd type="none" w="med" len="med"/>
+                      <a:tailEnd type="none" w="med" len="med"/>
+                    </a:lnB>
+                    <a:noFill/>
+                  </a:tcPr>
+                </a:tc>
+                <a:extLst>
+                  <a:ext uri="{0D108BD9-81ED-4DB2-BD59-A6C34878D82A}">
+                    <a16:rowId xmlns:a16="http://schemas.microsoft.com/office/drawing/2014/main" val="3919909872"/>
+                  </a:ext>
+                </a:extLst>
+              </a:tr>
+            </a:tbl>
+          </a:graphicData>
+        </a:graphic>
+      </p:graphicFrame>
+      <p:pic>
+        <p:nvPicPr>
+          <p:cNvPr id="22" name="그림 21">
+            <a:extLst>
+              <a:ext uri="{FF2B5EF4-FFF2-40B4-BE49-F238E27FC236}">
+                <a16:creationId xmlns:a16="http://schemas.microsoft.com/office/drawing/2014/main" id="{C291BAA0-D847-DF63-9375-C95A4AD1441B}"/>
+              </a:ext>
+            </a:extLst>
+          </p:cNvPr>
+          <p:cNvPicPr>
+            <a:picLocks noChangeAspect="1"/>
+          </p:cNvPicPr>
+          <p:nvPr/>
+        </p:nvPicPr>
+        <p:blipFill>
+          <a:blip r:embed="rId3"/>
+          <a:stretch>
+            <a:fillRect/>
+          </a:stretch>
+        </p:blipFill>
+        <p:spPr>
+          <a:xfrm>
+            <a:off x="232112" y="1001309"/>
+            <a:ext cx="4633473" cy="934255"/>
+          </a:xfrm>
+          <a:prstGeom prst="rect">
+            <a:avLst/>
+          </a:prstGeom>
+        </p:spPr>
+      </p:pic>
+      <p:sp>
+        <p:nvSpPr>
+          <p:cNvPr id="25" name="사각형: 둥근 모서리 24">
+            <a:extLst>
+              <a:ext uri="{FF2B5EF4-FFF2-40B4-BE49-F238E27FC236}">
+                <a16:creationId xmlns:a16="http://schemas.microsoft.com/office/drawing/2014/main" id="{79FA8AAB-79B6-5501-2C9D-64D3AC43DE00}"/>
+              </a:ext>
+            </a:extLst>
+          </p:cNvPr>
+          <p:cNvSpPr/>
+          <p:nvPr/>
+        </p:nvSpPr>
+        <p:spPr>
+          <a:xfrm>
+            <a:off x="9687922" y="682171"/>
+            <a:ext cx="1818157" cy="420505"/>
+          </a:xfrm>
+          <a:prstGeom prst="roundRect">
+            <a:avLst/>
+          </a:prstGeom>
+          <a:noFill/>
+        </p:spPr>
+        <p:style>
+          <a:lnRef idx="2">
+            <a:schemeClr val="accent1">
+              <a:shade val="15000"/>
+            </a:schemeClr>
+          </a:lnRef>
+          <a:fillRef idx="1">
+            <a:schemeClr val="accent1"/>
+          </a:fillRef>
+          <a:effectRef idx="0">
+            <a:schemeClr val="accent1"/>
+          </a:effectRef>
+          <a:fontRef idx="minor">
+            <a:schemeClr val="lt1"/>
+          </a:fontRef>
+        </p:style>
+        <p:txBody>
+          <a:bodyPr rtlCol="0" anchor="ctr"/>
+          <a:lstStyle/>
+          <a:p>
+            <a:pPr algn="ctr"/>
+            <a:r>
+              <a:rPr lang="en-US" altLang="ko-KR" b="1" dirty="0" err="1">
+                <a:solidFill>
+                  <a:schemeClr val="tx1"/>
+                </a:solidFill>
+              </a:rPr>
+              <a:t>Buffer_size</a:t>
+            </a:r>
+            <a:r>
+              <a:rPr lang="en-US" altLang="ko-KR" b="1" dirty="0">
+                <a:solidFill>
+                  <a:schemeClr val="tx1"/>
+                </a:solidFill>
+              </a:rPr>
+              <a:t> -1</a:t>
+            </a:r>
+            <a:endParaRPr lang="ko-KR" altLang="en-US" b="1" dirty="0">
+              <a:solidFill>
+                <a:schemeClr val="tx1"/>
+              </a:solidFill>
+            </a:endParaRPr>
+          </a:p>
+        </p:txBody>
+      </p:sp>
+      <p:sp>
+        <p:nvSpPr>
+          <p:cNvPr id="26" name="사각형: 둥근 모서리 25">
+            <a:extLst>
+              <a:ext uri="{FF2B5EF4-FFF2-40B4-BE49-F238E27FC236}">
+                <a16:creationId xmlns:a16="http://schemas.microsoft.com/office/drawing/2014/main" id="{389FC0F8-996F-A0D2-B3CC-29749C40D62B}"/>
+              </a:ext>
+            </a:extLst>
+          </p:cNvPr>
+          <p:cNvSpPr/>
+          <p:nvPr/>
+        </p:nvSpPr>
+        <p:spPr>
+          <a:xfrm>
+            <a:off x="5186921" y="48650"/>
+            <a:ext cx="1818157" cy="420505"/>
+          </a:xfrm>
+          <a:prstGeom prst="roundRect">
+            <a:avLst/>
+          </a:prstGeom>
+          <a:noFill/>
+        </p:spPr>
+        <p:style>
+          <a:lnRef idx="2">
+            <a:schemeClr val="accent1">
+              <a:shade val="15000"/>
+            </a:schemeClr>
+          </a:lnRef>
+          <a:fillRef idx="1">
+            <a:schemeClr val="accent1"/>
+          </a:fillRef>
+          <a:effectRef idx="0">
+            <a:schemeClr val="accent1"/>
+          </a:effectRef>
+          <a:fontRef idx="minor">
+            <a:schemeClr val="lt1"/>
+          </a:fontRef>
+        </p:style>
+        <p:txBody>
+          <a:bodyPr rtlCol="0" anchor="ctr"/>
+          <a:lstStyle/>
+          <a:p>
+            <a:pPr algn="ctr"/>
+            <a:r>
+              <a:rPr lang="en-US" altLang="ko-KR" b="1" dirty="0" err="1">
+                <a:solidFill>
+                  <a:schemeClr val="tx1"/>
+                </a:solidFill>
+              </a:rPr>
+              <a:t>Pbuffer</a:t>
+            </a:r>
+            <a:r>
+              <a:rPr lang="en-US" altLang="ko-KR" b="1" dirty="0">
+                <a:solidFill>
+                  <a:schemeClr val="tx1"/>
+                </a:solidFill>
+              </a:rPr>
+              <a:t>(</a:t>
+            </a:r>
+            <a:r>
+              <a:rPr lang="ko-KR" altLang="en-US" b="1" dirty="0" err="1">
+                <a:solidFill>
+                  <a:schemeClr val="tx1"/>
+                </a:solidFill>
+              </a:rPr>
+              <a:t>주소값</a:t>
+            </a:r>
+            <a:r>
+              <a:rPr lang="en-US" altLang="ko-KR" b="1" dirty="0">
+                <a:solidFill>
+                  <a:schemeClr val="tx1"/>
+                </a:solidFill>
+              </a:rPr>
+              <a:t>)</a:t>
+            </a:r>
+            <a:endParaRPr lang="ko-KR" altLang="en-US" b="1" dirty="0">
+              <a:solidFill>
+                <a:schemeClr val="tx1"/>
+              </a:solidFill>
+            </a:endParaRPr>
+          </a:p>
+        </p:txBody>
+      </p:sp>
+      <p:grpSp>
+        <p:nvGrpSpPr>
+          <p:cNvPr id="30" name="그룹 29">
+            <a:extLst>
+              <a:ext uri="{FF2B5EF4-FFF2-40B4-BE49-F238E27FC236}">
+                <a16:creationId xmlns:a16="http://schemas.microsoft.com/office/drawing/2014/main" id="{80066B67-B757-2058-B2BC-7686EBFA9A21}"/>
+              </a:ext>
+            </a:extLst>
+          </p:cNvPr>
+          <p:cNvGrpSpPr/>
+          <p:nvPr/>
+        </p:nvGrpSpPr>
+        <p:grpSpPr>
+          <a:xfrm>
+            <a:off x="5626752" y="1799023"/>
+            <a:ext cx="827314" cy="715199"/>
+            <a:chOff x="8596086" y="2744558"/>
+            <a:chExt cx="827314" cy="715199"/>
+          </a:xfrm>
+        </p:grpSpPr>
+        <p:sp>
+          <p:nvSpPr>
+            <p:cNvPr id="24" name="사각형: 둥근 모서리 23">
+              <a:extLst>
+                <a:ext uri="{FF2B5EF4-FFF2-40B4-BE49-F238E27FC236}">
+                  <a16:creationId xmlns:a16="http://schemas.microsoft.com/office/drawing/2014/main" id="{5A0A2B52-573F-02E5-E9D8-66FE51BA8F9E}"/>
+                </a:ext>
+              </a:extLst>
+            </p:cNvPr>
+            <p:cNvSpPr>
+              <a:spLocks/>
+            </p:cNvSpPr>
+            <p:nvPr/>
+          </p:nvSpPr>
+          <p:spPr>
+            <a:xfrm>
+              <a:off x="8596086" y="3153658"/>
+              <a:ext cx="827314" cy="306099"/>
+            </a:xfrm>
+            <a:prstGeom prst="roundRect">
+              <a:avLst/>
+            </a:prstGeom>
+            <a:noFill/>
+          </p:spPr>
+          <p:style>
+            <a:lnRef idx="2">
+              <a:schemeClr val="accent1">
+                <a:shade val="15000"/>
+              </a:schemeClr>
+            </a:lnRef>
+            <a:fillRef idx="1">
+              <a:schemeClr val="accent1"/>
+            </a:fillRef>
+            <a:effectRef idx="0">
+              <a:schemeClr val="accent1"/>
+            </a:effectRef>
+            <a:fontRef idx="minor">
+              <a:schemeClr val="lt1"/>
+            </a:fontRef>
+          </p:style>
+          <p:txBody>
+            <a:bodyPr rtlCol="0" anchor="ctr"/>
+            <a:lstStyle/>
+            <a:p>
+              <a:pPr algn="ctr"/>
+              <a:r>
+                <a:rPr lang="en-US" altLang="ko-KR" b="1" dirty="0">
+                  <a:solidFill>
+                    <a:srgbClr val="FF0000"/>
+                  </a:solidFill>
+                </a:rPr>
+                <a:t>Rear</a:t>
+              </a:r>
+              <a:endParaRPr lang="ko-KR" altLang="en-US" b="1" dirty="0">
+                <a:solidFill>
+                  <a:srgbClr val="FF0000"/>
+                </a:solidFill>
+              </a:endParaRPr>
+            </a:p>
+          </p:txBody>
+        </p:sp>
+        <p:sp>
+          <p:nvSpPr>
+            <p:cNvPr id="29" name="화살표: 위쪽 28">
+              <a:extLst>
+                <a:ext uri="{FF2B5EF4-FFF2-40B4-BE49-F238E27FC236}">
+                  <a16:creationId xmlns:a16="http://schemas.microsoft.com/office/drawing/2014/main" id="{A461D461-D145-F62D-22BE-A3D81D877C00}"/>
+                </a:ext>
+              </a:extLst>
+            </p:cNvPr>
+            <p:cNvSpPr>
+              <a:spLocks/>
+            </p:cNvSpPr>
+            <p:nvPr/>
+          </p:nvSpPr>
+          <p:spPr>
+            <a:xfrm>
+              <a:off x="8908143" y="2744558"/>
+              <a:ext cx="203200" cy="409100"/>
+            </a:xfrm>
+            <a:prstGeom prst="upArrow">
+              <a:avLst/>
+            </a:prstGeom>
+            <a:solidFill>
+              <a:srgbClr val="FF0000"/>
+            </a:solidFill>
+          </p:spPr>
+          <p:style>
+            <a:lnRef idx="2">
+              <a:schemeClr val="accent1">
+                <a:shade val="15000"/>
+              </a:schemeClr>
+            </a:lnRef>
+            <a:fillRef idx="1">
+              <a:schemeClr val="accent1"/>
+            </a:fillRef>
+            <a:effectRef idx="0">
+              <a:schemeClr val="accent1"/>
+            </a:effectRef>
+            <a:fontRef idx="minor">
+              <a:schemeClr val="lt1"/>
+            </a:fontRef>
+          </p:style>
+          <p:txBody>
+            <a:bodyPr rtlCol="0" anchor="ctr"/>
+            <a:lstStyle/>
+            <a:p>
+              <a:pPr algn="ctr"/>
+              <a:endParaRPr lang="ko-KR" altLang="en-US"/>
+            </a:p>
+          </p:txBody>
+        </p:sp>
+      </p:grpSp>
+      <p:grpSp>
+        <p:nvGrpSpPr>
+          <p:cNvPr id="32" name="그룹 31">
+            <a:extLst>
+              <a:ext uri="{FF2B5EF4-FFF2-40B4-BE49-F238E27FC236}">
+                <a16:creationId xmlns:a16="http://schemas.microsoft.com/office/drawing/2014/main" id="{F343B23D-BFBA-2D49-9CD0-06F989E0B080}"/>
+              </a:ext>
+            </a:extLst>
+          </p:cNvPr>
+          <p:cNvGrpSpPr/>
+          <p:nvPr/>
+        </p:nvGrpSpPr>
+        <p:grpSpPr>
+          <a:xfrm>
+            <a:off x="5626752" y="564048"/>
+            <a:ext cx="827314" cy="625293"/>
+            <a:chOff x="7913626" y="234700"/>
+            <a:chExt cx="827314" cy="625293"/>
+          </a:xfrm>
+        </p:grpSpPr>
+        <p:sp>
+          <p:nvSpPr>
+            <p:cNvPr id="23" name="사각형: 둥근 모서리 22">
+              <a:extLst>
+                <a:ext uri="{FF2B5EF4-FFF2-40B4-BE49-F238E27FC236}">
+                  <a16:creationId xmlns:a16="http://schemas.microsoft.com/office/drawing/2014/main" id="{4508372E-0814-BD5D-BE67-50EF7C66D21D}"/>
+                </a:ext>
+              </a:extLst>
+            </p:cNvPr>
+            <p:cNvSpPr/>
+            <p:nvPr/>
+          </p:nvSpPr>
+          <p:spPr>
+            <a:xfrm>
+              <a:off x="7913626" y="234700"/>
+              <a:ext cx="827314" cy="306099"/>
+            </a:xfrm>
+            <a:prstGeom prst="roundRect">
+              <a:avLst/>
+            </a:prstGeom>
+            <a:noFill/>
+          </p:spPr>
+          <p:style>
+            <a:lnRef idx="2">
+              <a:schemeClr val="accent1">
+                <a:shade val="15000"/>
+              </a:schemeClr>
+            </a:lnRef>
+            <a:fillRef idx="1">
+              <a:schemeClr val="accent1"/>
+            </a:fillRef>
+            <a:effectRef idx="0">
+              <a:schemeClr val="accent1"/>
+            </a:effectRef>
+            <a:fontRef idx="minor">
+              <a:schemeClr val="lt1"/>
+            </a:fontRef>
+          </p:style>
+          <p:txBody>
+            <a:bodyPr rtlCol="0" anchor="ctr"/>
+            <a:lstStyle/>
+            <a:p>
+              <a:pPr algn="ctr"/>
+              <a:r>
+                <a:rPr lang="en-US" altLang="ko-KR" b="1" dirty="0">
+                  <a:solidFill>
+                    <a:srgbClr val="0000FF"/>
+                  </a:solidFill>
+                </a:rPr>
+                <a:t>Front</a:t>
+              </a:r>
+              <a:endParaRPr lang="ko-KR" altLang="en-US" b="1" dirty="0">
+                <a:solidFill>
+                  <a:srgbClr val="0000FF"/>
+                </a:solidFill>
+              </a:endParaRPr>
+            </a:p>
+          </p:txBody>
+        </p:sp>
+        <p:sp>
+          <p:nvSpPr>
+            <p:cNvPr id="31" name="화살표: 아래쪽 30">
+              <a:extLst>
+                <a:ext uri="{FF2B5EF4-FFF2-40B4-BE49-F238E27FC236}">
+                  <a16:creationId xmlns:a16="http://schemas.microsoft.com/office/drawing/2014/main" id="{24F5ACB4-C689-DB42-5715-EFC7D3F421D7}"/>
+                </a:ext>
+              </a:extLst>
+            </p:cNvPr>
+            <p:cNvSpPr/>
+            <p:nvPr/>
+          </p:nvSpPr>
+          <p:spPr>
+            <a:xfrm>
+              <a:off x="8240197" y="553894"/>
+              <a:ext cx="174171" cy="306099"/>
+            </a:xfrm>
+            <a:prstGeom prst="downArrow">
+              <a:avLst/>
+            </a:prstGeom>
+          </p:spPr>
+          <p:style>
+            <a:lnRef idx="2">
+              <a:schemeClr val="accent1">
+                <a:shade val="15000"/>
+              </a:schemeClr>
+            </a:lnRef>
+            <a:fillRef idx="1">
+              <a:schemeClr val="accent1"/>
+            </a:fillRef>
+            <a:effectRef idx="0">
+              <a:schemeClr val="accent1"/>
+            </a:effectRef>
+            <a:fontRef idx="minor">
+              <a:schemeClr val="lt1"/>
+            </a:fontRef>
+          </p:style>
+          <p:txBody>
+            <a:bodyPr rtlCol="0" anchor="ctr"/>
+            <a:lstStyle/>
+            <a:p>
+              <a:pPr algn="ctr"/>
+              <a:endParaRPr lang="ko-KR" altLang="en-US"/>
+            </a:p>
+          </p:txBody>
+        </p:sp>
+      </p:grpSp>
+      <p:pic>
+        <p:nvPicPr>
+          <p:cNvPr id="34" name="그림 33">
+            <a:extLst>
+              <a:ext uri="{FF2B5EF4-FFF2-40B4-BE49-F238E27FC236}">
+                <a16:creationId xmlns:a16="http://schemas.microsoft.com/office/drawing/2014/main" id="{B4E5024D-B06F-FD71-3D4C-009BAC814476}"/>
+              </a:ext>
+            </a:extLst>
+          </p:cNvPr>
+          <p:cNvPicPr>
+            <a:picLocks noChangeAspect="1"/>
+          </p:cNvPicPr>
+          <p:nvPr/>
+        </p:nvPicPr>
+        <p:blipFill>
+          <a:blip r:embed="rId4"/>
+          <a:stretch>
+            <a:fillRect/>
+          </a:stretch>
+        </p:blipFill>
+        <p:spPr>
+          <a:xfrm>
+            <a:off x="204772" y="2546753"/>
+            <a:ext cx="4543088" cy="4241760"/>
+          </a:xfrm>
+          <a:prstGeom prst="rect">
+            <a:avLst/>
+          </a:prstGeom>
+        </p:spPr>
+      </p:pic>
+      <p:graphicFrame>
+        <p:nvGraphicFramePr>
+          <p:cNvPr id="35" name="표 34">
+            <a:extLst>
+              <a:ext uri="{FF2B5EF4-FFF2-40B4-BE49-F238E27FC236}">
+                <a16:creationId xmlns:a16="http://schemas.microsoft.com/office/drawing/2014/main" id="{1174CD19-012F-BD3F-33B0-E893F29729C8}"/>
+              </a:ext>
+            </a:extLst>
+          </p:cNvPr>
+          <p:cNvGraphicFramePr>
+            <a:graphicFrameLocks noGrp="1"/>
+          </p:cNvGraphicFramePr>
+          <p:nvPr/>
+        </p:nvGraphicFramePr>
+        <p:xfrm>
+          <a:off x="5522198" y="3221754"/>
+          <a:ext cx="5682745" cy="731520"/>
+        </p:xfrm>
+        <a:graphic>
+          <a:graphicData uri="http://schemas.openxmlformats.org/drawingml/2006/table">
+            <a:tbl>
+              <a:tblPr firstRow="1" bandRow="1">
+                <a:tableStyleId>{5C22544A-7EE6-4342-B048-85BDC9FD1C3A}</a:tableStyleId>
+              </a:tblPr>
+              <a:tblGrid>
+                <a:gridCol w="1136549">
+                  <a:extLst>
+                    <a:ext uri="{9D8B030D-6E8A-4147-A177-3AD203B41FA5}">
+                      <a16:colId xmlns:a16="http://schemas.microsoft.com/office/drawing/2014/main" val="2978345313"/>
+                    </a:ext>
+                  </a:extLst>
+                </a:gridCol>
+                <a:gridCol w="1136549">
+                  <a:extLst>
+                    <a:ext uri="{9D8B030D-6E8A-4147-A177-3AD203B41FA5}">
+                      <a16:colId xmlns:a16="http://schemas.microsoft.com/office/drawing/2014/main" val="516520693"/>
+                    </a:ext>
+                  </a:extLst>
+                </a:gridCol>
+                <a:gridCol w="1136549">
+                  <a:extLst>
+                    <a:ext uri="{9D8B030D-6E8A-4147-A177-3AD203B41FA5}">
+                      <a16:colId xmlns:a16="http://schemas.microsoft.com/office/drawing/2014/main" val="411927753"/>
+                    </a:ext>
+                  </a:extLst>
+                </a:gridCol>
+                <a:gridCol w="1136549">
+                  <a:extLst>
+                    <a:ext uri="{9D8B030D-6E8A-4147-A177-3AD203B41FA5}">
+                      <a16:colId xmlns:a16="http://schemas.microsoft.com/office/drawing/2014/main" val="2282447059"/>
+                    </a:ext>
+                  </a:extLst>
+                </a:gridCol>
+                <a:gridCol w="1136549">
+                  <a:extLst>
+                    <a:ext uri="{9D8B030D-6E8A-4147-A177-3AD203B41FA5}">
+                      <a16:colId xmlns:a16="http://schemas.microsoft.com/office/drawing/2014/main" val="1506443707"/>
+                    </a:ext>
+                  </a:extLst>
+                </a:gridCol>
+              </a:tblGrid>
+              <a:tr h="295187">
+                <a:tc>
+                  <a:txBody>
+                    <a:bodyPr/>
+                    <a:lstStyle/>
+                    <a:p>
+                      <a:pPr algn="ctr" latinLnBrk="1"/>
+                      <a:r>
+                        <a:rPr lang="en-US" altLang="ko-KR" b="0" dirty="0">
+                          <a:solidFill>
+                            <a:schemeClr val="tx1"/>
+                          </a:solidFill>
+                        </a:rPr>
+                        <a:t>[0]</a:t>
+                      </a:r>
+                      <a:endParaRPr lang="ko-KR" altLang="en-US" b="0" dirty="0">
+                        <a:solidFill>
+                          <a:schemeClr val="tx1"/>
+                        </a:solidFill>
+                      </a:endParaRPr>
+                    </a:p>
+                  </a:txBody>
+                  <a:tcPr>
+                    <a:lnL w="12700" cap="flat" cmpd="sng" algn="ctr">
+                      <a:solidFill>
+                        <a:schemeClr val="tx1"/>
+                      </a:solidFill>
+                      <a:prstDash val="solid"/>
+                      <a:round/>
+                      <a:headEnd type="none" w="med" len="med"/>
+                      <a:tailEnd type="none" w="med" len="med"/>
+                    </a:lnL>
+                    <a:lnR w="12700" cap="flat" cmpd="sng" algn="ctr">
+                      <a:solidFill>
+                        <a:schemeClr val="tx1"/>
+                      </a:solidFill>
+                      <a:prstDash val="solid"/>
+                      <a:round/>
+                      <a:headEnd type="none" w="med" len="med"/>
+                      <a:tailEnd type="none" w="med" len="med"/>
+                    </a:lnR>
+                    <a:lnT w="12700" cap="flat" cmpd="sng" algn="ctr">
+                      <a:solidFill>
+                        <a:schemeClr val="tx1"/>
+                      </a:solidFill>
+                      <a:prstDash val="solid"/>
+                      <a:round/>
+                      <a:headEnd type="none" w="med" len="med"/>
+                      <a:tailEnd type="none" w="med" len="med"/>
+                    </a:lnT>
+                    <a:lnB w="12700" cap="flat" cmpd="sng" algn="ctr">
+                      <a:solidFill>
+                        <a:schemeClr val="tx1"/>
+                      </a:solidFill>
+                      <a:prstDash val="solid"/>
+                      <a:round/>
+                      <a:headEnd type="none" w="med" len="med"/>
+                      <a:tailEnd type="none" w="med" len="med"/>
+                    </a:lnB>
+                    <a:noFill/>
+                  </a:tcPr>
+                </a:tc>
+                <a:tc>
+                  <a:txBody>
+                    <a:bodyPr/>
+                    <a:lstStyle/>
+                    <a:p>
+                      <a:pPr algn="ctr" latinLnBrk="1"/>
+                      <a:r>
+                        <a:rPr lang="en-US" altLang="ko-KR" b="0" dirty="0">
+                          <a:solidFill>
+                            <a:schemeClr val="tx1"/>
+                          </a:solidFill>
+                        </a:rPr>
+                        <a:t>[1]</a:t>
+                      </a:r>
+                      <a:endParaRPr lang="ko-KR" altLang="en-US" dirty="0">
+                        <a:solidFill>
+                          <a:schemeClr val="tx1"/>
+                        </a:solidFill>
+                      </a:endParaRPr>
+                    </a:p>
+                  </a:txBody>
+                  <a:tcPr>
+                    <a:lnL w="12700" cap="flat" cmpd="sng" algn="ctr">
+                      <a:solidFill>
+                        <a:schemeClr val="tx1"/>
+                      </a:solidFill>
+                      <a:prstDash val="solid"/>
+                      <a:round/>
+                      <a:headEnd type="none" w="med" len="med"/>
+                      <a:tailEnd type="none" w="med" len="med"/>
+                    </a:lnL>
+                    <a:lnR w="12700" cap="flat" cmpd="sng" algn="ctr">
+                      <a:solidFill>
+                        <a:schemeClr val="tx1"/>
+                      </a:solidFill>
+                      <a:prstDash val="solid"/>
+                      <a:round/>
+                      <a:headEnd type="none" w="med" len="med"/>
+                      <a:tailEnd type="none" w="med" len="med"/>
+                    </a:lnR>
+                    <a:lnT w="12700" cap="flat" cmpd="sng" algn="ctr">
+                      <a:solidFill>
+                        <a:schemeClr val="tx1"/>
+                      </a:solidFill>
+                      <a:prstDash val="solid"/>
+                      <a:round/>
+                      <a:headEnd type="none" w="med" len="med"/>
+                      <a:tailEnd type="none" w="med" len="med"/>
+                    </a:lnT>
+                    <a:lnB w="12700" cap="flat" cmpd="sng" algn="ctr">
+                      <a:solidFill>
+                        <a:schemeClr val="tx1"/>
+                      </a:solidFill>
+                      <a:prstDash val="solid"/>
+                      <a:round/>
+                      <a:headEnd type="none" w="med" len="med"/>
+                      <a:tailEnd type="none" w="med" len="med"/>
+                    </a:lnB>
+                    <a:noFill/>
+                  </a:tcPr>
+                </a:tc>
+                <a:tc>
+                  <a:txBody>
+                    <a:bodyPr/>
+                    <a:lstStyle/>
+                    <a:p>
+                      <a:pPr algn="ctr" latinLnBrk="1"/>
+                      <a:r>
+                        <a:rPr lang="en-US" altLang="ko-KR" b="0" dirty="0">
+                          <a:solidFill>
+                            <a:schemeClr val="tx1"/>
+                          </a:solidFill>
+                        </a:rPr>
+                        <a:t>[2]</a:t>
+                      </a:r>
+                      <a:endParaRPr lang="ko-KR" altLang="en-US" dirty="0">
+                        <a:solidFill>
+                          <a:schemeClr val="tx1"/>
+                        </a:solidFill>
+                      </a:endParaRPr>
+                    </a:p>
+                  </a:txBody>
+                  <a:tcPr>
+                    <a:lnL w="12700" cap="flat" cmpd="sng" algn="ctr">
+                      <a:solidFill>
+                        <a:schemeClr val="tx1"/>
+                      </a:solidFill>
+                      <a:prstDash val="solid"/>
+                      <a:round/>
+                      <a:headEnd type="none" w="med" len="med"/>
+                      <a:tailEnd type="none" w="med" len="med"/>
+                    </a:lnL>
+                    <a:lnR w="12700" cap="flat" cmpd="sng" algn="ctr">
+                      <a:solidFill>
+                        <a:schemeClr val="tx1"/>
+                      </a:solidFill>
+                      <a:prstDash val="solid"/>
+                      <a:round/>
+                      <a:headEnd type="none" w="med" len="med"/>
+                      <a:tailEnd type="none" w="med" len="med"/>
+                    </a:lnR>
+                    <a:lnT w="12700" cap="flat" cmpd="sng" algn="ctr">
+                      <a:solidFill>
+                        <a:schemeClr val="tx1"/>
+                      </a:solidFill>
+                      <a:prstDash val="solid"/>
+                      <a:round/>
+                      <a:headEnd type="none" w="med" len="med"/>
+                      <a:tailEnd type="none" w="med" len="med"/>
+                    </a:lnT>
+                    <a:lnB w="12700" cap="flat" cmpd="sng" algn="ctr">
+                      <a:solidFill>
+                        <a:schemeClr val="tx1"/>
+                      </a:solidFill>
+                      <a:prstDash val="solid"/>
+                      <a:round/>
+                      <a:headEnd type="none" w="med" len="med"/>
+                      <a:tailEnd type="none" w="med" len="med"/>
+                    </a:lnB>
+                    <a:noFill/>
+                  </a:tcPr>
+                </a:tc>
+                <a:tc>
+                  <a:txBody>
+                    <a:bodyPr/>
+                    <a:lstStyle/>
+                    <a:p>
+                      <a:pPr algn="ctr" latinLnBrk="1"/>
+                      <a:r>
+                        <a:rPr lang="en-US" altLang="ko-KR" b="0" dirty="0">
+                          <a:solidFill>
+                            <a:schemeClr val="tx1"/>
+                          </a:solidFill>
+                        </a:rPr>
+                        <a:t>[3]</a:t>
+                      </a:r>
+                      <a:endParaRPr lang="ko-KR" altLang="en-US" dirty="0">
+                        <a:solidFill>
+                          <a:schemeClr val="tx1"/>
+                        </a:solidFill>
+                      </a:endParaRPr>
+                    </a:p>
+                  </a:txBody>
+                  <a:tcPr>
+                    <a:lnL w="12700" cap="flat" cmpd="sng" algn="ctr">
+                      <a:solidFill>
+                        <a:schemeClr val="tx1"/>
+                      </a:solidFill>
+                      <a:prstDash val="solid"/>
+                      <a:round/>
+                      <a:headEnd type="none" w="med" len="med"/>
+                      <a:tailEnd type="none" w="med" len="med"/>
+                    </a:lnL>
+                    <a:lnR w="12700" cap="flat" cmpd="sng" algn="ctr">
+                      <a:solidFill>
+                        <a:schemeClr val="tx1"/>
+                      </a:solidFill>
+                      <a:prstDash val="solid"/>
+                      <a:round/>
+                      <a:headEnd type="none" w="med" len="med"/>
+                      <a:tailEnd type="none" w="med" len="med"/>
+                    </a:lnR>
+                    <a:lnT w="12700" cap="flat" cmpd="sng" algn="ctr">
+                      <a:solidFill>
+                        <a:schemeClr val="tx1"/>
+                      </a:solidFill>
+                      <a:prstDash val="solid"/>
+                      <a:round/>
+                      <a:headEnd type="none" w="med" len="med"/>
+                      <a:tailEnd type="none" w="med" len="med"/>
+                    </a:lnT>
+                    <a:lnB w="12700" cap="flat" cmpd="sng" algn="ctr">
+                      <a:solidFill>
+                        <a:schemeClr val="tx1"/>
+                      </a:solidFill>
+                      <a:prstDash val="solid"/>
+                      <a:round/>
+                      <a:headEnd type="none" w="med" len="med"/>
+                      <a:tailEnd type="none" w="med" len="med"/>
+                    </a:lnB>
+                    <a:noFill/>
+                  </a:tcPr>
+                </a:tc>
+                <a:tc>
+                  <a:txBody>
+                    <a:bodyPr/>
+                    <a:lstStyle/>
+                    <a:p>
+                      <a:pPr algn="ctr" latinLnBrk="1"/>
+                      <a:r>
+                        <a:rPr lang="en-US" altLang="ko-KR" b="0" dirty="0">
+                          <a:solidFill>
+                            <a:schemeClr val="tx1"/>
+                          </a:solidFill>
+                        </a:rPr>
+                        <a:t>[4]</a:t>
+                      </a:r>
+                      <a:endParaRPr lang="ko-KR" altLang="en-US" dirty="0">
+                        <a:solidFill>
+                          <a:schemeClr val="tx1"/>
+                        </a:solidFill>
+                      </a:endParaRPr>
+                    </a:p>
+                  </a:txBody>
+                  <a:tcPr>
+                    <a:lnL w="12700" cap="flat" cmpd="sng" algn="ctr">
+                      <a:solidFill>
+                        <a:schemeClr val="tx1"/>
+                      </a:solidFill>
+                      <a:prstDash val="solid"/>
+                      <a:round/>
+                      <a:headEnd type="none" w="med" len="med"/>
+                      <a:tailEnd type="none" w="med" len="med"/>
+                    </a:lnL>
+                    <a:lnR w="12700" cap="flat" cmpd="sng" algn="ctr">
+                      <a:solidFill>
+                        <a:schemeClr val="tx1"/>
+                      </a:solidFill>
+                      <a:prstDash val="solid"/>
+                      <a:round/>
+                      <a:headEnd type="none" w="med" len="med"/>
+                      <a:tailEnd type="none" w="med" len="med"/>
+                    </a:lnR>
+                    <a:lnT w="12700" cap="flat" cmpd="sng" algn="ctr">
+                      <a:solidFill>
+                        <a:schemeClr val="tx1"/>
+                      </a:solidFill>
+                      <a:prstDash val="solid"/>
+                      <a:round/>
+                      <a:headEnd type="none" w="med" len="med"/>
+                      <a:tailEnd type="none" w="med" len="med"/>
+                    </a:lnT>
+                    <a:lnB w="12700" cap="flat" cmpd="sng" algn="ctr">
+                      <a:solidFill>
+                        <a:schemeClr val="tx1"/>
+                      </a:solidFill>
+                      <a:prstDash val="solid"/>
+                      <a:round/>
+                      <a:headEnd type="none" w="med" len="med"/>
+                      <a:tailEnd type="none" w="med" len="med"/>
+                    </a:lnB>
+                    <a:noFill/>
+                  </a:tcPr>
+                </a:tc>
+                <a:extLst>
+                  <a:ext uri="{0D108BD9-81ED-4DB2-BD59-A6C34878D82A}">
+                    <a16:rowId xmlns:a16="http://schemas.microsoft.com/office/drawing/2014/main" val="3857244884"/>
+                  </a:ext>
+                </a:extLst>
+              </a:tr>
+              <a:tr h="295187">
+                <a:tc>
+                  <a:txBody>
+                    <a:bodyPr/>
+                    <a:lstStyle/>
+                    <a:p>
+                      <a:pPr algn="ctr" latinLnBrk="1"/>
+                      <a:r>
+                        <a:rPr lang="en-US" altLang="ko-KR" dirty="0">
+                          <a:solidFill>
+                            <a:schemeClr val="tx1"/>
+                          </a:solidFill>
+                        </a:rPr>
+                        <a:t>60</a:t>
+                      </a:r>
+                      <a:endParaRPr lang="ko-KR" altLang="en-US" dirty="0">
+                        <a:solidFill>
+                          <a:schemeClr val="tx1"/>
+                        </a:solidFill>
+                      </a:endParaRPr>
+                    </a:p>
+                  </a:txBody>
+                  <a:tcPr>
+                    <a:lnL w="12700" cap="flat" cmpd="sng" algn="ctr">
+                      <a:solidFill>
+                        <a:schemeClr val="tx1"/>
+                      </a:solidFill>
+                      <a:prstDash val="solid"/>
+                      <a:round/>
+                      <a:headEnd type="none" w="med" len="med"/>
+                      <a:tailEnd type="none" w="med" len="med"/>
+                    </a:lnL>
+                    <a:lnR w="12700" cap="flat" cmpd="sng" algn="ctr">
+                      <a:solidFill>
+                        <a:schemeClr val="tx1"/>
+                      </a:solidFill>
+                      <a:prstDash val="solid"/>
+                      <a:round/>
+                      <a:headEnd type="none" w="med" len="med"/>
+                      <a:tailEnd type="none" w="med" len="med"/>
+                    </a:lnR>
+                    <a:lnT w="12700" cap="flat" cmpd="sng" algn="ctr">
+                      <a:solidFill>
+                        <a:schemeClr val="tx1"/>
+                      </a:solidFill>
+                      <a:prstDash val="solid"/>
+                      <a:round/>
+                      <a:headEnd type="none" w="med" len="med"/>
+                      <a:tailEnd type="none" w="med" len="med"/>
+                    </a:lnT>
+                    <a:lnB w="12700" cap="flat" cmpd="sng" algn="ctr">
+                      <a:solidFill>
+                        <a:schemeClr val="tx1"/>
+                      </a:solidFill>
+                      <a:prstDash val="solid"/>
+                      <a:round/>
+                      <a:headEnd type="none" w="med" len="med"/>
+                      <a:tailEnd type="none" w="med" len="med"/>
+                    </a:lnB>
+                    <a:noFill/>
+                  </a:tcPr>
+                </a:tc>
+                <a:tc>
+                  <a:txBody>
+                    <a:bodyPr/>
+                    <a:lstStyle/>
+                    <a:p>
+                      <a:pPr algn="ctr" latinLnBrk="1"/>
+                      <a:r>
+                        <a:rPr lang="en-US" altLang="ko-KR" dirty="0">
+                          <a:solidFill>
+                            <a:schemeClr val="tx1"/>
+                          </a:solidFill>
+                        </a:rPr>
+                        <a:t>-</a:t>
+                      </a:r>
+                      <a:endParaRPr lang="ko-KR" altLang="en-US" dirty="0">
+                        <a:solidFill>
+                          <a:schemeClr val="tx1"/>
+                        </a:solidFill>
+                      </a:endParaRPr>
+                    </a:p>
+                  </a:txBody>
+                  <a:tcPr>
+                    <a:lnL w="12700" cap="flat" cmpd="sng" algn="ctr">
+                      <a:solidFill>
+                        <a:schemeClr val="tx1"/>
+                      </a:solidFill>
+                      <a:prstDash val="solid"/>
+                      <a:round/>
+                      <a:headEnd type="none" w="med" len="med"/>
+                      <a:tailEnd type="none" w="med" len="med"/>
+                    </a:lnL>
+                    <a:lnR w="12700" cap="flat" cmpd="sng" algn="ctr">
+                      <a:solidFill>
+                        <a:schemeClr val="tx1"/>
+                      </a:solidFill>
+                      <a:prstDash val="solid"/>
+                      <a:round/>
+                      <a:headEnd type="none" w="med" len="med"/>
+                      <a:tailEnd type="none" w="med" len="med"/>
+                    </a:lnR>
+                    <a:lnT w="12700" cap="flat" cmpd="sng" algn="ctr">
+                      <a:solidFill>
+                        <a:schemeClr val="tx1"/>
+                      </a:solidFill>
+                      <a:prstDash val="solid"/>
+                      <a:round/>
+                      <a:headEnd type="none" w="med" len="med"/>
+                      <a:tailEnd type="none" w="med" len="med"/>
+                    </a:lnT>
+                    <a:lnB w="12700" cap="flat" cmpd="sng" algn="ctr">
+                      <a:solidFill>
+                        <a:schemeClr val="tx1"/>
+                      </a:solidFill>
+                      <a:prstDash val="solid"/>
+                      <a:round/>
+                      <a:headEnd type="none" w="med" len="med"/>
+                      <a:tailEnd type="none" w="med" len="med"/>
+                    </a:lnB>
+                    <a:noFill/>
+                  </a:tcPr>
+                </a:tc>
+                <a:tc>
+                  <a:txBody>
+                    <a:bodyPr/>
+                    <a:lstStyle/>
+                    <a:p>
+                      <a:pPr algn="ctr" latinLnBrk="1"/>
+                      <a:r>
+                        <a:rPr lang="en-US" altLang="ko-KR" dirty="0">
+                          <a:solidFill>
+                            <a:schemeClr val="tx1"/>
+                          </a:solidFill>
+                        </a:rPr>
+                        <a:t>30</a:t>
+                      </a:r>
+                      <a:endParaRPr lang="ko-KR" altLang="en-US" dirty="0">
+                        <a:solidFill>
+                          <a:schemeClr val="tx1"/>
+                        </a:solidFill>
+                      </a:endParaRPr>
+                    </a:p>
+                  </a:txBody>
+                  <a:tcPr>
+                    <a:lnL w="12700" cap="flat" cmpd="sng" algn="ctr">
+                      <a:solidFill>
+                        <a:schemeClr val="tx1"/>
+                      </a:solidFill>
+                      <a:prstDash val="solid"/>
+                      <a:round/>
+                      <a:headEnd type="none" w="med" len="med"/>
+                      <a:tailEnd type="none" w="med" len="med"/>
+                    </a:lnL>
+                    <a:lnR w="12700" cap="flat" cmpd="sng" algn="ctr">
+                      <a:solidFill>
+                        <a:schemeClr val="tx1"/>
+                      </a:solidFill>
+                      <a:prstDash val="solid"/>
+                      <a:round/>
+                      <a:headEnd type="none" w="med" len="med"/>
+                      <a:tailEnd type="none" w="med" len="med"/>
+                    </a:lnR>
+                    <a:lnT w="12700" cap="flat" cmpd="sng" algn="ctr">
+                      <a:solidFill>
+                        <a:schemeClr val="tx1"/>
+                      </a:solidFill>
+                      <a:prstDash val="solid"/>
+                      <a:round/>
+                      <a:headEnd type="none" w="med" len="med"/>
+                      <a:tailEnd type="none" w="med" len="med"/>
+                    </a:lnT>
+                    <a:lnB w="12700" cap="flat" cmpd="sng" algn="ctr">
+                      <a:solidFill>
+                        <a:schemeClr val="tx1"/>
+                      </a:solidFill>
+                      <a:prstDash val="solid"/>
+                      <a:round/>
+                      <a:headEnd type="none" w="med" len="med"/>
+                      <a:tailEnd type="none" w="med" len="med"/>
+                    </a:lnB>
+                    <a:noFill/>
+                  </a:tcPr>
+                </a:tc>
+                <a:tc>
+                  <a:txBody>
+                    <a:bodyPr/>
+                    <a:lstStyle/>
+                    <a:p>
+                      <a:pPr algn="ctr" latinLnBrk="1"/>
+                      <a:r>
+                        <a:rPr lang="en-US" altLang="ko-KR" dirty="0">
+                          <a:solidFill>
+                            <a:schemeClr val="tx1"/>
+                          </a:solidFill>
+                        </a:rPr>
+                        <a:t>40</a:t>
+                      </a:r>
+                      <a:endParaRPr lang="ko-KR" altLang="en-US" dirty="0">
+                        <a:solidFill>
+                          <a:schemeClr val="tx1"/>
+                        </a:solidFill>
+                      </a:endParaRPr>
+                    </a:p>
+                  </a:txBody>
+                  <a:tcPr>
+                    <a:lnL w="12700" cap="flat" cmpd="sng" algn="ctr">
+                      <a:solidFill>
+                        <a:schemeClr val="tx1"/>
+                      </a:solidFill>
+                      <a:prstDash val="solid"/>
+                      <a:round/>
+                      <a:headEnd type="none" w="med" len="med"/>
+                      <a:tailEnd type="none" w="med" len="med"/>
+                    </a:lnL>
+                    <a:lnR w="12700" cap="flat" cmpd="sng" algn="ctr">
+                      <a:solidFill>
+                        <a:schemeClr val="tx1"/>
+                      </a:solidFill>
+                      <a:prstDash val="solid"/>
+                      <a:round/>
+                      <a:headEnd type="none" w="med" len="med"/>
+                      <a:tailEnd type="none" w="med" len="med"/>
+                    </a:lnR>
+                    <a:lnT w="12700" cap="flat" cmpd="sng" algn="ctr">
+                      <a:solidFill>
+                        <a:schemeClr val="tx1"/>
+                      </a:solidFill>
+                      <a:prstDash val="solid"/>
+                      <a:round/>
+                      <a:headEnd type="none" w="med" len="med"/>
+                      <a:tailEnd type="none" w="med" len="med"/>
+                    </a:lnT>
+                    <a:lnB w="12700" cap="flat" cmpd="sng" algn="ctr">
+                      <a:solidFill>
+                        <a:schemeClr val="tx1"/>
+                      </a:solidFill>
+                      <a:prstDash val="solid"/>
+                      <a:round/>
+                      <a:headEnd type="none" w="med" len="med"/>
+                      <a:tailEnd type="none" w="med" len="med"/>
+                    </a:lnB>
+                    <a:noFill/>
+                  </a:tcPr>
+                </a:tc>
+                <a:tc>
+                  <a:txBody>
+                    <a:bodyPr/>
+                    <a:lstStyle/>
+                    <a:p>
+                      <a:pPr algn="ctr" latinLnBrk="1"/>
+                      <a:r>
+                        <a:rPr lang="en-US" altLang="ko-KR" dirty="0">
+                          <a:solidFill>
+                            <a:schemeClr val="tx1"/>
+                          </a:solidFill>
+                        </a:rPr>
+                        <a:t>50</a:t>
+                      </a:r>
+                      <a:endParaRPr lang="ko-KR" altLang="en-US" dirty="0">
+                        <a:solidFill>
+                          <a:schemeClr val="tx1"/>
+                        </a:solidFill>
+                      </a:endParaRPr>
+                    </a:p>
+                  </a:txBody>
+                  <a:tcPr>
+                    <a:lnL w="12700" cap="flat" cmpd="sng" algn="ctr">
+                      <a:solidFill>
+                        <a:schemeClr val="tx1"/>
+                      </a:solidFill>
+                      <a:prstDash val="solid"/>
+                      <a:round/>
+                      <a:headEnd type="none" w="med" len="med"/>
+                      <a:tailEnd type="none" w="med" len="med"/>
+                    </a:lnL>
+                    <a:lnR w="12700" cap="flat" cmpd="sng" algn="ctr">
+                      <a:solidFill>
+                        <a:schemeClr val="tx1"/>
+                      </a:solidFill>
+                      <a:prstDash val="solid"/>
+                      <a:round/>
+                      <a:headEnd type="none" w="med" len="med"/>
+                      <a:tailEnd type="none" w="med" len="med"/>
+                    </a:lnR>
+                    <a:lnT w="12700" cap="flat" cmpd="sng" algn="ctr">
+                      <a:solidFill>
+                        <a:schemeClr val="tx1"/>
+                      </a:solidFill>
+                      <a:prstDash val="solid"/>
+                      <a:round/>
+                      <a:headEnd type="none" w="med" len="med"/>
+                      <a:tailEnd type="none" w="med" len="med"/>
+                    </a:lnT>
+                    <a:lnB w="12700" cap="flat" cmpd="sng" algn="ctr">
+                      <a:solidFill>
+                        <a:schemeClr val="tx1"/>
+                      </a:solidFill>
+                      <a:prstDash val="solid"/>
+                      <a:round/>
+                      <a:headEnd type="none" w="med" len="med"/>
+                      <a:tailEnd type="none" w="med" len="med"/>
+                    </a:lnB>
+                    <a:noFill/>
+                  </a:tcPr>
+                </a:tc>
+                <a:extLst>
+                  <a:ext uri="{0D108BD9-81ED-4DB2-BD59-A6C34878D82A}">
+                    <a16:rowId xmlns:a16="http://schemas.microsoft.com/office/drawing/2014/main" val="3919909872"/>
+                  </a:ext>
+                </a:extLst>
+              </a:tr>
+            </a:tbl>
+          </a:graphicData>
+        </a:graphic>
+      </p:graphicFrame>
+      <p:grpSp>
+        <p:nvGrpSpPr>
+          <p:cNvPr id="36" name="그룹 35">
+            <a:extLst>
+              <a:ext uri="{FF2B5EF4-FFF2-40B4-BE49-F238E27FC236}">
+                <a16:creationId xmlns:a16="http://schemas.microsoft.com/office/drawing/2014/main" id="{99378478-495A-95FF-9F86-9AE54507F9A6}"/>
+              </a:ext>
+            </a:extLst>
+          </p:cNvPr>
+          <p:cNvGrpSpPr/>
+          <p:nvPr/>
+        </p:nvGrpSpPr>
+        <p:grpSpPr>
+          <a:xfrm>
+            <a:off x="6802408" y="4034651"/>
+            <a:ext cx="827314" cy="715199"/>
+            <a:chOff x="8596086" y="2744558"/>
+            <a:chExt cx="827314" cy="715199"/>
+          </a:xfrm>
+        </p:grpSpPr>
+        <p:sp>
+          <p:nvSpPr>
+            <p:cNvPr id="37" name="사각형: 둥근 모서리 36">
+              <a:extLst>
+                <a:ext uri="{FF2B5EF4-FFF2-40B4-BE49-F238E27FC236}">
+                  <a16:creationId xmlns:a16="http://schemas.microsoft.com/office/drawing/2014/main" id="{342C93D0-7B3B-DEEF-07BC-B1224E629730}"/>
+                </a:ext>
+              </a:extLst>
+            </p:cNvPr>
+            <p:cNvSpPr>
+              <a:spLocks/>
+            </p:cNvSpPr>
+            <p:nvPr/>
+          </p:nvSpPr>
+          <p:spPr>
+            <a:xfrm>
+              <a:off x="8596086" y="3153658"/>
+              <a:ext cx="827314" cy="306099"/>
+            </a:xfrm>
+            <a:prstGeom prst="roundRect">
+              <a:avLst/>
+            </a:prstGeom>
+            <a:noFill/>
+          </p:spPr>
+          <p:style>
+            <a:lnRef idx="2">
+              <a:schemeClr val="accent1">
+                <a:shade val="15000"/>
+              </a:schemeClr>
+            </a:lnRef>
+            <a:fillRef idx="1">
+              <a:schemeClr val="accent1"/>
+            </a:fillRef>
+            <a:effectRef idx="0">
+              <a:schemeClr val="accent1"/>
+            </a:effectRef>
+            <a:fontRef idx="minor">
+              <a:schemeClr val="lt1"/>
+            </a:fontRef>
+          </p:style>
+          <p:txBody>
+            <a:bodyPr rtlCol="0" anchor="ctr"/>
+            <a:lstStyle/>
+            <a:p>
+              <a:pPr algn="ctr"/>
+              <a:r>
+                <a:rPr lang="en-US" altLang="ko-KR" b="1" dirty="0">
+                  <a:solidFill>
+                    <a:srgbClr val="FF0000"/>
+                  </a:solidFill>
+                </a:rPr>
+                <a:t>Rear</a:t>
+              </a:r>
+              <a:endParaRPr lang="ko-KR" altLang="en-US" b="1" dirty="0">
+                <a:solidFill>
+                  <a:srgbClr val="FF0000"/>
+                </a:solidFill>
+              </a:endParaRPr>
+            </a:p>
+          </p:txBody>
+        </p:sp>
+        <p:sp>
+          <p:nvSpPr>
+            <p:cNvPr id="38" name="화살표: 위쪽 37">
+              <a:extLst>
+                <a:ext uri="{FF2B5EF4-FFF2-40B4-BE49-F238E27FC236}">
+                  <a16:creationId xmlns:a16="http://schemas.microsoft.com/office/drawing/2014/main" id="{5C4CAC79-B2D1-CBFF-4F4A-2E5D23B2821E}"/>
+                </a:ext>
+              </a:extLst>
+            </p:cNvPr>
+            <p:cNvSpPr>
+              <a:spLocks/>
+            </p:cNvSpPr>
+            <p:nvPr/>
+          </p:nvSpPr>
+          <p:spPr>
+            <a:xfrm>
+              <a:off x="8908143" y="2744558"/>
+              <a:ext cx="203200" cy="409100"/>
+            </a:xfrm>
+            <a:prstGeom prst="upArrow">
+              <a:avLst/>
+            </a:prstGeom>
+            <a:solidFill>
+              <a:srgbClr val="FF0000"/>
+            </a:solidFill>
+          </p:spPr>
+          <p:style>
+            <a:lnRef idx="2">
+              <a:schemeClr val="accent1">
+                <a:shade val="15000"/>
+              </a:schemeClr>
+            </a:lnRef>
+            <a:fillRef idx="1">
+              <a:schemeClr val="accent1"/>
+            </a:fillRef>
+            <a:effectRef idx="0">
+              <a:schemeClr val="accent1"/>
+            </a:effectRef>
+            <a:fontRef idx="minor">
+              <a:schemeClr val="lt1"/>
+            </a:fontRef>
+          </p:style>
+          <p:txBody>
+            <a:bodyPr rtlCol="0" anchor="ctr"/>
+            <a:lstStyle/>
+            <a:p>
+              <a:pPr algn="ctr"/>
+              <a:endParaRPr lang="ko-KR" altLang="en-US"/>
+            </a:p>
+          </p:txBody>
+        </p:sp>
+      </p:grpSp>
+      <p:grpSp>
+        <p:nvGrpSpPr>
+          <p:cNvPr id="39" name="그룹 38">
+            <a:extLst>
+              <a:ext uri="{FF2B5EF4-FFF2-40B4-BE49-F238E27FC236}">
+                <a16:creationId xmlns:a16="http://schemas.microsoft.com/office/drawing/2014/main" id="{C242B9D7-7BB8-0853-E614-A852BF97E5DB}"/>
+              </a:ext>
+            </a:extLst>
+          </p:cNvPr>
+          <p:cNvGrpSpPr/>
+          <p:nvPr/>
+        </p:nvGrpSpPr>
+        <p:grpSpPr>
+          <a:xfrm>
+            <a:off x="7942656" y="2596461"/>
+            <a:ext cx="827314" cy="625293"/>
+            <a:chOff x="7913626" y="234700"/>
+            <a:chExt cx="827314" cy="625293"/>
+          </a:xfrm>
+        </p:grpSpPr>
+        <p:sp>
+          <p:nvSpPr>
+            <p:cNvPr id="40" name="사각형: 둥근 모서리 39">
+              <a:extLst>
+                <a:ext uri="{FF2B5EF4-FFF2-40B4-BE49-F238E27FC236}">
+                  <a16:creationId xmlns:a16="http://schemas.microsoft.com/office/drawing/2014/main" id="{7F0BDC00-8EEB-8C53-7DCB-1FE6529141CB}"/>
+                </a:ext>
+              </a:extLst>
+            </p:cNvPr>
+            <p:cNvSpPr/>
+            <p:nvPr/>
+          </p:nvSpPr>
+          <p:spPr>
+            <a:xfrm>
+              <a:off x="7913626" y="234700"/>
+              <a:ext cx="827314" cy="306099"/>
+            </a:xfrm>
+            <a:prstGeom prst="roundRect">
+              <a:avLst/>
+            </a:prstGeom>
+            <a:noFill/>
+          </p:spPr>
+          <p:style>
+            <a:lnRef idx="2">
+              <a:schemeClr val="accent1">
+                <a:shade val="15000"/>
+              </a:schemeClr>
+            </a:lnRef>
+            <a:fillRef idx="1">
+              <a:schemeClr val="accent1"/>
+            </a:fillRef>
+            <a:effectRef idx="0">
+              <a:schemeClr val="accent1"/>
+            </a:effectRef>
+            <a:fontRef idx="minor">
+              <a:schemeClr val="lt1"/>
+            </a:fontRef>
+          </p:style>
+          <p:txBody>
+            <a:bodyPr rtlCol="0" anchor="ctr"/>
+            <a:lstStyle/>
+            <a:p>
+              <a:pPr algn="ctr"/>
+              <a:r>
+                <a:rPr lang="en-US" altLang="ko-KR" b="1" dirty="0">
+                  <a:solidFill>
+                    <a:srgbClr val="0000FF"/>
+                  </a:solidFill>
+                </a:rPr>
+                <a:t>Front</a:t>
+              </a:r>
+              <a:endParaRPr lang="ko-KR" altLang="en-US" b="1" dirty="0">
+                <a:solidFill>
+                  <a:srgbClr val="0000FF"/>
+                </a:solidFill>
+              </a:endParaRPr>
+            </a:p>
+          </p:txBody>
+        </p:sp>
+        <p:sp>
+          <p:nvSpPr>
+            <p:cNvPr id="41" name="화살표: 아래쪽 40">
+              <a:extLst>
+                <a:ext uri="{FF2B5EF4-FFF2-40B4-BE49-F238E27FC236}">
+                  <a16:creationId xmlns:a16="http://schemas.microsoft.com/office/drawing/2014/main" id="{4D4EA532-85C2-1814-9A41-7BC58E681945}"/>
+                </a:ext>
+              </a:extLst>
+            </p:cNvPr>
+            <p:cNvSpPr/>
+            <p:nvPr/>
+          </p:nvSpPr>
+          <p:spPr>
+            <a:xfrm>
+              <a:off x="8240197" y="553894"/>
+              <a:ext cx="174171" cy="306099"/>
+            </a:xfrm>
+            <a:prstGeom prst="downArrow">
+              <a:avLst/>
+            </a:prstGeom>
+          </p:spPr>
+          <p:style>
+            <a:lnRef idx="2">
+              <a:schemeClr val="accent1">
+                <a:shade val="15000"/>
+              </a:schemeClr>
+            </a:lnRef>
+            <a:fillRef idx="1">
+              <a:schemeClr val="accent1"/>
+            </a:fillRef>
+            <a:effectRef idx="0">
+              <a:schemeClr val="accent1"/>
+            </a:effectRef>
+            <a:fontRef idx="minor">
+              <a:schemeClr val="lt1"/>
+            </a:fontRef>
+          </p:style>
+          <p:txBody>
+            <a:bodyPr rtlCol="0" anchor="ctr"/>
+            <a:lstStyle/>
+            <a:p>
+              <a:pPr algn="ctr"/>
+              <a:endParaRPr lang="ko-KR" altLang="en-US"/>
+            </a:p>
+          </p:txBody>
+        </p:sp>
+      </p:grpSp>
+      <p:graphicFrame>
+        <p:nvGraphicFramePr>
+          <p:cNvPr id="42" name="표 41">
+            <a:extLst>
+              <a:ext uri="{FF2B5EF4-FFF2-40B4-BE49-F238E27FC236}">
+                <a16:creationId xmlns:a16="http://schemas.microsoft.com/office/drawing/2014/main" id="{F9289DDB-9383-1B65-C754-3BEDB6E53507}"/>
+              </a:ext>
+            </a:extLst>
+          </p:cNvPr>
+          <p:cNvGraphicFramePr>
+            <a:graphicFrameLocks noGrp="1"/>
+          </p:cNvGraphicFramePr>
+          <p:nvPr/>
+        </p:nvGraphicFramePr>
+        <p:xfrm>
+          <a:off x="5514941" y="5369856"/>
+          <a:ext cx="5682745" cy="731520"/>
+        </p:xfrm>
+        <a:graphic>
+          <a:graphicData uri="http://schemas.openxmlformats.org/drawingml/2006/table">
+            <a:tbl>
+              <a:tblPr firstRow="1" bandRow="1">
+                <a:tableStyleId>{5C22544A-7EE6-4342-B048-85BDC9FD1C3A}</a:tableStyleId>
+              </a:tblPr>
+              <a:tblGrid>
+                <a:gridCol w="1136549">
+                  <a:extLst>
+                    <a:ext uri="{9D8B030D-6E8A-4147-A177-3AD203B41FA5}">
+                      <a16:colId xmlns:a16="http://schemas.microsoft.com/office/drawing/2014/main" val="2978345313"/>
+                    </a:ext>
+                  </a:extLst>
+                </a:gridCol>
+                <a:gridCol w="1136549">
+                  <a:extLst>
+                    <a:ext uri="{9D8B030D-6E8A-4147-A177-3AD203B41FA5}">
+                      <a16:colId xmlns:a16="http://schemas.microsoft.com/office/drawing/2014/main" val="516520693"/>
+                    </a:ext>
+                  </a:extLst>
+                </a:gridCol>
+                <a:gridCol w="1136549">
+                  <a:extLst>
+                    <a:ext uri="{9D8B030D-6E8A-4147-A177-3AD203B41FA5}">
+                      <a16:colId xmlns:a16="http://schemas.microsoft.com/office/drawing/2014/main" val="411927753"/>
+                    </a:ext>
+                  </a:extLst>
+                </a:gridCol>
+                <a:gridCol w="1136549">
+                  <a:extLst>
+                    <a:ext uri="{9D8B030D-6E8A-4147-A177-3AD203B41FA5}">
+                      <a16:colId xmlns:a16="http://schemas.microsoft.com/office/drawing/2014/main" val="2282447059"/>
+                    </a:ext>
+                  </a:extLst>
+                </a:gridCol>
+                <a:gridCol w="1136549">
+                  <a:extLst>
+                    <a:ext uri="{9D8B030D-6E8A-4147-A177-3AD203B41FA5}">
+                      <a16:colId xmlns:a16="http://schemas.microsoft.com/office/drawing/2014/main" val="1506443707"/>
+                    </a:ext>
+                  </a:extLst>
+                </a:gridCol>
+              </a:tblGrid>
+              <a:tr h="295187">
+                <a:tc>
+                  <a:txBody>
+                    <a:bodyPr/>
+                    <a:lstStyle/>
+                    <a:p>
+                      <a:pPr algn="ctr" latinLnBrk="1"/>
+                      <a:r>
+                        <a:rPr lang="en-US" altLang="ko-KR" b="0" dirty="0">
+                          <a:solidFill>
+                            <a:schemeClr val="tx1"/>
+                          </a:solidFill>
+                        </a:rPr>
+                        <a:t>[0]</a:t>
+                      </a:r>
+                      <a:endParaRPr lang="ko-KR" altLang="en-US" b="0" dirty="0">
+                        <a:solidFill>
+                          <a:schemeClr val="tx1"/>
+                        </a:solidFill>
+                      </a:endParaRPr>
+                    </a:p>
+                  </a:txBody>
+                  <a:tcPr>
+                    <a:lnL w="12700" cap="flat" cmpd="sng" algn="ctr">
+                      <a:solidFill>
+                        <a:schemeClr val="tx1"/>
+                      </a:solidFill>
+                      <a:prstDash val="solid"/>
+                      <a:round/>
+                      <a:headEnd type="none" w="med" len="med"/>
+                      <a:tailEnd type="none" w="med" len="med"/>
+                    </a:lnL>
+                    <a:lnR w="12700" cap="flat" cmpd="sng" algn="ctr">
+                      <a:solidFill>
+                        <a:schemeClr val="tx1"/>
+                      </a:solidFill>
+                      <a:prstDash val="solid"/>
+                      <a:round/>
+                      <a:headEnd type="none" w="med" len="med"/>
+                      <a:tailEnd type="none" w="med" len="med"/>
+                    </a:lnR>
+                    <a:lnT w="12700" cap="flat" cmpd="sng" algn="ctr">
+                      <a:solidFill>
+                        <a:schemeClr val="tx1"/>
+                      </a:solidFill>
+                      <a:prstDash val="solid"/>
+                      <a:round/>
+                      <a:headEnd type="none" w="med" len="med"/>
+                      <a:tailEnd type="none" w="med" len="med"/>
+                    </a:lnT>
+                    <a:lnB w="12700" cap="flat" cmpd="sng" algn="ctr">
+                      <a:solidFill>
+                        <a:schemeClr val="tx1"/>
+                      </a:solidFill>
+                      <a:prstDash val="solid"/>
+                      <a:round/>
+                      <a:headEnd type="none" w="med" len="med"/>
+                      <a:tailEnd type="none" w="med" len="med"/>
+                    </a:lnB>
+                    <a:noFill/>
+                  </a:tcPr>
+                </a:tc>
+                <a:tc>
+                  <a:txBody>
+                    <a:bodyPr/>
+                    <a:lstStyle/>
+                    <a:p>
+                      <a:pPr algn="ctr" latinLnBrk="1"/>
+                      <a:r>
+                        <a:rPr lang="en-US" altLang="ko-KR" b="0" dirty="0">
+                          <a:solidFill>
+                            <a:schemeClr val="tx1"/>
+                          </a:solidFill>
+                        </a:rPr>
+                        <a:t>[1]</a:t>
+                      </a:r>
+                      <a:endParaRPr lang="ko-KR" altLang="en-US" dirty="0">
+                        <a:solidFill>
+                          <a:schemeClr val="tx1"/>
+                        </a:solidFill>
+                      </a:endParaRPr>
+                    </a:p>
+                  </a:txBody>
+                  <a:tcPr>
+                    <a:lnL w="12700" cap="flat" cmpd="sng" algn="ctr">
+                      <a:solidFill>
+                        <a:schemeClr val="tx1"/>
+                      </a:solidFill>
+                      <a:prstDash val="solid"/>
+                      <a:round/>
+                      <a:headEnd type="none" w="med" len="med"/>
+                      <a:tailEnd type="none" w="med" len="med"/>
+                    </a:lnL>
+                    <a:lnR w="12700" cap="flat" cmpd="sng" algn="ctr">
+                      <a:solidFill>
+                        <a:schemeClr val="tx1"/>
+                      </a:solidFill>
+                      <a:prstDash val="solid"/>
+                      <a:round/>
+                      <a:headEnd type="none" w="med" len="med"/>
+                      <a:tailEnd type="none" w="med" len="med"/>
+                    </a:lnR>
+                    <a:lnT w="12700" cap="flat" cmpd="sng" algn="ctr">
+                      <a:solidFill>
+                        <a:schemeClr val="tx1"/>
+                      </a:solidFill>
+                      <a:prstDash val="solid"/>
+                      <a:round/>
+                      <a:headEnd type="none" w="med" len="med"/>
+                      <a:tailEnd type="none" w="med" len="med"/>
+                    </a:lnT>
+                    <a:lnB w="12700" cap="flat" cmpd="sng" algn="ctr">
+                      <a:solidFill>
+                        <a:schemeClr val="tx1"/>
+                      </a:solidFill>
+                      <a:prstDash val="solid"/>
+                      <a:round/>
+                      <a:headEnd type="none" w="med" len="med"/>
+                      <a:tailEnd type="none" w="med" len="med"/>
+                    </a:lnB>
+                    <a:noFill/>
+                  </a:tcPr>
+                </a:tc>
+                <a:tc>
+                  <a:txBody>
+                    <a:bodyPr/>
+                    <a:lstStyle/>
+                    <a:p>
+                      <a:pPr algn="ctr" latinLnBrk="1"/>
+                      <a:r>
+                        <a:rPr lang="en-US" altLang="ko-KR" b="0" dirty="0">
+                          <a:solidFill>
+                            <a:schemeClr val="tx1"/>
+                          </a:solidFill>
+                        </a:rPr>
+                        <a:t>[2]</a:t>
+                      </a:r>
+                      <a:endParaRPr lang="ko-KR" altLang="en-US" dirty="0">
+                        <a:solidFill>
+                          <a:schemeClr val="tx1"/>
+                        </a:solidFill>
+                      </a:endParaRPr>
+                    </a:p>
+                  </a:txBody>
+                  <a:tcPr>
+                    <a:lnL w="12700" cap="flat" cmpd="sng" algn="ctr">
+                      <a:solidFill>
+                        <a:schemeClr val="tx1"/>
+                      </a:solidFill>
+                      <a:prstDash val="solid"/>
+                      <a:round/>
+                      <a:headEnd type="none" w="med" len="med"/>
+                      <a:tailEnd type="none" w="med" len="med"/>
+                    </a:lnL>
+                    <a:lnR w="12700" cap="flat" cmpd="sng" algn="ctr">
+                      <a:solidFill>
+                        <a:schemeClr val="tx1"/>
+                      </a:solidFill>
+                      <a:prstDash val="solid"/>
+                      <a:round/>
+                      <a:headEnd type="none" w="med" len="med"/>
+                      <a:tailEnd type="none" w="med" len="med"/>
+                    </a:lnR>
+                    <a:lnT w="12700" cap="flat" cmpd="sng" algn="ctr">
+                      <a:solidFill>
+                        <a:schemeClr val="tx1"/>
+                      </a:solidFill>
+                      <a:prstDash val="solid"/>
+                      <a:round/>
+                      <a:headEnd type="none" w="med" len="med"/>
+                      <a:tailEnd type="none" w="med" len="med"/>
+                    </a:lnT>
+                    <a:lnB w="12700" cap="flat" cmpd="sng" algn="ctr">
+                      <a:solidFill>
+                        <a:schemeClr val="tx1"/>
+                      </a:solidFill>
+                      <a:prstDash val="solid"/>
+                      <a:round/>
+                      <a:headEnd type="none" w="med" len="med"/>
+                      <a:tailEnd type="none" w="med" len="med"/>
+                    </a:lnB>
+                    <a:noFill/>
+                  </a:tcPr>
+                </a:tc>
+                <a:tc>
+                  <a:txBody>
+                    <a:bodyPr/>
+                    <a:lstStyle/>
+                    <a:p>
+                      <a:pPr algn="ctr" latinLnBrk="1"/>
+                      <a:r>
+                        <a:rPr lang="en-US" altLang="ko-KR" b="0" dirty="0">
+                          <a:solidFill>
+                            <a:schemeClr val="tx1"/>
+                          </a:solidFill>
+                        </a:rPr>
+                        <a:t>[3]</a:t>
+                      </a:r>
+                      <a:endParaRPr lang="ko-KR" altLang="en-US" dirty="0">
+                        <a:solidFill>
+                          <a:schemeClr val="tx1"/>
+                        </a:solidFill>
+                      </a:endParaRPr>
+                    </a:p>
+                  </a:txBody>
+                  <a:tcPr>
+                    <a:lnL w="12700" cap="flat" cmpd="sng" algn="ctr">
+                      <a:solidFill>
+                        <a:schemeClr val="tx1"/>
+                      </a:solidFill>
+                      <a:prstDash val="solid"/>
+                      <a:round/>
+                      <a:headEnd type="none" w="med" len="med"/>
+                      <a:tailEnd type="none" w="med" len="med"/>
+                    </a:lnL>
+                    <a:lnR w="12700" cap="flat" cmpd="sng" algn="ctr">
+                      <a:solidFill>
+                        <a:schemeClr val="tx1"/>
+                      </a:solidFill>
+                      <a:prstDash val="solid"/>
+                      <a:round/>
+                      <a:headEnd type="none" w="med" len="med"/>
+                      <a:tailEnd type="none" w="med" len="med"/>
+                    </a:lnR>
+                    <a:lnT w="12700" cap="flat" cmpd="sng" algn="ctr">
+                      <a:solidFill>
+                        <a:schemeClr val="tx1"/>
+                      </a:solidFill>
+                      <a:prstDash val="solid"/>
+                      <a:round/>
+                      <a:headEnd type="none" w="med" len="med"/>
+                      <a:tailEnd type="none" w="med" len="med"/>
+                    </a:lnT>
+                    <a:lnB w="12700" cap="flat" cmpd="sng" algn="ctr">
+                      <a:solidFill>
+                        <a:schemeClr val="tx1"/>
+                      </a:solidFill>
+                      <a:prstDash val="solid"/>
+                      <a:round/>
+                      <a:headEnd type="none" w="med" len="med"/>
+                      <a:tailEnd type="none" w="med" len="med"/>
+                    </a:lnB>
+                    <a:noFill/>
+                  </a:tcPr>
+                </a:tc>
+                <a:tc>
+                  <a:txBody>
+                    <a:bodyPr/>
+                    <a:lstStyle/>
+                    <a:p>
+                      <a:pPr algn="ctr" latinLnBrk="1"/>
+                      <a:r>
+                        <a:rPr lang="en-US" altLang="ko-KR" b="0" dirty="0">
+                          <a:solidFill>
+                            <a:schemeClr val="tx1"/>
+                          </a:solidFill>
+                        </a:rPr>
+                        <a:t>[4]</a:t>
+                      </a:r>
+                      <a:endParaRPr lang="ko-KR" altLang="en-US" dirty="0">
+                        <a:solidFill>
+                          <a:schemeClr val="tx1"/>
+                        </a:solidFill>
+                      </a:endParaRPr>
+                    </a:p>
+                  </a:txBody>
+                  <a:tcPr>
+                    <a:lnL w="12700" cap="flat" cmpd="sng" algn="ctr">
+                      <a:solidFill>
+                        <a:schemeClr val="tx1"/>
+                      </a:solidFill>
+                      <a:prstDash val="solid"/>
+                      <a:round/>
+                      <a:headEnd type="none" w="med" len="med"/>
+                      <a:tailEnd type="none" w="med" len="med"/>
+                    </a:lnL>
+                    <a:lnR w="12700" cap="flat" cmpd="sng" algn="ctr">
+                      <a:solidFill>
+                        <a:schemeClr val="tx1"/>
+                      </a:solidFill>
+                      <a:prstDash val="solid"/>
+                      <a:round/>
+                      <a:headEnd type="none" w="med" len="med"/>
+                      <a:tailEnd type="none" w="med" len="med"/>
+                    </a:lnR>
+                    <a:lnT w="12700" cap="flat" cmpd="sng" algn="ctr">
+                      <a:solidFill>
+                        <a:schemeClr val="tx1"/>
+                      </a:solidFill>
+                      <a:prstDash val="solid"/>
+                      <a:round/>
+                      <a:headEnd type="none" w="med" len="med"/>
+                      <a:tailEnd type="none" w="med" len="med"/>
+                    </a:lnT>
+                    <a:lnB w="12700" cap="flat" cmpd="sng" algn="ctr">
+                      <a:solidFill>
+                        <a:schemeClr val="tx1"/>
+                      </a:solidFill>
+                      <a:prstDash val="solid"/>
+                      <a:round/>
+                      <a:headEnd type="none" w="med" len="med"/>
+                      <a:tailEnd type="none" w="med" len="med"/>
+                    </a:lnB>
+                    <a:noFill/>
+                  </a:tcPr>
+                </a:tc>
+                <a:extLst>
+                  <a:ext uri="{0D108BD9-81ED-4DB2-BD59-A6C34878D82A}">
+                    <a16:rowId xmlns:a16="http://schemas.microsoft.com/office/drawing/2014/main" val="3857244884"/>
+                  </a:ext>
+                </a:extLst>
+              </a:tr>
+              <a:tr h="295187">
+                <a:tc>
+                  <a:txBody>
+                    <a:bodyPr/>
+                    <a:lstStyle/>
+                    <a:p>
+                      <a:pPr algn="ctr" latinLnBrk="1"/>
+                      <a:r>
+                        <a:rPr lang="en-US" altLang="ko-KR" dirty="0">
+                          <a:solidFill>
+                            <a:schemeClr val="tx1"/>
+                          </a:solidFill>
+                        </a:rPr>
+                        <a:t>10</a:t>
+                      </a:r>
+                      <a:endParaRPr lang="ko-KR" altLang="en-US" dirty="0">
+                        <a:solidFill>
+                          <a:schemeClr val="tx1"/>
+                        </a:solidFill>
+                      </a:endParaRPr>
+                    </a:p>
+                  </a:txBody>
+                  <a:tcPr>
+                    <a:lnL w="12700" cap="flat" cmpd="sng" algn="ctr">
+                      <a:solidFill>
+                        <a:schemeClr val="tx1"/>
+                      </a:solidFill>
+                      <a:prstDash val="solid"/>
+                      <a:round/>
+                      <a:headEnd type="none" w="med" len="med"/>
+                      <a:tailEnd type="none" w="med" len="med"/>
+                    </a:lnL>
+                    <a:lnR w="12700" cap="flat" cmpd="sng" algn="ctr">
+                      <a:solidFill>
+                        <a:schemeClr val="tx1"/>
+                      </a:solidFill>
+                      <a:prstDash val="solid"/>
+                      <a:round/>
+                      <a:headEnd type="none" w="med" len="med"/>
+                      <a:tailEnd type="none" w="med" len="med"/>
+                    </a:lnR>
+                    <a:lnT w="12700" cap="flat" cmpd="sng" algn="ctr">
+                      <a:solidFill>
+                        <a:schemeClr val="tx1"/>
+                      </a:solidFill>
+                      <a:prstDash val="solid"/>
+                      <a:round/>
+                      <a:headEnd type="none" w="med" len="med"/>
+                      <a:tailEnd type="none" w="med" len="med"/>
+                    </a:lnT>
+                    <a:lnB w="12700" cap="flat" cmpd="sng" algn="ctr">
+                      <a:solidFill>
+                        <a:schemeClr val="tx1"/>
+                      </a:solidFill>
+                      <a:prstDash val="solid"/>
+                      <a:round/>
+                      <a:headEnd type="none" w="med" len="med"/>
+                      <a:tailEnd type="none" w="med" len="med"/>
+                    </a:lnB>
+                    <a:noFill/>
+                  </a:tcPr>
+                </a:tc>
+                <a:tc>
+                  <a:txBody>
+                    <a:bodyPr/>
+                    <a:lstStyle/>
+                    <a:p>
+                      <a:pPr algn="ctr" latinLnBrk="1"/>
+                      <a:r>
+                        <a:rPr lang="en-US" altLang="ko-KR" dirty="0">
+                          <a:solidFill>
+                            <a:schemeClr val="tx1"/>
+                          </a:solidFill>
+                        </a:rPr>
+                        <a:t>20</a:t>
+                      </a:r>
+                      <a:endParaRPr lang="ko-KR" altLang="en-US" dirty="0">
+                        <a:solidFill>
+                          <a:schemeClr val="tx1"/>
+                        </a:solidFill>
+                      </a:endParaRPr>
+                    </a:p>
+                  </a:txBody>
+                  <a:tcPr>
+                    <a:lnL w="12700" cap="flat" cmpd="sng" algn="ctr">
+                      <a:solidFill>
+                        <a:schemeClr val="tx1"/>
+                      </a:solidFill>
+                      <a:prstDash val="solid"/>
+                      <a:round/>
+                      <a:headEnd type="none" w="med" len="med"/>
+                      <a:tailEnd type="none" w="med" len="med"/>
+                    </a:lnL>
+                    <a:lnR w="12700" cap="flat" cmpd="sng" algn="ctr">
+                      <a:solidFill>
+                        <a:schemeClr val="tx1"/>
+                      </a:solidFill>
+                      <a:prstDash val="solid"/>
+                      <a:round/>
+                      <a:headEnd type="none" w="med" len="med"/>
+                      <a:tailEnd type="none" w="med" len="med"/>
+                    </a:lnR>
+                    <a:lnT w="12700" cap="flat" cmpd="sng" algn="ctr">
+                      <a:solidFill>
+                        <a:schemeClr val="tx1"/>
+                      </a:solidFill>
+                      <a:prstDash val="solid"/>
+                      <a:round/>
+                      <a:headEnd type="none" w="med" len="med"/>
+                      <a:tailEnd type="none" w="med" len="med"/>
+                    </a:lnT>
+                    <a:lnB w="12700" cap="flat" cmpd="sng" algn="ctr">
+                      <a:solidFill>
+                        <a:schemeClr val="tx1"/>
+                      </a:solidFill>
+                      <a:prstDash val="solid"/>
+                      <a:round/>
+                      <a:headEnd type="none" w="med" len="med"/>
+                      <a:tailEnd type="none" w="med" len="med"/>
+                    </a:lnB>
+                    <a:noFill/>
+                  </a:tcPr>
+                </a:tc>
+                <a:tc>
+                  <a:txBody>
+                    <a:bodyPr/>
+                    <a:lstStyle/>
+                    <a:p>
+                      <a:pPr algn="ctr" latinLnBrk="1"/>
+                      <a:r>
+                        <a:rPr lang="en-US" altLang="ko-KR" dirty="0">
+                          <a:solidFill>
+                            <a:schemeClr val="tx1"/>
+                          </a:solidFill>
+                        </a:rPr>
+                        <a:t>30</a:t>
+                      </a:r>
+                      <a:endParaRPr lang="ko-KR" altLang="en-US" dirty="0">
+                        <a:solidFill>
+                          <a:schemeClr val="tx1"/>
+                        </a:solidFill>
+                      </a:endParaRPr>
+                    </a:p>
+                  </a:txBody>
+                  <a:tcPr>
+                    <a:lnL w="12700" cap="flat" cmpd="sng" algn="ctr">
+                      <a:solidFill>
+                        <a:schemeClr val="tx1"/>
+                      </a:solidFill>
+                      <a:prstDash val="solid"/>
+                      <a:round/>
+                      <a:headEnd type="none" w="med" len="med"/>
+                      <a:tailEnd type="none" w="med" len="med"/>
+                    </a:lnL>
+                    <a:lnR w="12700" cap="flat" cmpd="sng" algn="ctr">
+                      <a:solidFill>
+                        <a:schemeClr val="tx1"/>
+                      </a:solidFill>
+                      <a:prstDash val="solid"/>
+                      <a:round/>
+                      <a:headEnd type="none" w="med" len="med"/>
+                      <a:tailEnd type="none" w="med" len="med"/>
+                    </a:lnR>
+                    <a:lnT w="12700" cap="flat" cmpd="sng" algn="ctr">
+                      <a:solidFill>
+                        <a:schemeClr val="tx1"/>
+                      </a:solidFill>
+                      <a:prstDash val="solid"/>
+                      <a:round/>
+                      <a:headEnd type="none" w="med" len="med"/>
+                      <a:tailEnd type="none" w="med" len="med"/>
+                    </a:lnT>
+                    <a:lnB w="12700" cap="flat" cmpd="sng" algn="ctr">
+                      <a:solidFill>
+                        <a:schemeClr val="tx1"/>
+                      </a:solidFill>
+                      <a:prstDash val="solid"/>
+                      <a:round/>
+                      <a:headEnd type="none" w="med" len="med"/>
+                      <a:tailEnd type="none" w="med" len="med"/>
+                    </a:lnB>
+                    <a:noFill/>
+                  </a:tcPr>
+                </a:tc>
+                <a:tc>
+                  <a:txBody>
+                    <a:bodyPr/>
+                    <a:lstStyle/>
+                    <a:p>
+                      <a:pPr algn="ctr" latinLnBrk="1"/>
+                      <a:r>
+                        <a:rPr lang="en-US" altLang="ko-KR" dirty="0">
+                          <a:solidFill>
+                            <a:schemeClr val="tx1"/>
+                          </a:solidFill>
+                        </a:rPr>
+                        <a:t>40</a:t>
+                      </a:r>
+                      <a:endParaRPr lang="ko-KR" altLang="en-US" dirty="0">
+                        <a:solidFill>
+                          <a:schemeClr val="tx1"/>
+                        </a:solidFill>
+                      </a:endParaRPr>
+                    </a:p>
+                  </a:txBody>
+                  <a:tcPr>
+                    <a:lnL w="12700" cap="flat" cmpd="sng" algn="ctr">
+                      <a:solidFill>
+                        <a:schemeClr val="tx1"/>
+                      </a:solidFill>
+                      <a:prstDash val="solid"/>
+                      <a:round/>
+                      <a:headEnd type="none" w="med" len="med"/>
+                      <a:tailEnd type="none" w="med" len="med"/>
+                    </a:lnL>
+                    <a:lnR w="12700" cap="flat" cmpd="sng" algn="ctr">
+                      <a:solidFill>
+                        <a:schemeClr val="tx1"/>
+                      </a:solidFill>
+                      <a:prstDash val="solid"/>
+                      <a:round/>
+                      <a:headEnd type="none" w="med" len="med"/>
+                      <a:tailEnd type="none" w="med" len="med"/>
+                    </a:lnR>
+                    <a:lnT w="12700" cap="flat" cmpd="sng" algn="ctr">
+                      <a:solidFill>
+                        <a:schemeClr val="tx1"/>
+                      </a:solidFill>
+                      <a:prstDash val="solid"/>
+                      <a:round/>
+                      <a:headEnd type="none" w="med" len="med"/>
+                      <a:tailEnd type="none" w="med" len="med"/>
+                    </a:lnT>
+                    <a:lnB w="12700" cap="flat" cmpd="sng" algn="ctr">
+                      <a:solidFill>
+                        <a:schemeClr val="tx1"/>
+                      </a:solidFill>
+                      <a:prstDash val="solid"/>
+                      <a:round/>
+                      <a:headEnd type="none" w="med" len="med"/>
+                      <a:tailEnd type="none" w="med" len="med"/>
+                    </a:lnB>
+                    <a:noFill/>
+                  </a:tcPr>
+                </a:tc>
+                <a:tc>
+                  <a:txBody>
+                    <a:bodyPr/>
+                    <a:lstStyle/>
+                    <a:p>
+                      <a:pPr algn="ctr" latinLnBrk="1"/>
+                      <a:r>
+                        <a:rPr lang="en-US" altLang="ko-KR" dirty="0">
+                          <a:solidFill>
+                            <a:schemeClr val="tx1"/>
+                          </a:solidFill>
+                        </a:rPr>
+                        <a:t>-</a:t>
+                      </a:r>
+                      <a:endParaRPr lang="ko-KR" altLang="en-US" dirty="0">
+                        <a:solidFill>
+                          <a:schemeClr val="tx1"/>
+                        </a:solidFill>
+                      </a:endParaRPr>
+                    </a:p>
+                  </a:txBody>
+                  <a:tcPr>
+                    <a:lnL w="12700" cap="flat" cmpd="sng" algn="ctr">
+                      <a:solidFill>
+                        <a:schemeClr val="tx1"/>
+                      </a:solidFill>
+                      <a:prstDash val="solid"/>
+                      <a:round/>
+                      <a:headEnd type="none" w="med" len="med"/>
+                      <a:tailEnd type="none" w="med" len="med"/>
+                    </a:lnL>
+                    <a:lnR w="12700" cap="flat" cmpd="sng" algn="ctr">
+                      <a:solidFill>
+                        <a:schemeClr val="tx1"/>
+                      </a:solidFill>
+                      <a:prstDash val="solid"/>
+                      <a:round/>
+                      <a:headEnd type="none" w="med" len="med"/>
+                      <a:tailEnd type="none" w="med" len="med"/>
+                    </a:lnR>
+                    <a:lnT w="12700" cap="flat" cmpd="sng" algn="ctr">
+                      <a:solidFill>
+                        <a:schemeClr val="tx1"/>
+                      </a:solidFill>
+                      <a:prstDash val="solid"/>
+                      <a:round/>
+                      <a:headEnd type="none" w="med" len="med"/>
+                      <a:tailEnd type="none" w="med" len="med"/>
+                    </a:lnT>
+                    <a:lnB w="12700" cap="flat" cmpd="sng" algn="ctr">
+                      <a:solidFill>
+                        <a:schemeClr val="tx1"/>
+                      </a:solidFill>
+                      <a:prstDash val="solid"/>
+                      <a:round/>
+                      <a:headEnd type="none" w="med" len="med"/>
+                      <a:tailEnd type="none" w="med" len="med"/>
+                    </a:lnB>
+                    <a:noFill/>
+                  </a:tcPr>
+                </a:tc>
+                <a:extLst>
+                  <a:ext uri="{0D108BD9-81ED-4DB2-BD59-A6C34878D82A}">
+                    <a16:rowId xmlns:a16="http://schemas.microsoft.com/office/drawing/2014/main" val="3919909872"/>
+                  </a:ext>
+                </a:extLst>
+              </a:tr>
+            </a:tbl>
+          </a:graphicData>
+        </a:graphic>
+      </p:graphicFrame>
+      <p:grpSp>
+        <p:nvGrpSpPr>
+          <p:cNvPr id="43" name="그룹 42">
+            <a:extLst>
+              <a:ext uri="{FF2B5EF4-FFF2-40B4-BE49-F238E27FC236}">
+                <a16:creationId xmlns:a16="http://schemas.microsoft.com/office/drawing/2014/main" id="{ACF9E13A-AE3C-5C2F-8F7F-EDD14FC252AE}"/>
+              </a:ext>
+            </a:extLst>
+          </p:cNvPr>
+          <p:cNvGrpSpPr/>
+          <p:nvPr/>
+        </p:nvGrpSpPr>
+        <p:grpSpPr>
+          <a:xfrm>
+            <a:off x="10239175" y="6172021"/>
+            <a:ext cx="827314" cy="715199"/>
+            <a:chOff x="8596086" y="2744558"/>
+            <a:chExt cx="827314" cy="715199"/>
+          </a:xfrm>
+        </p:grpSpPr>
+        <p:sp>
+          <p:nvSpPr>
+            <p:cNvPr id="44" name="사각형: 둥근 모서리 43">
+              <a:extLst>
+                <a:ext uri="{FF2B5EF4-FFF2-40B4-BE49-F238E27FC236}">
+                  <a16:creationId xmlns:a16="http://schemas.microsoft.com/office/drawing/2014/main" id="{D296D6D0-F19E-1E01-DB34-2734FFBB437D}"/>
+                </a:ext>
+              </a:extLst>
+            </p:cNvPr>
+            <p:cNvSpPr>
+              <a:spLocks/>
+            </p:cNvSpPr>
+            <p:nvPr/>
+          </p:nvSpPr>
+          <p:spPr>
+            <a:xfrm>
+              <a:off x="8596086" y="3153658"/>
+              <a:ext cx="827314" cy="306099"/>
+            </a:xfrm>
+            <a:prstGeom prst="roundRect">
+              <a:avLst/>
+            </a:prstGeom>
+            <a:noFill/>
+          </p:spPr>
+          <p:style>
+            <a:lnRef idx="2">
+              <a:schemeClr val="accent1">
+                <a:shade val="15000"/>
+              </a:schemeClr>
+            </a:lnRef>
+            <a:fillRef idx="1">
+              <a:schemeClr val="accent1"/>
+            </a:fillRef>
+            <a:effectRef idx="0">
+              <a:schemeClr val="accent1"/>
+            </a:effectRef>
+            <a:fontRef idx="minor">
+              <a:schemeClr val="lt1"/>
+            </a:fontRef>
+          </p:style>
+          <p:txBody>
+            <a:bodyPr rtlCol="0" anchor="ctr"/>
+            <a:lstStyle/>
+            <a:p>
+              <a:pPr algn="ctr"/>
+              <a:r>
+                <a:rPr lang="en-US" altLang="ko-KR" b="1" dirty="0">
+                  <a:solidFill>
+                    <a:srgbClr val="FF0000"/>
+                  </a:solidFill>
+                </a:rPr>
+                <a:t>Rear</a:t>
+              </a:r>
+              <a:endParaRPr lang="ko-KR" altLang="en-US" b="1" dirty="0">
+                <a:solidFill>
+                  <a:srgbClr val="FF0000"/>
+                </a:solidFill>
+              </a:endParaRPr>
+            </a:p>
+          </p:txBody>
+        </p:sp>
+        <p:sp>
+          <p:nvSpPr>
+            <p:cNvPr id="45" name="화살표: 위쪽 44">
+              <a:extLst>
+                <a:ext uri="{FF2B5EF4-FFF2-40B4-BE49-F238E27FC236}">
+                  <a16:creationId xmlns:a16="http://schemas.microsoft.com/office/drawing/2014/main" id="{ABD99925-5B95-4B80-A75C-2794C06BDF28}"/>
+                </a:ext>
+              </a:extLst>
+            </p:cNvPr>
+            <p:cNvSpPr>
+              <a:spLocks/>
+            </p:cNvSpPr>
+            <p:nvPr/>
+          </p:nvSpPr>
+          <p:spPr>
+            <a:xfrm>
+              <a:off x="8908143" y="2744558"/>
+              <a:ext cx="203200" cy="409100"/>
+            </a:xfrm>
+            <a:prstGeom prst="upArrow">
+              <a:avLst/>
+            </a:prstGeom>
+            <a:solidFill>
+              <a:srgbClr val="FF0000"/>
+            </a:solidFill>
+          </p:spPr>
+          <p:style>
+            <a:lnRef idx="2">
+              <a:schemeClr val="accent1">
+                <a:shade val="15000"/>
+              </a:schemeClr>
+            </a:lnRef>
+            <a:fillRef idx="1">
+              <a:schemeClr val="accent1"/>
+            </a:fillRef>
+            <a:effectRef idx="0">
+              <a:schemeClr val="accent1"/>
+            </a:effectRef>
+            <a:fontRef idx="minor">
+              <a:schemeClr val="lt1"/>
+            </a:fontRef>
+          </p:style>
+          <p:txBody>
+            <a:bodyPr rtlCol="0" anchor="ctr"/>
+            <a:lstStyle/>
+            <a:p>
+              <a:pPr algn="ctr"/>
+              <a:endParaRPr lang="ko-KR" altLang="en-US"/>
+            </a:p>
+          </p:txBody>
+        </p:sp>
+      </p:grpSp>
+      <p:grpSp>
+        <p:nvGrpSpPr>
+          <p:cNvPr id="46" name="그룹 45">
+            <a:extLst>
+              <a:ext uri="{FF2B5EF4-FFF2-40B4-BE49-F238E27FC236}">
+                <a16:creationId xmlns:a16="http://schemas.microsoft.com/office/drawing/2014/main" id="{8F7EA9E4-7CE1-6454-893E-3FBE8093FF6B}"/>
+              </a:ext>
+            </a:extLst>
+          </p:cNvPr>
+          <p:cNvGrpSpPr/>
+          <p:nvPr/>
+        </p:nvGrpSpPr>
+        <p:grpSpPr>
+          <a:xfrm>
+            <a:off x="10239176" y="4744563"/>
+            <a:ext cx="827314" cy="625293"/>
+            <a:chOff x="7913626" y="234700"/>
+            <a:chExt cx="827314" cy="625293"/>
+          </a:xfrm>
+        </p:grpSpPr>
+        <p:sp>
+          <p:nvSpPr>
+            <p:cNvPr id="47" name="사각형: 둥근 모서리 46">
+              <a:extLst>
+                <a:ext uri="{FF2B5EF4-FFF2-40B4-BE49-F238E27FC236}">
+                  <a16:creationId xmlns:a16="http://schemas.microsoft.com/office/drawing/2014/main" id="{A8A70CDE-F780-BB61-5ECD-B2C93DB1AB45}"/>
+                </a:ext>
+              </a:extLst>
+            </p:cNvPr>
+            <p:cNvSpPr/>
+            <p:nvPr/>
+          </p:nvSpPr>
+          <p:spPr>
+            <a:xfrm>
+              <a:off x="7913626" y="234700"/>
+              <a:ext cx="827314" cy="306099"/>
+            </a:xfrm>
+            <a:prstGeom prst="roundRect">
+              <a:avLst/>
+            </a:prstGeom>
+            <a:noFill/>
+          </p:spPr>
+          <p:style>
+            <a:lnRef idx="2">
+              <a:schemeClr val="accent1">
+                <a:shade val="15000"/>
+              </a:schemeClr>
+            </a:lnRef>
+            <a:fillRef idx="1">
+              <a:schemeClr val="accent1"/>
+            </a:fillRef>
+            <a:effectRef idx="0">
+              <a:schemeClr val="accent1"/>
+            </a:effectRef>
+            <a:fontRef idx="minor">
+              <a:schemeClr val="lt1"/>
+            </a:fontRef>
+          </p:style>
+          <p:txBody>
+            <a:bodyPr rtlCol="0" anchor="ctr"/>
+            <a:lstStyle/>
+            <a:p>
+              <a:pPr algn="ctr"/>
+              <a:r>
+                <a:rPr lang="en-US" altLang="ko-KR" b="1" dirty="0">
+                  <a:solidFill>
+                    <a:srgbClr val="0000FF"/>
+                  </a:solidFill>
+                </a:rPr>
+                <a:t>Front</a:t>
+              </a:r>
+              <a:endParaRPr lang="ko-KR" altLang="en-US" b="1" dirty="0">
+                <a:solidFill>
+                  <a:srgbClr val="0000FF"/>
+                </a:solidFill>
+              </a:endParaRPr>
+            </a:p>
+          </p:txBody>
+        </p:sp>
+        <p:sp>
+          <p:nvSpPr>
+            <p:cNvPr id="48" name="화살표: 아래쪽 47">
+              <a:extLst>
+                <a:ext uri="{FF2B5EF4-FFF2-40B4-BE49-F238E27FC236}">
+                  <a16:creationId xmlns:a16="http://schemas.microsoft.com/office/drawing/2014/main" id="{275CE242-173F-83F3-85A8-6C64DA1D9C73}"/>
+                </a:ext>
+              </a:extLst>
+            </p:cNvPr>
+            <p:cNvSpPr/>
+            <p:nvPr/>
+          </p:nvSpPr>
+          <p:spPr>
+            <a:xfrm>
+              <a:off x="8240197" y="553894"/>
+              <a:ext cx="174171" cy="306099"/>
+            </a:xfrm>
+            <a:prstGeom prst="downArrow">
+              <a:avLst/>
+            </a:prstGeom>
+          </p:spPr>
+          <p:style>
+            <a:lnRef idx="2">
+              <a:schemeClr val="accent1">
+                <a:shade val="15000"/>
+              </a:schemeClr>
+            </a:lnRef>
+            <a:fillRef idx="1">
+              <a:schemeClr val="accent1"/>
+            </a:fillRef>
+            <a:effectRef idx="0">
+              <a:schemeClr val="accent1"/>
+            </a:effectRef>
+            <a:fontRef idx="minor">
+              <a:schemeClr val="lt1"/>
+            </a:fontRef>
+          </p:style>
+          <p:txBody>
+            <a:bodyPr rtlCol="0" anchor="ctr"/>
+            <a:lstStyle/>
+            <a:p>
+              <a:pPr algn="ctr"/>
+              <a:endParaRPr lang="ko-KR" altLang="en-US"/>
+            </a:p>
+          </p:txBody>
+        </p:sp>
+      </p:grpSp>
+      <p:sp>
+        <p:nvSpPr>
+          <p:cNvPr id="49" name="TextBox 48">
+            <a:extLst>
+              <a:ext uri="{FF2B5EF4-FFF2-40B4-BE49-F238E27FC236}">
+                <a16:creationId xmlns:a16="http://schemas.microsoft.com/office/drawing/2014/main" id="{C7D91FDC-4D66-1F1A-CBD1-00AC17946590}"/>
+              </a:ext>
+            </a:extLst>
+          </p:cNvPr>
+          <p:cNvSpPr txBox="1"/>
+          <p:nvPr/>
+        </p:nvSpPr>
+        <p:spPr>
+          <a:xfrm>
+            <a:off x="5415766" y="2533293"/>
+            <a:ext cx="2422779" cy="604717"/>
+          </a:xfrm>
+          <a:prstGeom prst="rect">
+            <a:avLst/>
+          </a:prstGeom>
+          <a:noFill/>
+        </p:spPr>
+        <p:txBody>
+          <a:bodyPr wrap="none" lIns="0" tIns="0" rIns="0" bIns="0" rtlCol="0">
+            <a:spAutoFit/>
+          </a:bodyPr>
+          <a:lstStyle/>
+          <a:p>
+            <a:pPr>
+              <a:lnSpc>
+                <a:spcPct val="150000"/>
+              </a:lnSpc>
+            </a:pPr>
+            <a:r>
+              <a:rPr lang="en-US" altLang="ko-KR" sz="1400" dirty="0">
+                <a:ln>
+                  <a:solidFill>
+                    <a:schemeClr val="tx1">
+                      <a:alpha val="0"/>
+                    </a:schemeClr>
+                  </a:solidFill>
+                </a:ln>
+                <a:latin typeface="맑은 고딕" panose="020B0503020000020004" pitchFamily="50" charset="-127"/>
+                <a:ea typeface="맑은 고딕" panose="020B0503020000020004" pitchFamily="50" charset="-127"/>
+                <a:cs typeface="Pretendard SemiBold" pitchFamily="50" charset="-127"/>
+              </a:rPr>
+              <a:t>-</a:t>
+            </a:r>
+            <a:r>
+              <a:rPr lang="en-US" altLang="ko-KR" sz="1400" dirty="0" err="1">
+                <a:ln>
+                  <a:solidFill>
+                    <a:schemeClr val="tx1">
+                      <a:alpha val="0"/>
+                    </a:schemeClr>
+                  </a:solidFill>
+                </a:ln>
+                <a:latin typeface="맑은 고딕" panose="020B0503020000020004" pitchFamily="50" charset="-127"/>
+                <a:ea typeface="맑은 고딕" panose="020B0503020000020004" pitchFamily="50" charset="-127"/>
+                <a:cs typeface="Pretendard SemiBold" pitchFamily="50" charset="-127"/>
+              </a:rPr>
+              <a:t>is_full</a:t>
+            </a:r>
+            <a:r>
+              <a:rPr lang="en-US" altLang="ko-KR" sz="1400" dirty="0">
+                <a:ln>
+                  <a:solidFill>
+                    <a:schemeClr val="tx1">
+                      <a:alpha val="0"/>
+                    </a:schemeClr>
+                  </a:solidFill>
+                </a:ln>
+                <a:latin typeface="맑은 고딕" panose="020B0503020000020004" pitchFamily="50" charset="-127"/>
+                <a:ea typeface="맑은 고딕" panose="020B0503020000020004" pitchFamily="50" charset="-127"/>
+                <a:cs typeface="Pretendard SemiBold" pitchFamily="50" charset="-127"/>
+              </a:rPr>
+              <a:t>()</a:t>
+            </a:r>
+            <a:r>
+              <a:rPr lang="ko-KR" altLang="en-US" sz="1400" dirty="0">
+                <a:ln>
+                  <a:solidFill>
+                    <a:schemeClr val="tx1">
+                      <a:alpha val="0"/>
+                    </a:schemeClr>
+                  </a:solidFill>
+                </a:ln>
+                <a:latin typeface="맑은 고딕" panose="020B0503020000020004" pitchFamily="50" charset="-127"/>
+                <a:ea typeface="맑은 고딕" panose="020B0503020000020004" pitchFamily="50" charset="-127"/>
+                <a:cs typeface="Pretendard SemiBold" pitchFamily="50" charset="-127"/>
+              </a:rPr>
+              <a:t> 예시 </a:t>
+            </a:r>
+            <a:r>
+              <a:rPr lang="en-US" altLang="ko-KR" sz="1400" dirty="0">
+                <a:ln>
+                  <a:solidFill>
+                    <a:schemeClr val="tx1">
+                      <a:alpha val="0"/>
+                    </a:schemeClr>
+                  </a:solidFill>
+                </a:ln>
+                <a:latin typeface="맑은 고딕" panose="020B0503020000020004" pitchFamily="50" charset="-127"/>
+                <a:ea typeface="맑은 고딕" panose="020B0503020000020004" pitchFamily="50" charset="-127"/>
+                <a:cs typeface="Pretendard SemiBold" pitchFamily="50" charset="-127"/>
+              </a:rPr>
+              <a:t>: overflow</a:t>
+            </a:r>
+          </a:p>
+          <a:p>
+            <a:pPr>
+              <a:lnSpc>
+                <a:spcPct val="150000"/>
+              </a:lnSpc>
+            </a:pPr>
+            <a:r>
+              <a:rPr lang="ko-KR" altLang="en-US" sz="1400" dirty="0">
+                <a:ln>
+                  <a:solidFill>
+                    <a:schemeClr val="tx1">
+                      <a:alpha val="0"/>
+                    </a:schemeClr>
+                  </a:solidFill>
+                </a:ln>
+                <a:latin typeface="맑은 고딕" panose="020B0503020000020004" pitchFamily="50" charset="-127"/>
+                <a:ea typeface="맑은 고딕" panose="020B0503020000020004" pitchFamily="50" charset="-127"/>
+                <a:cs typeface="Pretendard SemiBold" pitchFamily="50" charset="-127"/>
+              </a:rPr>
+              <a:t>입력 </a:t>
+            </a:r>
+            <a:r>
+              <a:rPr lang="en-US" altLang="ko-KR" sz="1400" dirty="0">
+                <a:ln>
+                  <a:solidFill>
+                    <a:schemeClr val="tx1">
+                      <a:alpha val="0"/>
+                    </a:schemeClr>
+                  </a:solidFill>
+                </a:ln>
+                <a:latin typeface="맑은 고딕" panose="020B0503020000020004" pitchFamily="50" charset="-127"/>
+                <a:ea typeface="맑은 고딕" panose="020B0503020000020004" pitchFamily="50" charset="-127"/>
+                <a:cs typeface="Pretendard SemiBold" pitchFamily="50" charset="-127"/>
+              </a:rPr>
+              <a:t>rear </a:t>
+            </a:r>
+            <a:r>
+              <a:rPr lang="ko-KR" altLang="en-US" sz="1400" dirty="0">
+                <a:ln>
+                  <a:solidFill>
+                    <a:schemeClr val="tx1">
+                      <a:alpha val="0"/>
+                    </a:schemeClr>
+                  </a:solidFill>
+                </a:ln>
+                <a:latin typeface="맑은 고딕" panose="020B0503020000020004" pitchFamily="50" charset="-127"/>
+                <a:ea typeface="맑은 고딕" panose="020B0503020000020004" pitchFamily="50" charset="-127"/>
+                <a:cs typeface="Pretendard SemiBold" pitchFamily="50" charset="-127"/>
+              </a:rPr>
+              <a:t>값의 처리 방법 필요</a:t>
+            </a:r>
+          </a:p>
+        </p:txBody>
+      </p:sp>
+      <p:sp>
+        <p:nvSpPr>
+          <p:cNvPr id="50" name="TextBox 49">
+            <a:extLst>
+              <a:ext uri="{FF2B5EF4-FFF2-40B4-BE49-F238E27FC236}">
+                <a16:creationId xmlns:a16="http://schemas.microsoft.com/office/drawing/2014/main" id="{81261C01-B56D-B869-8507-C1BCF3A0ADE5}"/>
+              </a:ext>
+            </a:extLst>
+          </p:cNvPr>
+          <p:cNvSpPr txBox="1"/>
+          <p:nvPr/>
+        </p:nvSpPr>
+        <p:spPr>
+          <a:xfrm>
+            <a:off x="5437165" y="4898009"/>
+            <a:ext cx="3642023" cy="281552"/>
+          </a:xfrm>
+          <a:prstGeom prst="rect">
+            <a:avLst/>
+          </a:prstGeom>
+          <a:noFill/>
+        </p:spPr>
+        <p:txBody>
+          <a:bodyPr wrap="none" lIns="0" tIns="0" rIns="0" bIns="0" rtlCol="0">
+            <a:spAutoFit/>
+          </a:bodyPr>
+          <a:lstStyle/>
+          <a:p>
+            <a:pPr>
+              <a:lnSpc>
+                <a:spcPct val="150000"/>
+              </a:lnSpc>
+            </a:pPr>
+            <a:r>
+              <a:rPr lang="en-US" altLang="ko-KR" sz="1400" dirty="0">
+                <a:ln>
+                  <a:solidFill>
+                    <a:schemeClr val="tx1">
+                      <a:alpha val="0"/>
+                    </a:schemeClr>
+                  </a:solidFill>
+                </a:ln>
+                <a:latin typeface="맑은 고딕" panose="020B0503020000020004" pitchFamily="50" charset="-127"/>
+                <a:ea typeface="맑은 고딕" panose="020B0503020000020004" pitchFamily="50" charset="-127"/>
+                <a:cs typeface="Pretendard SemiBold" pitchFamily="50" charset="-127"/>
+              </a:rPr>
+              <a:t>-</a:t>
+            </a:r>
+            <a:r>
+              <a:rPr lang="en-US" altLang="ko-KR" sz="1400" dirty="0" err="1">
+                <a:ln>
+                  <a:solidFill>
+                    <a:schemeClr val="tx1">
+                      <a:alpha val="0"/>
+                    </a:schemeClr>
+                  </a:solidFill>
+                </a:ln>
+                <a:latin typeface="맑은 고딕" panose="020B0503020000020004" pitchFamily="50" charset="-127"/>
+                <a:ea typeface="맑은 고딕" panose="020B0503020000020004" pitchFamily="50" charset="-127"/>
+                <a:cs typeface="Pretendard SemiBold" pitchFamily="50" charset="-127"/>
+              </a:rPr>
+              <a:t>is_empty</a:t>
+            </a:r>
+            <a:r>
+              <a:rPr lang="en-US" altLang="ko-KR" sz="1400" dirty="0">
+                <a:ln>
+                  <a:solidFill>
+                    <a:schemeClr val="tx1">
+                      <a:alpha val="0"/>
+                    </a:schemeClr>
+                  </a:solidFill>
+                </a:ln>
+                <a:latin typeface="맑은 고딕" panose="020B0503020000020004" pitchFamily="50" charset="-127"/>
+                <a:ea typeface="맑은 고딕" panose="020B0503020000020004" pitchFamily="50" charset="-127"/>
+                <a:cs typeface="Pretendard SemiBold" pitchFamily="50" charset="-127"/>
+              </a:rPr>
+              <a:t>() </a:t>
+            </a:r>
+            <a:r>
+              <a:rPr lang="ko-KR" altLang="en-US" sz="1400" dirty="0">
+                <a:ln>
+                  <a:solidFill>
+                    <a:schemeClr val="tx1">
+                      <a:alpha val="0"/>
+                    </a:schemeClr>
+                  </a:solidFill>
+                </a:ln>
+                <a:latin typeface="맑은 고딕" panose="020B0503020000020004" pitchFamily="50" charset="-127"/>
+                <a:ea typeface="맑은 고딕" panose="020B0503020000020004" pitchFamily="50" charset="-127"/>
+                <a:cs typeface="Pretendard SemiBold" pitchFamily="50" charset="-127"/>
+              </a:rPr>
+              <a:t>예시 </a:t>
+            </a:r>
+            <a:r>
+              <a:rPr lang="en-US" altLang="ko-KR" sz="1400" dirty="0">
+                <a:ln>
+                  <a:solidFill>
+                    <a:schemeClr val="tx1">
+                      <a:alpha val="0"/>
+                    </a:schemeClr>
+                  </a:solidFill>
+                </a:ln>
+                <a:latin typeface="맑은 고딕" panose="020B0503020000020004" pitchFamily="50" charset="-127"/>
+                <a:ea typeface="맑은 고딕" panose="020B0503020000020004" pitchFamily="50" charset="-127"/>
+                <a:cs typeface="Pretendard SemiBold" pitchFamily="50" charset="-127"/>
+              </a:rPr>
+              <a:t>: dequeue</a:t>
+            </a:r>
+            <a:r>
+              <a:rPr lang="ko-KR" altLang="en-US" sz="1400" dirty="0">
+                <a:ln>
+                  <a:solidFill>
+                    <a:schemeClr val="tx1">
+                      <a:alpha val="0"/>
+                    </a:schemeClr>
+                  </a:solidFill>
+                </a:ln>
+                <a:latin typeface="맑은 고딕" panose="020B0503020000020004" pitchFamily="50" charset="-127"/>
+                <a:ea typeface="맑은 고딕" panose="020B0503020000020004" pitchFamily="50" charset="-127"/>
+                <a:cs typeface="Pretendard SemiBold" pitchFamily="50" charset="-127"/>
+              </a:rPr>
+              <a:t> 완료 </a:t>
+            </a:r>
+            <a:r>
+              <a:rPr lang="en-US" altLang="ko-KR" sz="1400" dirty="0">
+                <a:ln>
+                  <a:solidFill>
+                    <a:schemeClr val="tx1">
+                      <a:alpha val="0"/>
+                    </a:schemeClr>
+                  </a:solidFill>
+                </a:ln>
+                <a:latin typeface="맑은 고딕" panose="020B0503020000020004" pitchFamily="50" charset="-127"/>
+                <a:ea typeface="맑은 고딕" panose="020B0503020000020004" pitchFamily="50" charset="-127"/>
+                <a:cs typeface="Pretendard SemiBold" pitchFamily="50" charset="-127"/>
+              </a:rPr>
+              <a:t>[0]~[3] </a:t>
+            </a:r>
+            <a:r>
+              <a:rPr lang="ko-KR" altLang="en-US" sz="1400" dirty="0">
+                <a:ln>
+                  <a:solidFill>
+                    <a:schemeClr val="tx1">
+                      <a:alpha val="0"/>
+                    </a:schemeClr>
+                  </a:solidFill>
+                </a:ln>
+                <a:latin typeface="맑은 고딕" panose="020B0503020000020004" pitchFamily="50" charset="-127"/>
+                <a:ea typeface="맑은 고딕" panose="020B0503020000020004" pitchFamily="50" charset="-127"/>
+                <a:cs typeface="Pretendard SemiBold" pitchFamily="50" charset="-127"/>
+              </a:rPr>
+              <a:t>출력</a:t>
+            </a:r>
+          </a:p>
+        </p:txBody>
+      </p:sp>
+      <p:sp>
+        <p:nvSpPr>
+          <p:cNvPr id="51" name="TextBox 50">
+            <a:extLst>
+              <a:ext uri="{FF2B5EF4-FFF2-40B4-BE49-F238E27FC236}">
+                <a16:creationId xmlns:a16="http://schemas.microsoft.com/office/drawing/2014/main" id="{41901881-8A61-2CEE-182D-5758FF0600C4}"/>
+              </a:ext>
+            </a:extLst>
+          </p:cNvPr>
+          <p:cNvSpPr txBox="1"/>
+          <p:nvPr/>
+        </p:nvSpPr>
+        <p:spPr>
+          <a:xfrm>
+            <a:off x="7461919" y="4073914"/>
+            <a:ext cx="3069751" cy="281552"/>
+          </a:xfrm>
+          <a:prstGeom prst="rect">
+            <a:avLst/>
+          </a:prstGeom>
+          <a:noFill/>
+        </p:spPr>
+        <p:txBody>
+          <a:bodyPr wrap="none" lIns="0" tIns="0" rIns="0" bIns="0" rtlCol="0">
+            <a:spAutoFit/>
+          </a:bodyPr>
+          <a:lstStyle/>
+          <a:p>
+            <a:pPr>
+              <a:lnSpc>
+                <a:spcPct val="150000"/>
+              </a:lnSpc>
+            </a:pPr>
+            <a:r>
+              <a:rPr lang="en-US" altLang="ko-KR" sz="1400" dirty="0">
+                <a:ln>
+                  <a:solidFill>
+                    <a:schemeClr val="tx1">
+                      <a:alpha val="0"/>
+                    </a:schemeClr>
+                  </a:solidFill>
+                </a:ln>
+                <a:latin typeface="맑은 고딕" panose="020B0503020000020004" pitchFamily="50" charset="-127"/>
+                <a:ea typeface="맑은 고딕" panose="020B0503020000020004" pitchFamily="50" charset="-127"/>
+                <a:cs typeface="Pretendard SemiBold" pitchFamily="50" charset="-127"/>
+              </a:rPr>
+              <a:t>- </a:t>
+            </a:r>
+            <a:r>
+              <a:rPr lang="ko-KR" altLang="en-US" sz="1400" dirty="0">
+                <a:ln>
+                  <a:solidFill>
+                    <a:schemeClr val="tx1">
+                      <a:alpha val="0"/>
+                    </a:schemeClr>
+                  </a:solidFill>
+                </a:ln>
+                <a:latin typeface="맑은 고딕" panose="020B0503020000020004" pitchFamily="50" charset="-127"/>
+                <a:ea typeface="맑은 고딕" panose="020B0503020000020004" pitchFamily="50" charset="-127"/>
+                <a:cs typeface="Pretendard SemiBold" pitchFamily="50" charset="-127"/>
+              </a:rPr>
+              <a:t>다음 </a:t>
+            </a:r>
+            <a:r>
+              <a:rPr lang="en-US" altLang="ko-KR" sz="1400" dirty="0">
+                <a:ln>
+                  <a:solidFill>
+                    <a:schemeClr val="tx1">
+                      <a:alpha val="0"/>
+                    </a:schemeClr>
+                  </a:solidFill>
+                </a:ln>
+                <a:latin typeface="맑은 고딕" panose="020B0503020000020004" pitchFamily="50" charset="-127"/>
+                <a:ea typeface="맑은 고딕" panose="020B0503020000020004" pitchFamily="50" charset="-127"/>
+                <a:cs typeface="Pretendard SemiBold" pitchFamily="50" charset="-127"/>
+              </a:rPr>
+              <a:t>enqueue</a:t>
+            </a:r>
+            <a:r>
+              <a:rPr lang="ko-KR" altLang="en-US" sz="1400" dirty="0">
+                <a:ln>
+                  <a:solidFill>
+                    <a:schemeClr val="tx1">
+                      <a:alpha val="0"/>
+                    </a:schemeClr>
+                  </a:solidFill>
+                </a:ln>
+                <a:latin typeface="맑은 고딕" panose="020B0503020000020004" pitchFamily="50" charset="-127"/>
+                <a:ea typeface="맑은 고딕" panose="020B0503020000020004" pitchFamily="50" charset="-127"/>
+                <a:cs typeface="Pretendard SemiBold" pitchFamily="50" charset="-127"/>
+              </a:rPr>
+              <a:t>에서 채워 넣을 데이터</a:t>
+            </a:r>
+          </a:p>
+        </p:txBody>
+      </p:sp>
+    </p:spTree>
+    <p:extLst>
+      <p:ext uri="{BB962C8B-B14F-4D97-AF65-F5344CB8AC3E}">
+        <p14:creationId xmlns:p14="http://schemas.microsoft.com/office/powerpoint/2010/main" val="1616033220"/>
+      </p:ext>
+    </p:extLst>
+  </p:cSld>
+  <p:clrMapOvr>
+    <a:masterClrMapping/>
+  </p:clrMapOvr>
+</p:sld>
+</file>
+
+<file path=ppt/slides/slide5.xml><?xml version="1.0" encoding="utf-8"?>
 <p:sld xmlns:a="http://schemas.openxmlformats.org/drawingml/2006/main" xmlns:r="http://schemas.openxmlformats.org/officeDocument/2006/relationships" xmlns:p="http://schemas.openxmlformats.org/presentationml/2006/main">
   <p:cSld>
     <p:spTree>
@@ -11381,156 +15602,6 @@
           </a:graphicData>
         </a:graphic>
       </p:graphicFrame>
-      <p:sp>
-        <p:nvSpPr>
-          <p:cNvPr id="25" name="사각형: 둥근 모서리 24">
-            <a:extLst>
-              <a:ext uri="{FF2B5EF4-FFF2-40B4-BE49-F238E27FC236}">
-                <a16:creationId xmlns:a16="http://schemas.microsoft.com/office/drawing/2014/main" id="{654BD5AD-2C18-3D75-738D-55C5E9BAE2D5}"/>
-              </a:ext>
-            </a:extLst>
-          </p:cNvPr>
-          <p:cNvSpPr/>
-          <p:nvPr/>
-        </p:nvSpPr>
-        <p:spPr>
-          <a:xfrm>
-            <a:off x="9687922" y="682171"/>
-            <a:ext cx="1818157" cy="420505"/>
-          </a:xfrm>
-          <a:prstGeom prst="roundRect">
-            <a:avLst/>
-          </a:prstGeom>
-          <a:noFill/>
-        </p:spPr>
-        <p:style>
-          <a:lnRef idx="2">
-            <a:schemeClr val="accent1">
-              <a:shade val="15000"/>
-            </a:schemeClr>
-          </a:lnRef>
-          <a:fillRef idx="1">
-            <a:schemeClr val="accent1"/>
-          </a:fillRef>
-          <a:effectRef idx="0">
-            <a:schemeClr val="accent1"/>
-          </a:effectRef>
-          <a:fontRef idx="minor">
-            <a:schemeClr val="lt1"/>
-          </a:fontRef>
-        </p:style>
-        <p:txBody>
-          <a:bodyPr rtlCol="0" anchor="ctr"/>
-          <a:lstStyle/>
-          <a:p>
-            <a:pPr algn="ctr"/>
-            <a:r>
-              <a:rPr lang="en-US" altLang="ko-KR" b="1" dirty="0" err="1">
-                <a:solidFill>
-                  <a:schemeClr val="tx1"/>
-                </a:solidFill>
-              </a:rPr>
-              <a:t>Buffer_size</a:t>
-            </a:r>
-            <a:r>
-              <a:rPr lang="en-US" altLang="ko-KR" b="1" dirty="0">
-                <a:solidFill>
-                  <a:schemeClr val="tx1"/>
-                </a:solidFill>
-              </a:rPr>
-              <a:t> -1</a:t>
-            </a:r>
-            <a:endParaRPr lang="ko-KR" altLang="en-US" b="1" dirty="0">
-              <a:solidFill>
-                <a:schemeClr val="tx1"/>
-              </a:solidFill>
-            </a:endParaRPr>
-          </a:p>
-        </p:txBody>
-      </p:sp>
-      <p:sp>
-        <p:nvSpPr>
-          <p:cNvPr id="26" name="사각형: 둥근 모서리 25">
-            <a:extLst>
-              <a:ext uri="{FF2B5EF4-FFF2-40B4-BE49-F238E27FC236}">
-                <a16:creationId xmlns:a16="http://schemas.microsoft.com/office/drawing/2014/main" id="{96673F53-DEEE-B529-1309-738C49EF467F}"/>
-              </a:ext>
-            </a:extLst>
-          </p:cNvPr>
-          <p:cNvSpPr/>
-          <p:nvPr/>
-        </p:nvSpPr>
-        <p:spPr>
-          <a:xfrm>
-            <a:off x="5186921" y="48650"/>
-            <a:ext cx="1818157" cy="420505"/>
-          </a:xfrm>
-          <a:prstGeom prst="roundRect">
-            <a:avLst/>
-          </a:prstGeom>
-          <a:noFill/>
-        </p:spPr>
-        <p:style>
-          <a:lnRef idx="2">
-            <a:schemeClr val="accent1">
-              <a:shade val="15000"/>
-            </a:schemeClr>
-          </a:lnRef>
-          <a:fillRef idx="1">
-            <a:schemeClr val="accent1"/>
-          </a:fillRef>
-          <a:effectRef idx="0">
-            <a:schemeClr val="accent1"/>
-          </a:effectRef>
-          <a:fontRef idx="minor">
-            <a:schemeClr val="lt1"/>
-          </a:fontRef>
-        </p:style>
-        <p:txBody>
-          <a:bodyPr rtlCol="0" anchor="ctr"/>
-          <a:lstStyle/>
-          <a:p>
-            <a:pPr algn="ctr"/>
-            <a:r>
-              <a:rPr lang="en-US" altLang="ko-KR" b="1" dirty="0" err="1">
-                <a:solidFill>
-                  <a:schemeClr val="tx1"/>
-                </a:solidFill>
-              </a:rPr>
-              <a:t>Pbuffer</a:t>
-            </a:r>
-            <a:r>
-              <a:rPr lang="en-US" altLang="ko-KR" b="1" dirty="0">
-                <a:solidFill>
-                  <a:schemeClr val="tx1"/>
-                </a:solidFill>
-              </a:rPr>
-              <a:t>(</a:t>
-            </a:r>
-            <a:r>
-              <a:rPr lang="ko-KR" altLang="en-US" b="1" dirty="0" err="1">
-                <a:solidFill>
-                  <a:schemeClr val="tx1"/>
-                </a:solidFill>
-              </a:rPr>
-              <a:t>주소값</a:t>
-            </a:r>
-            <a:r>
-              <a:rPr lang="en-US" altLang="ko-KR" b="1" dirty="0">
-                <a:solidFill>
-                  <a:schemeClr val="tx1"/>
-                </a:solidFill>
-              </a:rPr>
-              <a:t>)</a:t>
-            </a:r>
-            <a:endParaRPr lang="ko-KR" altLang="en-US" b="1" dirty="0">
-              <a:solidFill>
-                <a:schemeClr val="tx1"/>
-              </a:solidFill>
-            </a:endParaRPr>
-          </a:p>
-        </p:txBody>
-      </p:sp>
       <p:grpSp>
         <p:nvGrpSpPr>
           <p:cNvPr id="30" name="그룹 29">
@@ -14358,7 +18429,7 @@
 </p:sld>
 </file>
 
-<file path=ppt/slides/slide5.xml><?xml version="1.0" encoding="utf-8"?>
+<file path=ppt/slides/slide6.xml><?xml version="1.0" encoding="utf-8"?>
 <p:sld xmlns:a="http://schemas.openxmlformats.org/drawingml/2006/main" xmlns:r="http://schemas.openxmlformats.org/officeDocument/2006/relationships" xmlns:p="http://schemas.openxmlformats.org/presentationml/2006/main">
   <p:cSld>
     <p:spTree>
@@ -17859,7 +21930,7 @@
 </p:sld>
 </file>
 
-<file path=ppt/slides/slide6.xml><?xml version="1.0" encoding="utf-8"?>
+<file path=ppt/slides/slide7.xml><?xml version="1.0" encoding="utf-8"?>
 <p:sld xmlns:a="http://schemas.openxmlformats.org/drawingml/2006/main" xmlns:r="http://schemas.openxmlformats.org/officeDocument/2006/relationships" xmlns:p="http://schemas.openxmlformats.org/presentationml/2006/main">
   <p:cSld>
     <p:spTree>
@@ -21750,7 +25821,7 @@
 </p:sld>
 </file>
 
-<file path=ppt/slides/slide7.xml><?xml version="1.0" encoding="utf-8"?>
+<file path=ppt/slides/slide8.xml><?xml version="1.0" encoding="utf-8"?>
 <p:sld xmlns:a="http://schemas.openxmlformats.org/drawingml/2006/main" xmlns:r="http://schemas.openxmlformats.org/officeDocument/2006/relationships" xmlns:p="http://schemas.openxmlformats.org/presentationml/2006/main">
   <p:cSld>
     <p:spTree>

--- a/21_c_study/example/ring_buf/ring_buffer.pptx
+++ b/21_c_study/example/ring_buf/ring_buffer.pptx
@@ -235,7 +235,7 @@
           <a:p>
             <a:fld id="{81406EB0-B97D-49F4-8313-D3926DE8860A}" type="datetimeFigureOut">
               <a:rPr lang="ko-KR" altLang="en-US" smtClean="0"/>
-              <a:t>2026. 4. 5.</a:t>
+              <a:t>2026-04-06</a:t>
             </a:fld>
             <a:endParaRPr lang="ko-KR" altLang="en-US"/>
           </a:p>
@@ -400,7 +400,7 @@
           <a:p>
             <a:fld id="{14D34DEB-12D1-4386-BA98-56BFB740DC56}" type="datetimeFigureOut">
               <a:rPr lang="ko-KR" altLang="en-US" smtClean="0"/>
-              <a:t>2026. 4. 5.</a:t>
+              <a:t>2026-04-06</a:t>
             </a:fld>
             <a:endParaRPr lang="ko-KR" altLang="en-US" dirty="0"/>
           </a:p>
@@ -4987,66 +4987,6 @@
           </a:p>
         </p:txBody>
       </p:sp>
-      <p:pic>
-        <p:nvPicPr>
-          <p:cNvPr id="3" name="그림 2">
-            <a:extLst>
-              <a:ext uri="{FF2B5EF4-FFF2-40B4-BE49-F238E27FC236}">
-                <a16:creationId xmlns:a16="http://schemas.microsoft.com/office/drawing/2014/main" id="{EF52D51A-C036-9FDD-7AF3-9B53779EBAB0}"/>
-              </a:ext>
-            </a:extLst>
-          </p:cNvPr>
-          <p:cNvPicPr>
-            <a:picLocks noChangeAspect="1"/>
-          </p:cNvPicPr>
-          <p:nvPr/>
-        </p:nvPicPr>
-        <p:blipFill>
-          <a:blip r:embed="rId3"/>
-          <a:stretch>
-            <a:fillRect/>
-          </a:stretch>
-        </p:blipFill>
-        <p:spPr>
-          <a:xfrm>
-            <a:off x="144130" y="1011650"/>
-            <a:ext cx="4483382" cy="2449287"/>
-          </a:xfrm>
-          <a:prstGeom prst="rect">
-            <a:avLst/>
-          </a:prstGeom>
-        </p:spPr>
-      </p:pic>
-      <p:pic>
-        <p:nvPicPr>
-          <p:cNvPr id="12" name="그림 11">
-            <a:extLst>
-              <a:ext uri="{FF2B5EF4-FFF2-40B4-BE49-F238E27FC236}">
-                <a16:creationId xmlns:a16="http://schemas.microsoft.com/office/drawing/2014/main" id="{AB14EF03-B510-EF0B-DB6F-08544DABBC6C}"/>
-              </a:ext>
-            </a:extLst>
-          </p:cNvPr>
-          <p:cNvPicPr>
-            <a:picLocks noChangeAspect="1"/>
-          </p:cNvPicPr>
-          <p:nvPr/>
-        </p:nvPicPr>
-        <p:blipFill>
-          <a:blip r:embed="rId4"/>
-          <a:stretch>
-            <a:fillRect/>
-          </a:stretch>
-        </p:blipFill>
-        <p:spPr>
-          <a:xfrm>
-            <a:off x="144130" y="4306702"/>
-            <a:ext cx="4287703" cy="1948528"/>
-          </a:xfrm>
-          <a:prstGeom prst="rect">
-            <a:avLst/>
-          </a:prstGeom>
-        </p:spPr>
-      </p:pic>
       <p:graphicFrame>
         <p:nvGraphicFramePr>
           <p:cNvPr id="21" name="표 20">
@@ -6671,6 +6611,164 @@
           </a:p>
         </p:txBody>
       </p:sp>
+      <p:pic>
+        <p:nvPicPr>
+          <p:cNvPr id="4" name="그림 3">
+            <a:extLst>
+              <a:ext uri="{FF2B5EF4-FFF2-40B4-BE49-F238E27FC236}">
+                <a16:creationId xmlns:a16="http://schemas.microsoft.com/office/drawing/2014/main" id="{C85DA3AC-7D0F-8499-7436-C12C915A56E3}"/>
+              </a:ext>
+            </a:extLst>
+          </p:cNvPr>
+          <p:cNvPicPr>
+            <a:picLocks noChangeAspect="1"/>
+          </p:cNvPicPr>
+          <p:nvPr/>
+        </p:nvPicPr>
+        <p:blipFill>
+          <a:blip r:embed="rId3"/>
+          <a:stretch>
+            <a:fillRect/>
+          </a:stretch>
+        </p:blipFill>
+        <p:spPr>
+          <a:xfrm>
+            <a:off x="314038" y="911038"/>
+            <a:ext cx="4187539" cy="3228527"/>
+          </a:xfrm>
+          <a:prstGeom prst="rect">
+            <a:avLst/>
+          </a:prstGeom>
+        </p:spPr>
+      </p:pic>
+      <p:pic>
+        <p:nvPicPr>
+          <p:cNvPr id="6" name="그림 5">
+            <a:extLst>
+              <a:ext uri="{FF2B5EF4-FFF2-40B4-BE49-F238E27FC236}">
+                <a16:creationId xmlns:a16="http://schemas.microsoft.com/office/drawing/2014/main" id="{165E219E-16DD-0965-DDCD-726E609A9992}"/>
+              </a:ext>
+            </a:extLst>
+          </p:cNvPr>
+          <p:cNvPicPr>
+            <a:picLocks noChangeAspect="1"/>
+          </p:cNvPicPr>
+          <p:nvPr/>
+        </p:nvPicPr>
+        <p:blipFill>
+          <a:blip r:embed="rId4"/>
+          <a:stretch>
+            <a:fillRect/>
+          </a:stretch>
+        </p:blipFill>
+        <p:spPr>
+          <a:xfrm>
+            <a:off x="900547" y="4288873"/>
+            <a:ext cx="3109036" cy="2455290"/>
+          </a:xfrm>
+          <a:prstGeom prst="rect">
+            <a:avLst/>
+          </a:prstGeom>
+        </p:spPr>
+      </p:pic>
+      <p:sp>
+        <p:nvSpPr>
+          <p:cNvPr id="13" name="화살표: 오른쪽 12">
+            <a:extLst>
+              <a:ext uri="{FF2B5EF4-FFF2-40B4-BE49-F238E27FC236}">
+                <a16:creationId xmlns:a16="http://schemas.microsoft.com/office/drawing/2014/main" id="{1EB06885-C56E-FAD7-D80C-A9D7D55787CC}"/>
+              </a:ext>
+            </a:extLst>
+          </p:cNvPr>
+          <p:cNvSpPr/>
+          <p:nvPr/>
+        </p:nvSpPr>
+        <p:spPr>
+          <a:xfrm flipV="1">
+            <a:off x="425184" y="5190675"/>
+            <a:ext cx="364273" cy="156575"/>
+          </a:xfrm>
+          <a:prstGeom prst="rightArrow">
+            <a:avLst/>
+          </a:prstGeom>
+          <a:solidFill>
+            <a:schemeClr val="tx1"/>
+          </a:solidFill>
+        </p:spPr>
+        <p:style>
+          <a:lnRef idx="2">
+            <a:schemeClr val="accent1">
+              <a:shade val="15000"/>
+            </a:schemeClr>
+          </a:lnRef>
+          <a:fillRef idx="1">
+            <a:schemeClr val="accent1"/>
+          </a:fillRef>
+          <a:effectRef idx="0">
+            <a:schemeClr val="accent1"/>
+          </a:effectRef>
+          <a:fontRef idx="minor">
+            <a:schemeClr val="lt1"/>
+          </a:fontRef>
+        </p:style>
+        <p:txBody>
+          <a:bodyPr rtlCol="0" anchor="ctr"/>
+          <a:lstStyle/>
+          <a:p>
+            <a:pPr algn="ctr"/>
+            <a:endParaRPr lang="ko-KR" altLang="en-US"/>
+          </a:p>
+        </p:txBody>
+      </p:sp>
+      <p:sp>
+        <p:nvSpPr>
+          <p:cNvPr id="14" name="화살표: 오른쪽 13">
+            <a:extLst>
+              <a:ext uri="{FF2B5EF4-FFF2-40B4-BE49-F238E27FC236}">
+                <a16:creationId xmlns:a16="http://schemas.microsoft.com/office/drawing/2014/main" id="{958D361F-F4C8-60DC-1213-B604CE8F6B63}"/>
+              </a:ext>
+            </a:extLst>
+          </p:cNvPr>
+          <p:cNvSpPr/>
+          <p:nvPr/>
+        </p:nvSpPr>
+        <p:spPr>
+          <a:xfrm flipV="1">
+            <a:off x="380245" y="6382323"/>
+            <a:ext cx="364273" cy="156575"/>
+          </a:xfrm>
+          <a:prstGeom prst="rightArrow">
+            <a:avLst/>
+          </a:prstGeom>
+          <a:solidFill>
+            <a:schemeClr val="tx1"/>
+          </a:solidFill>
+        </p:spPr>
+        <p:style>
+          <a:lnRef idx="2">
+            <a:schemeClr val="accent1">
+              <a:shade val="15000"/>
+            </a:schemeClr>
+          </a:lnRef>
+          <a:fillRef idx="1">
+            <a:schemeClr val="accent1"/>
+          </a:fillRef>
+          <a:effectRef idx="0">
+            <a:schemeClr val="accent1"/>
+          </a:effectRef>
+          <a:fontRef idx="minor">
+            <a:schemeClr val="lt1"/>
+          </a:fontRef>
+        </p:style>
+        <p:txBody>
+          <a:bodyPr rtlCol="0" anchor="ctr"/>
+          <a:lstStyle/>
+          <a:p>
+            <a:pPr algn="ctr"/>
+            <a:endParaRPr lang="ko-KR" altLang="en-US"/>
+          </a:p>
+        </p:txBody>
+      </p:sp>
     </p:spTree>
     <p:extLst>
       <p:ext uri="{BB962C8B-B14F-4D97-AF65-F5344CB8AC3E}">
@@ -8058,75 +8156,19 @@
             </a:r>
             <a:r>
               <a:rPr lang="en-US" altLang="ko-KR" sz="1400" dirty="0"/>
-              <a:t>, Front</a:t>
+              <a:t>, </a:t>
             </a:r>
             <a:r>
-              <a:rPr lang="ko-KR" altLang="en-US" sz="1400" dirty="0"/>
+              <a:rPr lang="en-US" altLang="ko-KR" sz="1400" b="1" dirty="0"/>
+              <a:t>Front</a:t>
+            </a:r>
+            <a:r>
+              <a:rPr lang="ko-KR" altLang="en-US" sz="1400" b="1" dirty="0"/>
               <a:t>도 한 칸씩 이동</a:t>
             </a:r>
           </a:p>
         </p:txBody>
       </p:sp>
-      <p:pic>
-        <p:nvPicPr>
-          <p:cNvPr id="4" name="그림 3">
-            <a:extLst>
-              <a:ext uri="{FF2B5EF4-FFF2-40B4-BE49-F238E27FC236}">
-                <a16:creationId xmlns:a16="http://schemas.microsoft.com/office/drawing/2014/main" id="{154DDECF-B362-C3E9-1A0C-D4720EE95642}"/>
-              </a:ext>
-            </a:extLst>
-          </p:cNvPr>
-          <p:cNvPicPr>
-            <a:picLocks noChangeAspect="1"/>
-          </p:cNvPicPr>
-          <p:nvPr/>
-        </p:nvPicPr>
-        <p:blipFill>
-          <a:blip r:embed="rId3"/>
-          <a:stretch>
-            <a:fillRect/>
-          </a:stretch>
-        </p:blipFill>
-        <p:spPr>
-          <a:xfrm>
-            <a:off x="260827" y="1155157"/>
-            <a:ext cx="4632519" cy="2482576"/>
-          </a:xfrm>
-          <a:prstGeom prst="rect">
-            <a:avLst/>
-          </a:prstGeom>
-        </p:spPr>
-      </p:pic>
-      <p:pic>
-        <p:nvPicPr>
-          <p:cNvPr id="6" name="그림 5">
-            <a:extLst>
-              <a:ext uri="{FF2B5EF4-FFF2-40B4-BE49-F238E27FC236}">
-                <a16:creationId xmlns:a16="http://schemas.microsoft.com/office/drawing/2014/main" id="{49F815E1-1C0B-2BF8-58DA-C0156DE515EF}"/>
-              </a:ext>
-            </a:extLst>
-          </p:cNvPr>
-          <p:cNvPicPr>
-            <a:picLocks noChangeAspect="1"/>
-          </p:cNvPicPr>
-          <p:nvPr/>
-        </p:nvPicPr>
-        <p:blipFill>
-          <a:blip r:embed="rId4"/>
-          <a:stretch>
-            <a:fillRect/>
-          </a:stretch>
-        </p:blipFill>
-        <p:spPr>
-          <a:xfrm>
-            <a:off x="260827" y="4049740"/>
-            <a:ext cx="4606554" cy="1901117"/>
-          </a:xfrm>
-          <a:prstGeom prst="rect">
-            <a:avLst/>
-          </a:prstGeom>
-        </p:spPr>
-      </p:pic>
       <p:graphicFrame>
         <p:nvGraphicFramePr>
           <p:cNvPr id="13" name="표 12">
@@ -10147,7 +10189,7 @@
         </p:nvSpPr>
         <p:spPr>
           <a:xfrm>
-            <a:off x="5448126" y="4531135"/>
+            <a:off x="5552722" y="4846821"/>
             <a:ext cx="1736053" cy="281552"/>
           </a:xfrm>
           <a:prstGeom prst="rect">
@@ -10170,11 +10212,7 @@
             </a:pPr>
             <a:r>
               <a:rPr lang="en-US" altLang="ko-KR" sz="1400" dirty="0"/>
-              <a:t> [</a:t>
-            </a:r>
-            <a:r>
-              <a:rPr lang="en-US" altLang="ko-KR" sz="1400"/>
-              <a:t>3]~[1] </a:t>
+              <a:t> [3]~[1] </a:t>
             </a:r>
             <a:r>
               <a:rPr lang="ko-KR" altLang="en-US" sz="1400" dirty="0"/>
@@ -10183,6 +10221,262 @@
           </a:p>
         </p:txBody>
       </p:sp>
+      <p:sp>
+        <p:nvSpPr>
+          <p:cNvPr id="28" name="화살표: 오른쪽 27">
+            <a:extLst>
+              <a:ext uri="{FF2B5EF4-FFF2-40B4-BE49-F238E27FC236}">
+                <a16:creationId xmlns:a16="http://schemas.microsoft.com/office/drawing/2014/main" id="{3A03C766-0878-073C-B0C3-801FAEFDE85C}"/>
+              </a:ext>
+            </a:extLst>
+          </p:cNvPr>
+          <p:cNvSpPr/>
+          <p:nvPr/>
+        </p:nvSpPr>
+        <p:spPr>
+          <a:xfrm>
+            <a:off x="161423" y="4462438"/>
+            <a:ext cx="347554" cy="137393"/>
+          </a:xfrm>
+          <a:prstGeom prst="rightArrow">
+            <a:avLst/>
+          </a:prstGeom>
+          <a:solidFill>
+            <a:srgbClr val="FF0000"/>
+          </a:solidFill>
+        </p:spPr>
+        <p:style>
+          <a:lnRef idx="2">
+            <a:schemeClr val="accent1">
+              <a:shade val="15000"/>
+            </a:schemeClr>
+          </a:lnRef>
+          <a:fillRef idx="1">
+            <a:schemeClr val="accent1"/>
+          </a:fillRef>
+          <a:effectRef idx="0">
+            <a:schemeClr val="accent1"/>
+          </a:effectRef>
+          <a:fontRef idx="minor">
+            <a:schemeClr val="lt1"/>
+          </a:fontRef>
+        </p:style>
+        <p:txBody>
+          <a:bodyPr rtlCol="0" anchor="ctr"/>
+          <a:lstStyle/>
+          <a:p>
+            <a:pPr algn="ctr"/>
+            <a:endParaRPr lang="ko-KR" altLang="en-US"/>
+          </a:p>
+        </p:txBody>
+      </p:sp>
+      <p:sp>
+        <p:nvSpPr>
+          <p:cNvPr id="31" name="화살표: 오른쪽 30">
+            <a:extLst>
+              <a:ext uri="{FF2B5EF4-FFF2-40B4-BE49-F238E27FC236}">
+                <a16:creationId xmlns:a16="http://schemas.microsoft.com/office/drawing/2014/main" id="{9154A649-DB41-3249-01EB-6EBFF8F647D2}"/>
+              </a:ext>
+            </a:extLst>
+          </p:cNvPr>
+          <p:cNvSpPr/>
+          <p:nvPr/>
+        </p:nvSpPr>
+        <p:spPr>
+          <a:xfrm>
+            <a:off x="154406" y="4603214"/>
+            <a:ext cx="347554" cy="137393"/>
+          </a:xfrm>
+          <a:prstGeom prst="rightArrow">
+            <a:avLst/>
+          </a:prstGeom>
+          <a:solidFill>
+            <a:srgbClr val="FF0000"/>
+          </a:solidFill>
+        </p:spPr>
+        <p:style>
+          <a:lnRef idx="2">
+            <a:schemeClr val="accent1">
+              <a:shade val="15000"/>
+            </a:schemeClr>
+          </a:lnRef>
+          <a:fillRef idx="1">
+            <a:schemeClr val="accent1"/>
+          </a:fillRef>
+          <a:effectRef idx="0">
+            <a:schemeClr val="accent1"/>
+          </a:effectRef>
+          <a:fontRef idx="minor">
+            <a:schemeClr val="lt1"/>
+          </a:fontRef>
+        </p:style>
+        <p:txBody>
+          <a:bodyPr rtlCol="0" anchor="ctr"/>
+          <a:lstStyle/>
+          <a:p>
+            <a:pPr algn="ctr"/>
+            <a:endParaRPr lang="ko-KR" altLang="en-US"/>
+          </a:p>
+        </p:txBody>
+      </p:sp>
+      <p:sp>
+        <p:nvSpPr>
+          <p:cNvPr id="32" name="화살표: 오른쪽 31">
+            <a:extLst>
+              <a:ext uri="{FF2B5EF4-FFF2-40B4-BE49-F238E27FC236}">
+                <a16:creationId xmlns:a16="http://schemas.microsoft.com/office/drawing/2014/main" id="{4FA3E3DF-0D4A-D6CF-2FD2-34FEA50D64A6}"/>
+              </a:ext>
+            </a:extLst>
+          </p:cNvPr>
+          <p:cNvSpPr/>
+          <p:nvPr/>
+        </p:nvSpPr>
+        <p:spPr>
+          <a:xfrm>
+            <a:off x="161423" y="4743990"/>
+            <a:ext cx="347554" cy="137393"/>
+          </a:xfrm>
+          <a:prstGeom prst="rightArrow">
+            <a:avLst/>
+          </a:prstGeom>
+          <a:solidFill>
+            <a:srgbClr val="FF0000"/>
+          </a:solidFill>
+        </p:spPr>
+        <p:style>
+          <a:lnRef idx="2">
+            <a:schemeClr val="accent1">
+              <a:shade val="15000"/>
+            </a:schemeClr>
+          </a:lnRef>
+          <a:fillRef idx="1">
+            <a:schemeClr val="accent1"/>
+          </a:fillRef>
+          <a:effectRef idx="0">
+            <a:schemeClr val="accent1"/>
+          </a:effectRef>
+          <a:fontRef idx="minor">
+            <a:schemeClr val="lt1"/>
+          </a:fontRef>
+        </p:style>
+        <p:txBody>
+          <a:bodyPr rtlCol="0" anchor="ctr"/>
+          <a:lstStyle/>
+          <a:p>
+            <a:pPr algn="ctr"/>
+            <a:endParaRPr lang="ko-KR" altLang="en-US"/>
+          </a:p>
+        </p:txBody>
+      </p:sp>
+      <p:sp>
+        <p:nvSpPr>
+          <p:cNvPr id="33" name="화살표: 오른쪽 32">
+            <a:extLst>
+              <a:ext uri="{FF2B5EF4-FFF2-40B4-BE49-F238E27FC236}">
+                <a16:creationId xmlns:a16="http://schemas.microsoft.com/office/drawing/2014/main" id="{275B14A2-6500-0120-C344-66A8720114E6}"/>
+              </a:ext>
+            </a:extLst>
+          </p:cNvPr>
+          <p:cNvSpPr/>
+          <p:nvPr/>
+        </p:nvSpPr>
+        <p:spPr>
+          <a:xfrm>
+            <a:off x="161423" y="5819583"/>
+            <a:ext cx="347554" cy="137393"/>
+          </a:xfrm>
+          <a:prstGeom prst="rightArrow">
+            <a:avLst/>
+          </a:prstGeom>
+          <a:solidFill>
+            <a:schemeClr val="tx1"/>
+          </a:solidFill>
+        </p:spPr>
+        <p:style>
+          <a:lnRef idx="2">
+            <a:schemeClr val="accent1">
+              <a:shade val="15000"/>
+            </a:schemeClr>
+          </a:lnRef>
+          <a:fillRef idx="1">
+            <a:schemeClr val="accent1"/>
+          </a:fillRef>
+          <a:effectRef idx="0">
+            <a:schemeClr val="accent1"/>
+          </a:effectRef>
+          <a:fontRef idx="minor">
+            <a:schemeClr val="lt1"/>
+          </a:fontRef>
+        </p:style>
+        <p:txBody>
+          <a:bodyPr rtlCol="0" anchor="ctr"/>
+          <a:lstStyle/>
+          <a:p>
+            <a:pPr algn="ctr"/>
+            <a:endParaRPr lang="ko-KR" altLang="en-US"/>
+          </a:p>
+        </p:txBody>
+      </p:sp>
+      <p:pic>
+        <p:nvPicPr>
+          <p:cNvPr id="35" name="그림 34">
+            <a:extLst>
+              <a:ext uri="{FF2B5EF4-FFF2-40B4-BE49-F238E27FC236}">
+                <a16:creationId xmlns:a16="http://schemas.microsoft.com/office/drawing/2014/main" id="{94F958AA-F3A7-CC19-31F6-5DE5D957FA77}"/>
+              </a:ext>
+            </a:extLst>
+          </p:cNvPr>
+          <p:cNvPicPr>
+            <a:picLocks noChangeAspect="1"/>
+          </p:cNvPicPr>
+          <p:nvPr/>
+        </p:nvPicPr>
+        <p:blipFill>
+          <a:blip r:embed="rId3"/>
+          <a:stretch>
+            <a:fillRect/>
+          </a:stretch>
+        </p:blipFill>
+        <p:spPr>
+          <a:xfrm>
+            <a:off x="314038" y="1173478"/>
+            <a:ext cx="4763088" cy="2491536"/>
+          </a:xfrm>
+          <a:prstGeom prst="rect">
+            <a:avLst/>
+          </a:prstGeom>
+        </p:spPr>
+      </p:pic>
+      <p:pic>
+        <p:nvPicPr>
+          <p:cNvPr id="37" name="그림 36">
+            <a:extLst>
+              <a:ext uri="{FF2B5EF4-FFF2-40B4-BE49-F238E27FC236}">
+                <a16:creationId xmlns:a16="http://schemas.microsoft.com/office/drawing/2014/main" id="{7BA51253-962D-3364-F001-33322B614E2E}"/>
+              </a:ext>
+            </a:extLst>
+          </p:cNvPr>
+          <p:cNvPicPr>
+            <a:picLocks noChangeAspect="1"/>
+          </p:cNvPicPr>
+          <p:nvPr/>
+        </p:nvPicPr>
+        <p:blipFill>
+          <a:blip r:embed="rId4"/>
+          <a:stretch>
+            <a:fillRect/>
+          </a:stretch>
+        </p:blipFill>
+        <p:spPr>
+          <a:xfrm>
+            <a:off x="664196" y="4151767"/>
+            <a:ext cx="3862500" cy="2102523"/>
+          </a:xfrm>
+          <a:prstGeom prst="rect">
+            <a:avLst/>
+          </a:prstGeom>
+        </p:spPr>
+      </p:pic>
     </p:spTree>
     <p:extLst>
       <p:ext uri="{BB962C8B-B14F-4D97-AF65-F5344CB8AC3E}">
@@ -18049,36 +18343,6 @@
           </p:txBody>
         </p:sp>
       </p:grpSp>
-      <p:pic>
-        <p:nvPicPr>
-          <p:cNvPr id="4" name="그림 3">
-            <a:extLst>
-              <a:ext uri="{FF2B5EF4-FFF2-40B4-BE49-F238E27FC236}">
-                <a16:creationId xmlns:a16="http://schemas.microsoft.com/office/drawing/2014/main" id="{A16DBD08-E091-B4B0-06EB-1998829972E4}"/>
-              </a:ext>
-            </a:extLst>
-          </p:cNvPr>
-          <p:cNvPicPr>
-            <a:picLocks noChangeAspect="1"/>
-          </p:cNvPicPr>
-          <p:nvPr/>
-        </p:nvPicPr>
-        <p:blipFill>
-          <a:blip r:embed="rId3"/>
-          <a:stretch>
-            <a:fillRect/>
-          </a:stretch>
-        </p:blipFill>
-        <p:spPr>
-          <a:xfrm>
-            <a:off x="92606" y="2663744"/>
-            <a:ext cx="5011775" cy="1982680"/>
-          </a:xfrm>
-          <a:prstGeom prst="rect">
-            <a:avLst/>
-          </a:prstGeom>
-        </p:spPr>
-      </p:pic>
       <p:sp>
         <p:nvSpPr>
           <p:cNvPr id="12" name="TextBox 11">
@@ -19650,60 +19914,36 @@
           </a:p>
         </p:txBody>
       </p:sp>
-      <p:sp>
-        <p:nvSpPr>
-          <p:cNvPr id="2" name="TextBox 1">
+      <p:pic>
+        <p:nvPicPr>
+          <p:cNvPr id="6" name="그림 5">
             <a:extLst>
               <a:ext uri="{FF2B5EF4-FFF2-40B4-BE49-F238E27FC236}">
-                <a16:creationId xmlns:a16="http://schemas.microsoft.com/office/drawing/2014/main" id="{E62FB9E9-3397-676C-5A2E-47C6E3BEFE6D}"/>
+                <a16:creationId xmlns:a16="http://schemas.microsoft.com/office/drawing/2014/main" id="{FABCF97A-2B4C-6BEE-F20C-98CBA52D1E3F}"/>
               </a:ext>
             </a:extLst>
           </p:cNvPr>
-          <p:cNvSpPr txBox="1"/>
+          <p:cNvPicPr>
+            <a:picLocks noChangeAspect="1"/>
+          </p:cNvPicPr>
           <p:nvPr/>
-        </p:nvSpPr>
+        </p:nvPicPr>
+        <p:blipFill>
+          <a:blip r:embed="rId3"/>
+          <a:stretch>
+            <a:fillRect/>
+          </a:stretch>
+        </p:blipFill>
         <p:spPr>
           <a:xfrm>
-            <a:off x="474354" y="4890239"/>
-            <a:ext cx="3103938" cy="361959"/>
+            <a:off x="131629" y="2693096"/>
+            <a:ext cx="4783843" cy="1639624"/>
           </a:xfrm>
           <a:prstGeom prst="rect">
             <a:avLst/>
           </a:prstGeom>
-          <a:noFill/>
         </p:spPr>
-        <p:txBody>
-          <a:bodyPr wrap="square" lIns="0" tIns="0" rIns="0" bIns="0" rtlCol="0">
-            <a:spAutoFit/>
-          </a:bodyPr>
-          <a:lstStyle/>
-          <a:p>
-            <a:pPr>
-              <a:lnSpc>
-                <a:spcPct val="150000"/>
-              </a:lnSpc>
-            </a:pPr>
-            <a:r>
-              <a:rPr lang="ko-KR" altLang="en-US" b="1" dirty="0">
-                <a:ln>
-                  <a:solidFill>
-                    <a:schemeClr val="tx1">
-                      <a:alpha val="0"/>
-                    </a:schemeClr>
-                  </a:solidFill>
-                </a:ln>
-                <a:solidFill>
-                  <a:srgbClr val="2E71EA"/>
-                </a:solidFill>
-                <a:latin typeface="맑은 고딕" panose="020B0503020000020004" pitchFamily="50" charset="-127"/>
-                <a:ea typeface="맑은 고딕" panose="020B0503020000020004" pitchFamily="50" charset="-127"/>
-                <a:cs typeface="Pretendard SemiBold" pitchFamily="50" charset="-127"/>
-              </a:rPr>
-              <a:t>사진 변경하기</a:t>
-            </a:r>
-          </a:p>
-        </p:txBody>
-      </p:sp>
+      </p:pic>
     </p:spTree>
     <p:extLst>
       <p:ext uri="{BB962C8B-B14F-4D97-AF65-F5344CB8AC3E}">
@@ -19914,7 +20154,7 @@
         <p:spPr>
           <a:xfrm>
             <a:off x="187454" y="1827839"/>
-            <a:ext cx="2808461" cy="361959"/>
+            <a:ext cx="1376980" cy="361959"/>
           </a:xfrm>
           <a:prstGeom prst="rect">
             <a:avLst/>
@@ -19948,26 +20188,23 @@
                 <a:ea typeface="맑은 고딕" panose="020B0503020000020004" pitchFamily="50" charset="-127"/>
                 <a:cs typeface="Pretendard SemiBold" pitchFamily="50" charset="-127"/>
               </a:rPr>
-              <a:t>- dequeue () -&gt; </a:t>
+              <a:t>- dequeue ()</a:t>
             </a:r>
-            <a:r>
-              <a:rPr lang="ko-KR" altLang="en-US" b="1" dirty="0">
-                <a:ln>
-                  <a:solidFill>
-                    <a:schemeClr val="tx1">
-                      <a:alpha val="0"/>
-                    </a:schemeClr>
-                  </a:solidFill>
-                </a:ln>
+            <a:endParaRPr lang="ko-KR" altLang="en-US" b="1" dirty="0">
+              <a:ln>
                 <a:solidFill>
-                  <a:srgbClr val="2E71EA"/>
+                  <a:schemeClr val="tx1">
+                    <a:alpha val="0"/>
+                  </a:schemeClr>
                 </a:solidFill>
-                <a:latin typeface="맑은 고딕" panose="020B0503020000020004" pitchFamily="50" charset="-127"/>
-                <a:ea typeface="맑은 고딕" panose="020B0503020000020004" pitchFamily="50" charset="-127"/>
-                <a:cs typeface="Pretendard SemiBold" pitchFamily="50" charset="-127"/>
-              </a:rPr>
-              <a:t>사진 수정</a:t>
-            </a:r>
+              </a:ln>
+              <a:solidFill>
+                <a:srgbClr val="2E71EA"/>
+              </a:solidFill>
+              <a:latin typeface="맑은 고딕" panose="020B0503020000020004" pitchFamily="50" charset="-127"/>
+              <a:ea typeface="맑은 고딕" panose="020B0503020000020004" pitchFamily="50" charset="-127"/>
+              <a:cs typeface="Pretendard SemiBold" pitchFamily="50" charset="-127"/>
+            </a:endParaRPr>
           </a:p>
         </p:txBody>
       </p:sp>
@@ -20726,36 +20963,6 @@
           </a:p>
         </p:txBody>
       </p:sp>
-      <p:pic>
-        <p:nvPicPr>
-          <p:cNvPr id="6" name="그림 5">
-            <a:extLst>
-              <a:ext uri="{FF2B5EF4-FFF2-40B4-BE49-F238E27FC236}">
-                <a16:creationId xmlns:a16="http://schemas.microsoft.com/office/drawing/2014/main" id="{0F672FB9-6BFF-06B9-A374-8F1DBD79F2CE}"/>
-              </a:ext>
-            </a:extLst>
-          </p:cNvPr>
-          <p:cNvPicPr>
-            <a:picLocks noChangeAspect="1"/>
-          </p:cNvPicPr>
-          <p:nvPr/>
-        </p:nvPicPr>
-        <p:blipFill>
-          <a:blip r:embed="rId3"/>
-          <a:stretch>
-            <a:fillRect/>
-          </a:stretch>
-        </p:blipFill>
-        <p:spPr>
-          <a:xfrm>
-            <a:off x="148431" y="2298334"/>
-            <a:ext cx="4923089" cy="2039565"/>
-          </a:xfrm>
-          <a:prstGeom prst="rect">
-            <a:avLst/>
-          </a:prstGeom>
-        </p:spPr>
-      </p:pic>
       <p:grpSp>
         <p:nvGrpSpPr>
           <p:cNvPr id="28" name="그룹 27">
@@ -23059,6 +23266,36 @@
           </a:p>
         </p:txBody>
       </p:sp>
+      <p:pic>
+        <p:nvPicPr>
+          <p:cNvPr id="3" name="그림 2">
+            <a:extLst>
+              <a:ext uri="{FF2B5EF4-FFF2-40B4-BE49-F238E27FC236}">
+                <a16:creationId xmlns:a16="http://schemas.microsoft.com/office/drawing/2014/main" id="{FCA8E44D-DA09-8B0E-1808-01FF522D32B7}"/>
+              </a:ext>
+            </a:extLst>
+          </p:cNvPr>
+          <p:cNvPicPr>
+            <a:picLocks noChangeAspect="1"/>
+          </p:cNvPicPr>
+          <p:nvPr/>
+        </p:nvPicPr>
+        <p:blipFill>
+          <a:blip r:embed="rId3"/>
+          <a:stretch>
+            <a:fillRect/>
+          </a:stretch>
+        </p:blipFill>
+        <p:spPr>
+          <a:xfrm>
+            <a:off x="187453" y="2496949"/>
+            <a:ext cx="4784783" cy="1705533"/>
+          </a:xfrm>
+          <a:prstGeom prst="rect">
+            <a:avLst/>
+          </a:prstGeom>
+        </p:spPr>
+      </p:pic>
     </p:spTree>
     <p:extLst>
       <p:ext uri="{BB962C8B-B14F-4D97-AF65-F5344CB8AC3E}">
@@ -28294,6 +28531,36 @@
           </a:p>
         </p:txBody>
       </p:sp>
+      <p:pic>
+        <p:nvPicPr>
+          <p:cNvPr id="6" name="그림 5">
+            <a:extLst>
+              <a:ext uri="{FF2B5EF4-FFF2-40B4-BE49-F238E27FC236}">
+                <a16:creationId xmlns:a16="http://schemas.microsoft.com/office/drawing/2014/main" id="{8EFC6649-A19F-B25E-A1AB-D52F70288835}"/>
+              </a:ext>
+            </a:extLst>
+          </p:cNvPr>
+          <p:cNvPicPr>
+            <a:picLocks noChangeAspect="1"/>
+          </p:cNvPicPr>
+          <p:nvPr/>
+        </p:nvPicPr>
+        <p:blipFill>
+          <a:blip r:embed="rId3"/>
+          <a:stretch>
+            <a:fillRect/>
+          </a:stretch>
+        </p:blipFill>
+        <p:spPr>
+          <a:xfrm>
+            <a:off x="248965" y="2302478"/>
+            <a:ext cx="5050068" cy="3231593"/>
+          </a:xfrm>
+          <a:prstGeom prst="rect">
+            <a:avLst/>
+          </a:prstGeom>
+        </p:spPr>
+      </p:pic>
     </p:spTree>
     <p:extLst>
       <p:ext uri="{BB962C8B-B14F-4D97-AF65-F5344CB8AC3E}">
@@ -29794,6 +30061,392 @@
           </a:p>
         </p:txBody>
       </p:sp>
+      <p:pic>
+        <p:nvPicPr>
+          <p:cNvPr id="4" name="그림 3">
+            <a:extLst>
+              <a:ext uri="{FF2B5EF4-FFF2-40B4-BE49-F238E27FC236}">
+                <a16:creationId xmlns:a16="http://schemas.microsoft.com/office/drawing/2014/main" id="{7CD70E2F-7B18-CC87-2FDD-357FF73B880E}"/>
+              </a:ext>
+            </a:extLst>
+          </p:cNvPr>
+          <p:cNvPicPr>
+            <a:picLocks noChangeAspect="1"/>
+          </p:cNvPicPr>
+          <p:nvPr/>
+        </p:nvPicPr>
+        <p:blipFill>
+          <a:blip r:embed="rId3"/>
+          <a:stretch>
+            <a:fillRect/>
+          </a:stretch>
+        </p:blipFill>
+        <p:spPr>
+          <a:xfrm>
+            <a:off x="304671" y="1850033"/>
+            <a:ext cx="5112778" cy="2914859"/>
+          </a:xfrm>
+          <a:prstGeom prst="rect">
+            <a:avLst/>
+          </a:prstGeom>
+        </p:spPr>
+      </p:pic>
+      <p:pic>
+        <p:nvPicPr>
+          <p:cNvPr id="6" name="그림 5">
+            <a:extLst>
+              <a:ext uri="{FF2B5EF4-FFF2-40B4-BE49-F238E27FC236}">
+                <a16:creationId xmlns:a16="http://schemas.microsoft.com/office/drawing/2014/main" id="{AF963762-B252-D6B7-B3AB-32E58E3F505F}"/>
+              </a:ext>
+            </a:extLst>
+          </p:cNvPr>
+          <p:cNvPicPr>
+            <a:picLocks noChangeAspect="1"/>
+          </p:cNvPicPr>
+          <p:nvPr/>
+        </p:nvPicPr>
+        <p:blipFill>
+          <a:blip r:embed="rId4"/>
+          <a:stretch>
+            <a:fillRect/>
+          </a:stretch>
+        </p:blipFill>
+        <p:spPr>
+          <a:xfrm>
+            <a:off x="474354" y="4955898"/>
+            <a:ext cx="4385487" cy="1698552"/>
+          </a:xfrm>
+          <a:prstGeom prst="rect">
+            <a:avLst/>
+          </a:prstGeom>
+        </p:spPr>
+      </p:pic>
+      <p:sp>
+        <p:nvSpPr>
+          <p:cNvPr id="12" name="모서리가 둥근 직사각형 4">
+            <a:extLst>
+              <a:ext uri="{FF2B5EF4-FFF2-40B4-BE49-F238E27FC236}">
+                <a16:creationId xmlns:a16="http://schemas.microsoft.com/office/drawing/2014/main" id="{5C9B4766-24B2-B64B-C8E5-EEF5B36FBBAA}"/>
+              </a:ext>
+            </a:extLst>
+          </p:cNvPr>
+          <p:cNvSpPr/>
+          <p:nvPr/>
+        </p:nvSpPr>
+        <p:spPr>
+          <a:xfrm>
+            <a:off x="304671" y="6105177"/>
+            <a:ext cx="3561831" cy="300390"/>
+          </a:xfrm>
+          <a:prstGeom prst="roundRect">
+            <a:avLst/>
+          </a:prstGeom>
+          <a:noFill/>
+          <a:ln w="69850"/>
+        </p:spPr>
+        <p:style>
+          <a:lnRef idx="2">
+            <a:schemeClr val="accent5"/>
+          </a:lnRef>
+          <a:fillRef idx="1">
+            <a:schemeClr val="lt1"/>
+          </a:fillRef>
+          <a:effectRef idx="0">
+            <a:schemeClr val="accent5"/>
+          </a:effectRef>
+          <a:fontRef idx="minor">
+            <a:schemeClr val="dk1"/>
+          </a:fontRef>
+        </p:style>
+        <p:txBody>
+          <a:bodyPr rtlCol="0" anchor="ctr"/>
+          <a:lstStyle/>
+          <a:p>
+            <a:pPr algn="ctr"/>
+            <a:endParaRPr kumimoji="1" lang="ko-KR" altLang="en-US"/>
+          </a:p>
+        </p:txBody>
+      </p:sp>
+      <p:grpSp>
+        <p:nvGrpSpPr>
+          <p:cNvPr id="13" name="그룹 12">
+            <a:extLst>
+              <a:ext uri="{FF2B5EF4-FFF2-40B4-BE49-F238E27FC236}">
+                <a16:creationId xmlns:a16="http://schemas.microsoft.com/office/drawing/2014/main" id="{CCE1D089-4F18-DC20-05E7-4D09FA764553}"/>
+              </a:ext>
+            </a:extLst>
+          </p:cNvPr>
+          <p:cNvGrpSpPr/>
+          <p:nvPr/>
+        </p:nvGrpSpPr>
+        <p:grpSpPr>
+          <a:xfrm>
+            <a:off x="9338413" y="2254613"/>
+            <a:ext cx="827314" cy="625293"/>
+            <a:chOff x="7910524" y="234700"/>
+            <a:chExt cx="827314" cy="625293"/>
+          </a:xfrm>
+        </p:grpSpPr>
+        <p:sp>
+          <p:nvSpPr>
+            <p:cNvPr id="14" name="사각형: 둥근 모서리 13">
+              <a:extLst>
+                <a:ext uri="{FF2B5EF4-FFF2-40B4-BE49-F238E27FC236}">
+                  <a16:creationId xmlns:a16="http://schemas.microsoft.com/office/drawing/2014/main" id="{3F8C8813-3F53-F860-EF01-B729CBCEBB02}"/>
+                </a:ext>
+              </a:extLst>
+            </p:cNvPr>
+            <p:cNvSpPr/>
+            <p:nvPr/>
+          </p:nvSpPr>
+          <p:spPr>
+            <a:xfrm>
+              <a:off x="7910524" y="234700"/>
+              <a:ext cx="827314" cy="306099"/>
+            </a:xfrm>
+            <a:prstGeom prst="roundRect">
+              <a:avLst/>
+            </a:prstGeom>
+            <a:noFill/>
+          </p:spPr>
+          <p:style>
+            <a:lnRef idx="2">
+              <a:schemeClr val="accent1">
+                <a:shade val="15000"/>
+              </a:schemeClr>
+            </a:lnRef>
+            <a:fillRef idx="1">
+              <a:schemeClr val="accent1"/>
+            </a:fillRef>
+            <a:effectRef idx="0">
+              <a:schemeClr val="accent1"/>
+            </a:effectRef>
+            <a:fontRef idx="minor">
+              <a:schemeClr val="lt1"/>
+            </a:fontRef>
+          </p:style>
+          <p:txBody>
+            <a:bodyPr rtlCol="0" anchor="ctr"/>
+            <a:lstStyle/>
+            <a:p>
+              <a:pPr algn="ctr"/>
+              <a:r>
+                <a:rPr lang="en-US" altLang="ko-KR" b="1" dirty="0">
+                  <a:solidFill>
+                    <a:srgbClr val="0000FF"/>
+                  </a:solidFill>
+                </a:rPr>
+                <a:t>Front</a:t>
+              </a:r>
+              <a:endParaRPr lang="ko-KR" altLang="en-US" b="1" dirty="0">
+                <a:solidFill>
+                  <a:srgbClr val="0000FF"/>
+                </a:solidFill>
+              </a:endParaRPr>
+            </a:p>
+          </p:txBody>
+        </p:sp>
+        <p:sp>
+          <p:nvSpPr>
+            <p:cNvPr id="15" name="화살표: 아래쪽 14">
+              <a:extLst>
+                <a:ext uri="{FF2B5EF4-FFF2-40B4-BE49-F238E27FC236}">
+                  <a16:creationId xmlns:a16="http://schemas.microsoft.com/office/drawing/2014/main" id="{B9B2B86C-421B-C179-07BE-54881798C1A4}"/>
+                </a:ext>
+              </a:extLst>
+            </p:cNvPr>
+            <p:cNvSpPr/>
+            <p:nvPr/>
+          </p:nvSpPr>
+          <p:spPr>
+            <a:xfrm>
+              <a:off x="8240197" y="553894"/>
+              <a:ext cx="174171" cy="306099"/>
+            </a:xfrm>
+            <a:prstGeom prst="downArrow">
+              <a:avLst/>
+            </a:prstGeom>
+          </p:spPr>
+          <p:style>
+            <a:lnRef idx="2">
+              <a:schemeClr val="accent1">
+                <a:shade val="15000"/>
+              </a:schemeClr>
+            </a:lnRef>
+            <a:fillRef idx="1">
+              <a:schemeClr val="accent1"/>
+            </a:fillRef>
+            <a:effectRef idx="0">
+              <a:schemeClr val="accent1"/>
+            </a:effectRef>
+            <a:fontRef idx="minor">
+              <a:schemeClr val="lt1"/>
+            </a:fontRef>
+          </p:style>
+          <p:txBody>
+            <a:bodyPr rtlCol="0" anchor="ctr"/>
+            <a:lstStyle/>
+            <a:p>
+              <a:pPr algn="ctr"/>
+              <a:endParaRPr lang="ko-KR" altLang="en-US"/>
+            </a:p>
+          </p:txBody>
+        </p:sp>
+      </p:grpSp>
+      <p:sp>
+        <p:nvSpPr>
+          <p:cNvPr id="16" name="화살표: 오른쪽 15">
+            <a:extLst>
+              <a:ext uri="{FF2B5EF4-FFF2-40B4-BE49-F238E27FC236}">
+                <a16:creationId xmlns:a16="http://schemas.microsoft.com/office/drawing/2014/main" id="{71CED910-358E-969B-8EFE-516E0424AA3D}"/>
+              </a:ext>
+            </a:extLst>
+          </p:cNvPr>
+          <p:cNvSpPr/>
+          <p:nvPr/>
+        </p:nvSpPr>
+        <p:spPr>
+          <a:xfrm>
+            <a:off x="7078409" y="2298904"/>
+            <a:ext cx="1964863" cy="205841"/>
+          </a:xfrm>
+          <a:prstGeom prst="rightArrow">
+            <a:avLst/>
+          </a:prstGeom>
+          <a:solidFill>
+            <a:schemeClr val="tx1"/>
+          </a:solidFill>
+        </p:spPr>
+        <p:style>
+          <a:lnRef idx="2">
+            <a:schemeClr val="accent1">
+              <a:shade val="15000"/>
+            </a:schemeClr>
+          </a:lnRef>
+          <a:fillRef idx="1">
+            <a:schemeClr val="accent1"/>
+          </a:fillRef>
+          <a:effectRef idx="0">
+            <a:schemeClr val="accent1"/>
+          </a:effectRef>
+          <a:fontRef idx="minor">
+            <a:schemeClr val="lt1"/>
+          </a:fontRef>
+        </p:style>
+        <p:txBody>
+          <a:bodyPr rtlCol="0" anchor="ctr"/>
+          <a:lstStyle/>
+          <a:p>
+            <a:pPr algn="ctr"/>
+            <a:endParaRPr lang="ko-KR" altLang="en-US"/>
+          </a:p>
+        </p:txBody>
+      </p:sp>
+      <p:sp>
+        <p:nvSpPr>
+          <p:cNvPr id="17" name="TextBox 16">
+            <a:extLst>
+              <a:ext uri="{FF2B5EF4-FFF2-40B4-BE49-F238E27FC236}">
+                <a16:creationId xmlns:a16="http://schemas.microsoft.com/office/drawing/2014/main" id="{61E0184B-0B05-D837-70A5-8FA3D8ADA2A2}"/>
+              </a:ext>
+            </a:extLst>
+          </p:cNvPr>
+          <p:cNvSpPr txBox="1"/>
+          <p:nvPr/>
+        </p:nvSpPr>
+        <p:spPr>
+          <a:xfrm>
+            <a:off x="7078409" y="1766859"/>
+            <a:ext cx="2098327" cy="361959"/>
+          </a:xfrm>
+          <a:prstGeom prst="rect">
+            <a:avLst/>
+          </a:prstGeom>
+          <a:noFill/>
+        </p:spPr>
+        <p:txBody>
+          <a:bodyPr wrap="square" lIns="0" tIns="0" rIns="0" bIns="0" rtlCol="0">
+            <a:spAutoFit/>
+          </a:bodyPr>
+          <a:lstStyle/>
+          <a:p>
+            <a:pPr>
+              <a:lnSpc>
+                <a:spcPct val="150000"/>
+              </a:lnSpc>
+            </a:pPr>
+            <a:r>
+              <a:rPr lang="en-US" altLang="ko-KR" b="1" dirty="0">
+                <a:ln>
+                  <a:solidFill>
+                    <a:schemeClr val="tx1">
+                      <a:alpha val="0"/>
+                    </a:schemeClr>
+                  </a:solidFill>
+                </a:ln>
+                <a:solidFill>
+                  <a:srgbClr val="2E71EA"/>
+                </a:solidFill>
+                <a:latin typeface="맑은 고딕" panose="020B0503020000020004" pitchFamily="50" charset="-127"/>
+                <a:ea typeface="맑은 고딕" panose="020B0503020000020004" pitchFamily="50" charset="-127"/>
+                <a:cs typeface="Pretendard SemiBold" pitchFamily="50" charset="-127"/>
+              </a:rPr>
+              <a:t>- </a:t>
+            </a:r>
+            <a:r>
+              <a:rPr lang="en-US" altLang="ko-KR" b="1" dirty="0" err="1">
+                <a:ln>
+                  <a:solidFill>
+                    <a:schemeClr val="tx1">
+                      <a:alpha val="0"/>
+                    </a:schemeClr>
+                  </a:solidFill>
+                </a:ln>
+                <a:solidFill>
+                  <a:srgbClr val="2E71EA"/>
+                </a:solidFill>
+                <a:latin typeface="맑은 고딕" panose="020B0503020000020004" pitchFamily="50" charset="-127"/>
+                <a:ea typeface="맑은 고딕" panose="020B0503020000020004" pitchFamily="50" charset="-127"/>
+                <a:cs typeface="Pretendard SemiBold" pitchFamily="50" charset="-127"/>
+              </a:rPr>
+              <a:t>get_ring_data</a:t>
+            </a:r>
+            <a:r>
+              <a:rPr lang="en-US" altLang="ko-KR" b="1" dirty="0">
+                <a:ln>
+                  <a:solidFill>
+                    <a:schemeClr val="tx1">
+                      <a:alpha val="0"/>
+                    </a:schemeClr>
+                  </a:solidFill>
+                </a:ln>
+                <a:solidFill>
+                  <a:srgbClr val="2E71EA"/>
+                </a:solidFill>
+                <a:latin typeface="맑은 고딕" panose="020B0503020000020004" pitchFamily="50" charset="-127"/>
+                <a:ea typeface="맑은 고딕" panose="020B0503020000020004" pitchFamily="50" charset="-127"/>
+                <a:cs typeface="Pretendard SemiBold" pitchFamily="50" charset="-127"/>
+              </a:rPr>
+              <a:t>()</a:t>
+            </a:r>
+            <a:endParaRPr lang="ko-KR" altLang="en-US" b="1" dirty="0">
+              <a:ln>
+                <a:solidFill>
+                  <a:schemeClr val="tx1">
+                    <a:alpha val="0"/>
+                  </a:schemeClr>
+                </a:solidFill>
+              </a:ln>
+              <a:solidFill>
+                <a:srgbClr val="2E71EA"/>
+              </a:solidFill>
+              <a:latin typeface="맑은 고딕" panose="020B0503020000020004" pitchFamily="50" charset="-127"/>
+              <a:ea typeface="맑은 고딕" panose="020B0503020000020004" pitchFamily="50" charset="-127"/>
+              <a:cs typeface="Pretendard SemiBold" pitchFamily="50" charset="-127"/>
+            </a:endParaRPr>
+          </a:p>
+        </p:txBody>
+      </p:sp>
     </p:spTree>
     <p:extLst>
       <p:ext uri="{BB962C8B-B14F-4D97-AF65-F5344CB8AC3E}">
@@ -31250,6 +31903,112 @@
           <a:xfrm>
             <a:off x="5834716" y="3233410"/>
             <a:ext cx="3496224" cy="365760"/>
+          </a:xfrm>
+          <a:prstGeom prst="roundRect">
+            <a:avLst/>
+          </a:prstGeom>
+          <a:noFill/>
+          <a:ln w="69850"/>
+        </p:spPr>
+        <p:style>
+          <a:lnRef idx="2">
+            <a:schemeClr val="accent5"/>
+          </a:lnRef>
+          <a:fillRef idx="1">
+            <a:schemeClr val="lt1"/>
+          </a:fillRef>
+          <a:effectRef idx="0">
+            <a:schemeClr val="accent5"/>
+          </a:effectRef>
+          <a:fontRef idx="minor">
+            <a:schemeClr val="dk1"/>
+          </a:fontRef>
+        </p:style>
+        <p:txBody>
+          <a:bodyPr rtlCol="0" anchor="ctr"/>
+          <a:lstStyle/>
+          <a:p>
+            <a:pPr algn="ctr"/>
+            <a:endParaRPr kumimoji="1" lang="ko-KR" altLang="en-US"/>
+          </a:p>
+        </p:txBody>
+      </p:sp>
+      <p:pic>
+        <p:nvPicPr>
+          <p:cNvPr id="4" name="그림 3">
+            <a:extLst>
+              <a:ext uri="{FF2B5EF4-FFF2-40B4-BE49-F238E27FC236}">
+                <a16:creationId xmlns:a16="http://schemas.microsoft.com/office/drawing/2014/main" id="{520B8BAF-414C-9C5B-AADA-9ADC6C69D28D}"/>
+              </a:ext>
+            </a:extLst>
+          </p:cNvPr>
+          <p:cNvPicPr>
+            <a:picLocks noChangeAspect="1"/>
+          </p:cNvPicPr>
+          <p:nvPr/>
+        </p:nvPicPr>
+        <p:blipFill>
+          <a:blip r:embed="rId3"/>
+          <a:stretch>
+            <a:fillRect/>
+          </a:stretch>
+        </p:blipFill>
+        <p:spPr>
+          <a:xfrm>
+            <a:off x="319415" y="2339836"/>
+            <a:ext cx="5152714" cy="707571"/>
+          </a:xfrm>
+          <a:prstGeom prst="rect">
+            <a:avLst/>
+          </a:prstGeom>
+        </p:spPr>
+      </p:pic>
+      <p:pic>
+        <p:nvPicPr>
+          <p:cNvPr id="12" name="그림 11">
+            <a:extLst>
+              <a:ext uri="{FF2B5EF4-FFF2-40B4-BE49-F238E27FC236}">
+                <a16:creationId xmlns:a16="http://schemas.microsoft.com/office/drawing/2014/main" id="{107B8F6D-78EE-CA12-0048-4535F3FE9AD7}"/>
+              </a:ext>
+            </a:extLst>
+          </p:cNvPr>
+          <p:cNvPicPr>
+            <a:picLocks noChangeAspect="1"/>
+          </p:cNvPicPr>
+          <p:nvPr/>
+        </p:nvPicPr>
+        <p:blipFill>
+          <a:blip r:embed="rId4"/>
+          <a:stretch>
+            <a:fillRect/>
+          </a:stretch>
+        </p:blipFill>
+        <p:spPr>
+          <a:xfrm>
+            <a:off x="668154" y="3810594"/>
+            <a:ext cx="4385487" cy="1698552"/>
+          </a:xfrm>
+          <a:prstGeom prst="rect">
+            <a:avLst/>
+          </a:prstGeom>
+        </p:spPr>
+      </p:pic>
+      <p:sp>
+        <p:nvSpPr>
+          <p:cNvPr id="13" name="모서리가 둥근 직사각형 4">
+            <a:extLst>
+              <a:ext uri="{FF2B5EF4-FFF2-40B4-BE49-F238E27FC236}">
+                <a16:creationId xmlns:a16="http://schemas.microsoft.com/office/drawing/2014/main" id="{5457E9ED-1133-C638-2711-89D61DFE000D}"/>
+              </a:ext>
+            </a:extLst>
+          </p:cNvPr>
+          <p:cNvSpPr/>
+          <p:nvPr/>
+        </p:nvSpPr>
+        <p:spPr>
+          <a:xfrm>
+            <a:off x="596810" y="4017045"/>
+            <a:ext cx="3561831" cy="300390"/>
           </a:xfrm>
           <a:prstGeom prst="roundRect">
             <a:avLst/>

--- a/21_c_study/example/ring_buf/ring_buffer.pptx
+++ b/21_c_study/example/ring_buf/ring_buffer.pptx
@@ -23651,36 +23651,6 @@
           </a:p>
         </p:txBody>
       </p:sp>
-      <p:pic>
-        <p:nvPicPr>
-          <p:cNvPr id="34" name="그림 33">
-            <a:extLst>
-              <a:ext uri="{FF2B5EF4-FFF2-40B4-BE49-F238E27FC236}">
-                <a16:creationId xmlns:a16="http://schemas.microsoft.com/office/drawing/2014/main" id="{E5E9F4B0-8FEE-DEEB-1687-F2D557F526C3}"/>
-              </a:ext>
-            </a:extLst>
-          </p:cNvPr>
-          <p:cNvPicPr>
-            <a:picLocks noChangeAspect="1"/>
-          </p:cNvPicPr>
-          <p:nvPr/>
-        </p:nvPicPr>
-        <p:blipFill>
-          <a:blip r:embed="rId3"/>
-          <a:stretch>
-            <a:fillRect/>
-          </a:stretch>
-        </p:blipFill>
-        <p:spPr>
-          <a:xfrm>
-            <a:off x="204772" y="1723097"/>
-            <a:ext cx="4543088" cy="4241760"/>
-          </a:xfrm>
-          <a:prstGeom prst="rect">
-            <a:avLst/>
-          </a:prstGeom>
-        </p:spPr>
-      </p:pic>
       <p:graphicFrame>
         <p:nvGraphicFramePr>
           <p:cNvPr id="35" name="표 34">
@@ -26004,6 +25974,36 @@
           </a:p>
         </p:txBody>
       </p:sp>
+      <p:pic>
+        <p:nvPicPr>
+          <p:cNvPr id="3" name="그림 2">
+            <a:extLst>
+              <a:ext uri="{FF2B5EF4-FFF2-40B4-BE49-F238E27FC236}">
+                <a16:creationId xmlns:a16="http://schemas.microsoft.com/office/drawing/2014/main" id="{ADD5927C-B882-53C0-89D5-A0F2C40ACA95}"/>
+              </a:ext>
+            </a:extLst>
+          </p:cNvPr>
+          <p:cNvPicPr>
+            <a:picLocks noChangeAspect="1"/>
+          </p:cNvPicPr>
+          <p:nvPr/>
+        </p:nvPicPr>
+        <p:blipFill>
+          <a:blip r:embed="rId3"/>
+          <a:stretch>
+            <a:fillRect/>
+          </a:stretch>
+        </p:blipFill>
+        <p:spPr>
+          <a:xfrm>
+            <a:off x="122957" y="1922160"/>
+            <a:ext cx="5105325" cy="4564574"/>
+          </a:xfrm>
+          <a:prstGeom prst="rect">
+            <a:avLst/>
+          </a:prstGeom>
+        </p:spPr>
+      </p:pic>
     </p:spTree>
     <p:extLst>
       <p:ext uri="{BB962C8B-B14F-4D97-AF65-F5344CB8AC3E}">
